--- a/vta/slides/Ventilator_Academy_Full_Course.pptx
+++ b/vta/slides/Ventilator_Academy_Full_Course.pptx
@@ -1220,7 +1220,7 @@
               <a:t>Acute respiratory failure is defined by gas-exchange criteria. Type I, hypoxic respiratory failure, is PaO₂ less than 60 mmHg on room air. The CO₂ is typically normal or low because the patient is hyperventilating in compensation. Common causes: pneumonia, acute pulmonary edema, ARDS, pulmonary embolism, pulmonary contusion.
 Type II, hypercapnic respiratory failure, is PaCO₂ greater than 50 mmHg accompanied by a pH less than 7.35. The pH requirement matters because chronic CO₂ retainers (stable COPD, for example) live with PaCO₂ in the 60s while their kidneys retain bicarbonate, keeping pH near normal. An acute rise in CO₂ has no time to compensate — pH crashes, and that acidosis defines the failure.
 Mixed failure (Type I + Type II) is common: pneumonia in a COPD patient, ARDS with respiratory fatigue. Treat what you see.
-PEARL — ABGs in EMS: We rarely have an arterial blood gas prehospital. Clinical signs + EtCO₂ + SpO₂ give us the same diagnosis a few minutes earlier than the lab does. Don't wait for the gas.</a:t>
+PEARL — ABGs in EMS: We rarely have an arterial blood gas prehospital. Clinical signs + EtCO₂ + SpO₂ support recognition and let you act early — but they do NOT replace an ABG. The PaCO₂–EtCO₂ gap widens with shock and V/Q mismatch, so EtCO₂ can under-read a rising PaCO₂. Treat on the clinical picture; confirm gas exchange with an ABG when available.</a:t>
             </a:r>
             <a:endParaRPr lang="en-US" dirty="0"/>
           </a:p>
@@ -3837,7 +3837,7 @@
 Examples. 5'6" man: 50 + 2.3 × 6 = 63.8 kg → safe Vt 380–510 mL. 5'10" woman: 45.5 + 2.3 × 10 = 68.5 kg → safe Vt 410–548 mL.
 Safe adult defaults to defend: AC/VC mode; Vt 6–8 mL/kg IBW; RR 14, titrated to EtCO₂ 35–45; FiO₂ 100% then wean; PEEP 5; I:E 1:2; alarms PIP 35, low MV 4, low PEEP 3, apnea 20 sec.
 When in doubt, return to defaults. Change ONE thing at a time, reassess in 30 seconds, and document with vitals before and after.
-PEARL — 5'10" rule of thumb: 5'10" adult ≈ 73 kg IBW → Vt 440–580 mL. Memorize this anchor for when you don't have a card handy.</a:t>
+PEARL — 5'10" rule of thumb: IBW is sex-specific — one number won't do. By the Devine formulas a 5'10" man ≈ 73 kg (Vt 440–580 mL) and a 5'10" woman ≈ 68.5 kg (Vt 410–548 mL). Anchor to the patient's sex and height, never actual weight.</a:t>
             </a:r>
             <a:endParaRPr lang="en-US" dirty="0"/>
           </a:p>
@@ -5361,9 +5361,9 @@
           <a:p>
             <a:r>
               <a:rPr lang="en-US" dirty="0"/>
-              <a:t>Internal battery: lithium-ion, ~60 min at moderate load. Drains FASTER at high FiO₂, high PEEP, rapid rates. Worst-case: ~30 min.
+              <a:t>Internal battery: sealed lead-acid, ~45 min at nominal settings (per the LTV operator manual). Drains FASTER at high FiO₂, high PEEP, rapid rates — plan far less for a sick lung. Always confirm runtime against your unit's manual.
 Battery health degrades over service life. A unit in service &gt; 3 years and never replaced will deliver less than spec. Document unexpected battery alarms.
-On the truck: confirm "line power" on the display before loading the patient. If the AC plug bumps loose, the LTV switches silently to battery without alarm.
+On the truck: confirm "line power" on the display before loading the patient. If external power is lost, the LTV annunciates a POWER LOST alarm and transfers to the internal battery — the switch is NOT silent; acknowledge the alarm and restore AC.
 Pre-flight rule: 100% battery + line power confirmed = ready. Test external battery packs under load — a pack that holds static charge but fails under demand is a transport hazard.</a:t>
             </a:r>
             <a:endParaRPr lang="en-US" dirty="0"/>
@@ -5640,8 +5640,10 @@
 LOW PRESSURE / LOW PEEP — circuit leak, disconnect, ETT cuff leak. Default 4 cmH₂O below set PEEP.
 LOW MINUTE VOLUME — exhaled MV below threshold. Default is often 0 — set this to ~70% of expected MV.
 APNEA — no detected breath in apnea time (default 20 sec). Triggered by complete loss of effort or sensor failure.
-POWER FAILURE / LOW BATTERY — switch to AC immediately. GAS SUPPLY — O₂ source pressure low; check tank, regulator, hose.
-Triage: READ the alarm BEFORE silencing. Silencing without identifying the cause is a sentinel-level safety event.</a:t>
+POWER LOST / LOW BATTERY — external power lost (transfer to internal battery) or battery depleting. Restore AC promptly.
+GAS SUPPLY — O₂ source pressure low; check tank, regulator, and hose.
+Triage: READ the alarm BEFORE silencing. Silencing without identifying the cause is a sentinel-level safety event.
+This is the core set — the operator manual lists additional device and self-test alarms. Know your unit's full alarm list before transport.</a:t>
             </a:r>
             <a:endParaRPr lang="en-US" dirty="0"/>
           </a:p>
@@ -5824,7 +5826,7 @@
             <a:r>
               <a:rPr lang="en-US" dirty="0"/>
               <a:t>Safe-change workflow: 1) Verbalize the change BEFORE you turn the dial. 2) Press SELECT to navigate. 3) Rotate CONTROL knob. 4) Press SELECT (or wait 5 sec) to commit. 5) Reassess in 30 sec. 6) Document with vitals before AND after.
-Common pitfalls from incident reviews: forgetting to set LOW MV alarm; setting PEEP at the dial but forgetting to attach the PEEP valve; pediatric patient on the adult circuit (dead space &gt; Vt); battery silently switching to internal when AC plug bumps loose; POST skipped because "the next shift will do it."</a:t>
+Common pitfalls from incident reviews: forgetting to set LOW MV alarm; setting PEEP at the dial but forgetting to attach the PEEP valve; pediatric patient on the adult circuit (dead space &gt; Vt); missing the POWER LOST alarm when the AC plug bumps loose and the unit transfers to internal battery; POST skipped because "the next shift will do it."</a:t>
             </a:r>
             <a:endParaRPr lang="en-US" dirty="0"/>
           </a:p>
@@ -7718,11 +7720,11 @@
           <a:p>
             <a:r>
               <a:rPr lang="en-US" dirty="0"/>
-              <a:t>Post-intubation hypotension affects ~25% of EMS RSI (Heffner 2012). The fix is anticipation.
-Push-dose epinephrine — first-line for most EMS shock states. Mix 1 mg (1:10,000) into 100 mL NS = 10 mcg/mL. Dose 5–20 mcg IV (typically 10 mcg) every 1–5 min. Onset 1 min, duration 5–10 min. Inotropy + vasoconstriction.
+              <a:t>Post-intubation hypotension is common after emergency intubation — about 25% in Heffner's 2012 emergency-department cohort (an ED, not prehospital, study; anticipate it in the field too). The fix is anticipation.
+Push-dose epinephrine — a rapid bridge for peri-intubation hypotension. Mix 1 mg (1:10,000) into 100 mL NS = 10 mcg/mL. Dose 5–20 mcg IV (typically 10 mcg) every 1–5 min. Onset 1 min, duration 5–10 min. Inotropy + vasoconstriction. It buys time until a continuous infusion is running — it is not the definitive pressor.
 Push-dose phenylephrine — alternative when avoiding tachycardia. Mix 10 mg into 100 mL NS = 100 mcg/mL. Dose 50–200 mcg IV q1–5 min. Pure α-agonist; reflex bradycardia possible.
 Label every syringe clearly. Document every push. Move to a continuous infusion as soon as practical — norepinephrine is the first-line infused vasopressor for most shock states (Surviving Sepsis 2021), started at 0.05–0.1 mcg/kg/min and titrated to MAP ≥ 65, and it can run peripherally through a good IV for transport. Push-dose pressors are a bridge to that infusion.
-EVIDENCE — Post-intubation hypotension: Heffner 2012: incidence ~25% in EMS RSI. Higher in shock states. Always have push-dose pressors prepared before pushing the induction agent.</a:t>
+EVIDENCE — Post-intubation hypotension: Heffner 2012: ~25% incidence in an emergency-department intubation cohort (not a prehospital study). Higher in shock states. Always have push-dose pressors prepared before pushing the induction agent.</a:t>
             </a:r>
             <a:endParaRPr lang="en-US" dirty="0"/>
           </a:p>
@@ -9782,7 +9784,7 @@
         <p:spPr>
           <a:xfrm>
             <a:off x="548640" y="2148840"/>
-            <a:ext cx="10058400" cy="4114800"/>
+            <a:ext cx="10058400" cy="4160520"/>
           </a:xfrm>
           <a:prstGeom prst="rect">
             <a:avLst/>
@@ -9799,7 +9801,7 @@
                 <a:spcPct val="100000"/>
               </a:lnSpc>
               <a:spcAft>
-                <a:spcPts val="900"/>
+                <a:spcPts val="1000"/>
               </a:spcAft>
               <a:buSzPct val="100000"/>
               <a:buChar char="•"/>
@@ -9813,7 +9815,7 @@
                 <a:ea typeface="Calibri" pitchFamily="34" charset="-122"/>
                 <a:cs typeface="Calibri" pitchFamily="34" charset="-120"/>
               </a:rPr>
-              <a:t>Imagine blowing up a balloon through a straw — two completely separate things can make it hard.</a:t>
+              <a:t>Imagine blowing up a balloon through a straw — two completely separate things can make it hard. The first is the balloon's stiffness. That is compliance: how much volume the lung accepts for a given pressure.</a:t>
             </a:r>
             <a:endParaRPr lang="en-US" sz="1550" dirty="0"/>
           </a:p>
@@ -9823,7 +9825,7 @@
                 <a:spcPct val="100000"/>
               </a:lnSpc>
               <a:spcAft>
-                <a:spcPts val="900"/>
+                <a:spcPts val="1000"/>
               </a:spcAft>
               <a:buSzPct val="100000"/>
               <a:buChar char="•"/>
@@ -9837,7 +9839,7 @@
                 <a:ea typeface="Calibri" pitchFamily="34" charset="-122"/>
                 <a:cs typeface="Calibri" pitchFamily="34" charset="-120"/>
               </a:rPr>
-              <a:t>The second is the straw's narrowness.</a:t>
+              <a:t>The second is the straw's narrowness. That is resistance: how hard the airway pushes back against airflow.</a:t>
             </a:r>
             <a:endParaRPr lang="en-US" sz="1550" dirty="0"/>
           </a:p>
@@ -9847,7 +9849,7 @@
                 <a:spcPct val="100000"/>
               </a:lnSpc>
               <a:spcAft>
-                <a:spcPts val="900"/>
+                <a:spcPts val="1000"/>
               </a:spcAft>
               <a:buSzPct val="100000"/>
               <a:buChar char="•"/>
@@ -9861,7 +9863,7 @@
                 <a:ea typeface="Calibri" pitchFamily="34" charset="-122"/>
                 <a:cs typeface="Calibri" pitchFamily="34" charset="-120"/>
               </a:rPr>
-              <a:t>Both can raise PIP on the ventilator — but only reduced compliance raises Pplat.</a:t>
+              <a:t>Both can raise PIP on the ventilator — but only reduced compliance raises Pplat. That distinction is the foundation of bedside troubleshooting and the subject of the next lesson.</a:t>
             </a:r>
             <a:endParaRPr lang="en-US" sz="1550" dirty="0"/>
           </a:p>
@@ -10025,7 +10027,7 @@
         <p:spPr>
           <a:xfrm>
             <a:off x="548640" y="2148840"/>
-            <a:ext cx="6309360" cy="4114800"/>
+            <a:ext cx="6309360" cy="4160520"/>
           </a:xfrm>
           <a:prstGeom prst="rect">
             <a:avLst/>
@@ -10042,7 +10044,7 @@
                 <a:spcPct val="100000"/>
               </a:lnSpc>
               <a:spcAft>
-                <a:spcPts val="900"/>
+                <a:spcPts val="1000"/>
               </a:spcAft>
               <a:buSzPct val="100000"/>
               <a:buChar char="•"/>
@@ -10066,7 +10068,7 @@
                 <a:spcPct val="100000"/>
               </a:lnSpc>
               <a:spcAft>
-                <a:spcPts val="900"/>
+                <a:spcPts val="1000"/>
               </a:spcAft>
               <a:buSzPct val="100000"/>
               <a:buChar char="•"/>
@@ -10080,7 +10082,7 @@
                 <a:ea typeface="Calibri" pitchFamily="34" charset="-122"/>
                 <a:cs typeface="Calibri" pitchFamily="34" charset="-120"/>
               </a:rPr>
-              <a:t>The relationship is mechanical: PIP is approximately Pplat plus (Resistance × Flow).</a:t>
+              <a:t>The relationship is mechanical: PIP is approximately Pplat plus (Resistance × Flow). Clog the nozzle and resistance rises — PIP climbs but Pplat does not. Stiffen the balloon and both rise together.</a:t>
             </a:r>
             <a:endParaRPr lang="en-US" sz="1550" dirty="0"/>
           </a:p>
@@ -10090,7 +10092,7 @@
                 <a:spcPct val="100000"/>
               </a:lnSpc>
               <a:spcAft>
-                <a:spcPts val="900"/>
+                <a:spcPts val="1000"/>
               </a:spcAft>
               <a:buSzPct val="100000"/>
               <a:buChar char="•"/>
@@ -10114,7 +10116,7 @@
                 <a:spcPct val="100000"/>
               </a:lnSpc>
               <a:spcAft>
-                <a:spcPts val="900"/>
+                <a:spcPts val="1000"/>
               </a:spcAft>
               <a:buSzPct val="100000"/>
               <a:buChar char="•"/>
@@ -10128,7 +10130,7 @@
                 <a:ea typeface="Calibri" pitchFamily="34" charset="-122"/>
                 <a:cs typeface="Calibri" pitchFamily="34" charset="-120"/>
               </a:rPr>
-              <a:t>Driving pressure (Pplat minus PEEP) has emerged as a strong mortality predictor in ARDS (Amato 2015, NEJM).</a:t>
+              <a:t>Driving pressure (Pplat minus PEEP) has emerged as a strong mortality predictor in ARDS (Amato 2015, NEJM). Aim for ΔP less than 14 cmH₂O. You'll use this rule in Module 4 and again in Module 9.</a:t>
             </a:r>
             <a:endParaRPr lang="en-US" sz="1550" dirty="0"/>
           </a:p>
@@ -10797,7 +10799,9 @@
       </p:sp>
       <p:sp>
         <p:nvSpPr>
-          <p:cNvPr id="14" name="Text 12"/>
+          <p:cNvPr id="14" name="Text 12">
+            <a:hlinkClick r:id="rId1" tooltip="Open this module's simulator mission"/>
+          </p:cNvPr>
           <p:cNvSpPr/>
           <p:nvPr/>
         </p:nvSpPr>
@@ -10820,13 +10824,20 @@
               <a:buNone/>
             </a:pPr>
             <a:r>
-              <a:rPr lang="en-US" sz="1700" b="1" dirty="0">
+              <a:rPr lang="en-US" sz="1700" b="1" u="sng" dirty="0">
                 <a:solidFill>
                   <a:srgbClr val="FFFFFF"/>
                 </a:solidFill>
                 <a:latin typeface="Calibri" pitchFamily="34" charset="0"/>
                 <a:ea typeface="Calibri" pitchFamily="34" charset="-122"/>
                 <a:cs typeface="Calibri" pitchFamily="34" charset="-120"/>
+                <a:hlinkClick r:id="rId1" invalidUrl="" action="" tgtFrame="" tooltip="Open this module's simulator mission" history="1" highlightClick="0" endSnd="0">
+                  <a:extLst>
+                    <a:ext uri="{A12FA001-AC4F-418D-AE19-62706E023703}">
+                      <ahyp:hlinkClr xmlns:ahyp="http://schemas.microsoft.com/office/drawing/2018/hyperlinkcolor" val="tx"/>
+                    </a:ext>
+                  </a:extLst>
+                </a:hlinkClick>
               </a:rPr>
               <a:t>LTV 1200 Simulator</a:t>
             </a:r>
@@ -10859,13 +10870,20 @@
               <a:buNone/>
             </a:pPr>
             <a:r>
-              <a:rPr lang="en-US" sz="1250" dirty="0">
-                <a:solidFill>
-                  <a:srgbClr val="A9C2E0"/>
-                </a:solidFill>
-                <a:latin typeface="Calibri" pitchFamily="34" charset="0"/>
-                <a:ea typeface="Calibri" pitchFamily="34" charset="-122"/>
-                <a:cs typeface="Calibri" pitchFamily="34" charset="-120"/>
+              <a:rPr lang="en-US" sz="1250" u="sng" dirty="0">
+                <a:solidFill>
+                  <a:srgbClr val="7FB0E6"/>
+                </a:solidFill>
+                <a:latin typeface="Calibri" pitchFamily="34" charset="0"/>
+                <a:ea typeface="Calibri" pitchFamily="34" charset="-122"/>
+                <a:cs typeface="Calibri" pitchFamily="34" charset="-120"/>
+                <a:hlinkClick r:id="rId2" invalidUrl="" action="" tgtFrame="" tooltip="" history="1" highlightClick="0" endSnd="0">
+                  <a:extLst>
+                    <a:ext uri="{A12FA001-AC4F-418D-AE19-62706E023703}">
+                      <ahyp:hlinkClr xmlns:ahyp="http://schemas.microsoft.com/office/drawing/2018/hyperlinkcolor" val="tx"/>
+                    </a:ext>
+                  </a:extLst>
+                </a:hlinkClick>
               </a:rPr>
               <a:t>vent-ltv1200.html?level=1  —  Meet the LTV 1200 hands-on — the Level 1 tutorial builds every control from scratch…</a:t>
             </a:r>
@@ -11659,7 +11677,7 @@
                 <a:ea typeface="Calibri" pitchFamily="34" charset="-122"/>
                 <a:cs typeface="Calibri" pitchFamily="34" charset="-120"/>
               </a:rPr>
-              <a:t>Day 1 · Foundations</a:t>
+              <a:t>Foundations</a:t>
             </a:r>
             <a:pPr indent="0" marL="0">
               <a:buNone/>
@@ -11673,7 +11691,7 @@
                 <a:ea typeface="Calibri" pitchFamily="34" charset="-122"/>
                 <a:cs typeface="Calibri" pitchFamily="34" charset="-120"/>
               </a:rPr>
-              <a:t>   ·   ~45 min   ·   7 lessons</a:t>
+              <a:t>   ·   7 lessons</a:t>
             </a:r>
             <a:endParaRPr lang="en-US" sz="1300" dirty="0"/>
           </a:p>
@@ -12865,7 +12883,7 @@
         <p:spPr>
           <a:xfrm>
             <a:off x="548640" y="2148840"/>
-            <a:ext cx="6309360" cy="4114800"/>
+            <a:ext cx="6309360" cy="4160520"/>
           </a:xfrm>
           <a:prstGeom prst="rect">
             <a:avLst/>
@@ -12882,7 +12900,7 @@
                 <a:spcPct val="100000"/>
               </a:lnSpc>
               <a:spcAft>
-                <a:spcPts val="900"/>
+                <a:spcPts val="1000"/>
               </a:spcAft>
               <a:buSzPct val="100000"/>
               <a:buChar char="•"/>
@@ -12896,7 +12914,7 @@
                 <a:ea typeface="Calibri" pitchFamily="34" charset="-122"/>
                 <a:cs typeface="Calibri" pitchFamily="34" charset="-120"/>
               </a:rPr>
-              <a:t>Acute respiratory failure is defined by gas-exchange criteria.</a:t>
+              <a:t>Acute respiratory failure is defined by gas-exchange criteria. Type I, hypoxic respiratory failure, is PaO₂ less than 60 mmHg on room air.</a:t>
             </a:r>
             <a:endParaRPr lang="en-US" sz="1550" dirty="0"/>
           </a:p>
@@ -12906,7 +12924,7 @@
                 <a:spcPct val="100000"/>
               </a:lnSpc>
               <a:spcAft>
-                <a:spcPts val="900"/>
+                <a:spcPts val="1000"/>
               </a:spcAft>
               <a:buSzPct val="100000"/>
               <a:buChar char="•"/>
@@ -12930,7 +12948,7 @@
                 <a:spcPct val="100000"/>
               </a:lnSpc>
               <a:spcAft>
-                <a:spcPts val="900"/>
+                <a:spcPts val="1000"/>
               </a:spcAft>
               <a:buSzPct val="100000"/>
               <a:buChar char="•"/>
@@ -12944,7 +12962,7 @@
                 <a:ea typeface="Calibri" pitchFamily="34" charset="-122"/>
                 <a:cs typeface="Calibri" pitchFamily="34" charset="-120"/>
               </a:rPr>
-              <a:t>Mixed failure (Type I + Type II) is common: pneumonia in a COPD patient, ARDS with respiratory fatigue.</a:t>
+              <a:t>Mixed failure (Type I + Type II) is common: pneumonia in a COPD patient, ARDS with respiratory fatigue. Treat what you see.</a:t>
             </a:r>
             <a:endParaRPr lang="en-US" sz="1550" dirty="0"/>
           </a:p>
@@ -13089,7 +13107,7 @@
                 <a:ea typeface="Calibri" pitchFamily="34" charset="-122"/>
                 <a:cs typeface="Calibri" pitchFamily="34" charset="-120"/>
               </a:rPr>
-              <a:t>We rarely have an arterial blood gas prehospital. Clinical signs + EtCO₂ + SpO₂ give us the same diagnosis a few minutes earlier than the lab does. Don't wait for the gas.</a:t>
+              <a:t>We rarely have an arterial blood gas prehospital. Clinical signs + EtCO₂ + SpO₂ support recognition and let you act early — but they do NOT replace an ABG. The PaCO₂–EtCO₂ gap widens with shock and V/Q mismatch, so EtCO₂ can under-read a rising PaCO₂. Treat on the clinical picture; confirm gas…</a:t>
             </a:r>
             <a:endParaRPr lang="en-US" sz="1350" dirty="0"/>
           </a:p>
@@ -13253,7 +13271,7 @@
         <p:spPr>
           <a:xfrm>
             <a:off x="548640" y="2148840"/>
-            <a:ext cx="6309360" cy="4114800"/>
+            <a:ext cx="6309360" cy="4160520"/>
           </a:xfrm>
           <a:prstGeom prst="rect">
             <a:avLst/>
@@ -13270,13 +13288,13 @@
                 <a:spcPct val="100000"/>
               </a:lnSpc>
               <a:spcAft>
-                <a:spcPts val="900"/>
+                <a:spcPts val="800"/>
               </a:spcAft>
               <a:buSzPct val="100000"/>
               <a:buChar char="•"/>
             </a:pPr>
             <a:r>
-              <a:rPr lang="en-US" sz="1550" dirty="0">
+              <a:rPr lang="en-US" sz="1450" dirty="0">
                 <a:solidFill>
                   <a:srgbClr val="1B2433"/>
                 </a:solidFill>
@@ -13286,7 +13304,7 @@
               </a:rPr>
               <a:t>Pulse oximetry is not linear — the SpO₂/PaO₂ relationship is an S-shaped curve, and that shape is a flat tabletop that ends at a cliff.</a:t>
             </a:r>
-            <a:endParaRPr lang="en-US" sz="1550" dirty="0"/>
+            <a:endParaRPr lang="en-US" sz="1450" dirty="0"/>
           </a:p>
           <a:p>
             <a:pPr marL="177800" indent="-177800">
@@ -13294,13 +13312,13 @@
                 <a:spcPct val="100000"/>
               </a:lnSpc>
               <a:spcAft>
-                <a:spcPts val="900"/>
+                <a:spcPts val="800"/>
               </a:spcAft>
               <a:buSzPct val="100000"/>
               <a:buChar char="•"/>
             </a:pPr>
             <a:r>
-              <a:rPr lang="en-US" sz="1550" dirty="0">
+              <a:rPr lang="en-US" sz="1450" dirty="0">
                 <a:solidFill>
                   <a:srgbClr val="1B2433"/>
                 </a:solidFill>
@@ -13310,7 +13328,7 @@
               </a:rPr>
               <a:t>SpO₂ 100% → PaO₂ ≥ 100 mmHg (the curve is flat on top — very different PaO₂ values produce the same saturation).</a:t>
             </a:r>
-            <a:endParaRPr lang="en-US" sz="1550" dirty="0"/>
+            <a:endParaRPr lang="en-US" sz="1450" dirty="0"/>
           </a:p>
           <a:p>
             <a:pPr marL="177800" indent="-177800">
@@ -13318,13 +13336,13 @@
                 <a:spcPct val="100000"/>
               </a:lnSpc>
               <a:spcAft>
-                <a:spcPts val="900"/>
+                <a:spcPts val="800"/>
               </a:spcAft>
               <a:buSzPct val="100000"/>
               <a:buChar char="•"/>
             </a:pPr>
             <a:r>
-              <a:rPr lang="en-US" sz="1550" dirty="0">
+              <a:rPr lang="en-US" sz="1450" dirty="0">
                 <a:solidFill>
                   <a:srgbClr val="1B2433"/>
                 </a:solidFill>
@@ -13332,9 +13350,9 @@
                 <a:ea typeface="Calibri" pitchFamily="34" charset="-122"/>
                 <a:cs typeface="Calibri" pitchFamily="34" charset="-120"/>
               </a:rPr>
-              <a:t>SpO₂ 95% → PaO₂ ≈ 80 mmHg.</a:t>
-            </a:r>
-            <a:endParaRPr lang="en-US" sz="1550" dirty="0"/>
+              <a:t>SpO₂ 95% → PaO₂ ≈ 80 mmHg. SpO₂ 90% → PaO₂ ≈ 60 mmHg — the edge of the cliff and the threshold for Type I respiratory failure.</a:t>
+            </a:r>
+            <a:endParaRPr lang="en-US" sz="1450" dirty="0"/>
           </a:p>
           <a:p>
             <a:pPr marL="177800" indent="-177800">
@@ -13342,13 +13360,13 @@
                 <a:spcPct val="100000"/>
               </a:lnSpc>
               <a:spcAft>
-                <a:spcPts val="900"/>
+                <a:spcPts val="800"/>
               </a:spcAft>
               <a:buSzPct val="100000"/>
               <a:buChar char="•"/>
             </a:pPr>
             <a:r>
-              <a:rPr lang="en-US" sz="1550" dirty="0">
+              <a:rPr lang="en-US" sz="1450" dirty="0">
                 <a:solidFill>
                   <a:srgbClr val="1B2433"/>
                 </a:solidFill>
@@ -13356,9 +13374,9 @@
                 <a:ea typeface="Calibri" pitchFamily="34" charset="-122"/>
                 <a:cs typeface="Calibri" pitchFamily="34" charset="-120"/>
               </a:rPr>
-              <a:t>SpO₂ 80% → PaO₂ ≈ 45 mmHg.</a:t>
-            </a:r>
-            <a:endParaRPr lang="en-US" sz="1550" dirty="0"/>
+              <a:t>SpO₂ 80% → PaO₂ ≈ 45 mmHg. SpO₂ 70% → PaO₂ ≈ 38 mmHg — minutes from arrest in most adults.</a:t>
+            </a:r>
+            <a:endParaRPr lang="en-US" sz="1450" dirty="0"/>
           </a:p>
           <a:p>
             <a:pPr marL="177800" indent="-177800">
@@ -13366,13 +13384,13 @@
                 <a:spcPct val="100000"/>
               </a:lnSpc>
               <a:spcAft>
-                <a:spcPts val="900"/>
+                <a:spcPts val="800"/>
               </a:spcAft>
               <a:buSzPct val="100000"/>
               <a:buChar char="•"/>
             </a:pPr>
             <a:r>
-              <a:rPr lang="en-US" sz="1550" dirty="0">
+              <a:rPr lang="en-US" sz="1450" dirty="0">
                 <a:solidFill>
                   <a:srgbClr val="1B2433"/>
                 </a:solidFill>
@@ -13380,9 +13398,9 @@
                 <a:ea typeface="Calibri" pitchFamily="34" charset="-122"/>
                 <a:cs typeface="Calibri" pitchFamily="34" charset="-120"/>
               </a:rPr>
-              <a:t>Practical implication: aim for SpO₂ 92–96%.</a:t>
-            </a:r>
-            <a:endParaRPr lang="en-US" sz="1550" dirty="0"/>
+              <a:t>Practical implication: aim for SpO₂ 92–96%. High enough to be off the cliff, low enough to detect deterioration. Targeting 100% does the patient no good and wastes oxygen reserves.</a:t>
+            </a:r>
+            <a:endParaRPr lang="en-US" sz="1450" dirty="0"/>
           </a:p>
         </p:txBody>
       </p:sp>
@@ -13689,7 +13707,7 @@
         <p:spPr>
           <a:xfrm>
             <a:off x="548640" y="2148840"/>
-            <a:ext cx="10058400" cy="4114800"/>
+            <a:ext cx="10058400" cy="4160520"/>
           </a:xfrm>
           <a:prstGeom prst="rect">
             <a:avLst/>
@@ -13706,7 +13724,7 @@
                 <a:spcPct val="100000"/>
               </a:lnSpc>
               <a:spcAft>
-                <a:spcPts val="900"/>
+                <a:spcPts val="1000"/>
               </a:spcAft>
               <a:buSzPct val="100000"/>
               <a:buChar char="•"/>
@@ -13720,7 +13738,7 @@
                 <a:ea typeface="Calibri" pitchFamily="34" charset="-122"/>
                 <a:cs typeface="Calibri" pitchFamily="34" charset="-120"/>
               </a:rPr>
-              <a:t>Hypoxic failure presents first as work-of-breathing changes.</a:t>
+              <a:t>Hypoxic failure presents first as work-of-breathing changes. Tachypnea. Accessory muscle use — sternocleidomastoid, retractions, nasal flaring, tripoding (sitting up with hands braced on knees).</a:t>
             </a:r>
             <a:endParaRPr lang="en-US" sz="1550" dirty="0"/>
           </a:p>
@@ -13730,7 +13748,7 @@
                 <a:spcPct val="100000"/>
               </a:lnSpc>
               <a:spcAft>
-                <a:spcPts val="900"/>
+                <a:spcPts val="1000"/>
               </a:spcAft>
               <a:buSzPct val="100000"/>
               <a:buChar char="•"/>
@@ -13744,7 +13762,7 @@
                 <a:ea typeface="Calibri" pitchFamily="34" charset="-122"/>
                 <a:cs typeface="Calibri" pitchFamily="34" charset="-120"/>
               </a:rPr>
-              <a:t>Mental status is often well-preserved in early Type I failure.</a:t>
+              <a:t>Mental status is often well-preserved in early Type I failure. Hypoxia stimulates ventilation through peripheral chemoreceptors but produces less mental status change than rising CO₂.</a:t>
             </a:r>
             <a:endParaRPr lang="en-US" sz="1550" dirty="0"/>
           </a:p>
@@ -13754,7 +13772,7 @@
                 <a:spcPct val="100000"/>
               </a:lnSpc>
               <a:spcAft>
-                <a:spcPts val="900"/>
+                <a:spcPts val="1000"/>
               </a:spcAft>
               <a:buSzPct val="100000"/>
               <a:buChar char="•"/>
@@ -13768,7 +13786,7 @@
                 <a:ea typeface="Calibri" pitchFamily="34" charset="-122"/>
                 <a:cs typeface="Calibri" pitchFamily="34" charset="-120"/>
               </a:rPr>
-              <a:t>Bedside test for shunt physiology: apply 100% FiO₂ via non-rebreather at flush rate and watch what happens to the saturation.</a:t>
+              <a:t>Bedside test for shunt physiology: apply 100% FiO₂ via non-rebreather at flush rate and watch what happens to the saturation. A patient with diffusion-mediated hypoxia improves quickly.</a:t>
             </a:r>
             <a:endParaRPr lang="en-US" sz="1550" dirty="0"/>
           </a:p>
@@ -13932,7 +13950,7 @@
         <p:spPr>
           <a:xfrm>
             <a:off x="548640" y="2148840"/>
-            <a:ext cx="6309360" cy="4114800"/>
+            <a:ext cx="6309360" cy="4160520"/>
           </a:xfrm>
           <a:prstGeom prst="rect">
             <a:avLst/>
@@ -13949,7 +13967,7 @@
                 <a:spcPct val="100000"/>
               </a:lnSpc>
               <a:spcAft>
-                <a:spcPts val="900"/>
+                <a:spcPts val="1000"/>
               </a:spcAft>
               <a:buSzPct val="100000"/>
               <a:buChar char="•"/>
@@ -13963,7 +13981,7 @@
                 <a:ea typeface="Calibri" pitchFamily="34" charset="-122"/>
                 <a:cs typeface="Calibri" pitchFamily="34" charset="-120"/>
               </a:rPr>
-              <a:t>Hypercapnic failure is more deceptive, because a tiring pump goes quiet, not loud.</a:t>
+              <a:t>Hypercapnic failure is more deceptive, because a tiring pump goes quiet, not loud. A patient retaining CO₂ may look comfortable while the partial pressure climbs — respiratory rate normal or even slowing.</a:t>
             </a:r>
             <a:endParaRPr lang="en-US" sz="1550" dirty="0"/>
           </a:p>
@@ -13973,7 +13991,7 @@
                 <a:spcPct val="100000"/>
               </a:lnSpc>
               <a:spcAft>
-                <a:spcPts val="900"/>
+                <a:spcPts val="1000"/>
               </a:spcAft>
               <a:buSzPct val="100000"/>
               <a:buChar char="•"/>
@@ -13987,7 +14005,7 @@
                 <a:ea typeface="Calibri" pitchFamily="34" charset="-122"/>
                 <a:cs typeface="Calibri" pitchFamily="34" charset="-120"/>
               </a:rPr>
-              <a:t>Mental status correlates with the RATE of CO₂ rise rather than the absolute number.</a:t>
+              <a:t>Mental status correlates with the RATE of CO₂ rise rather than the absolute number. A chronic retainer at PaCO₂ 70 may be cognitively intact; an acute climb to the same value produces somnolence.</a:t>
             </a:r>
             <a:endParaRPr lang="en-US" sz="1550" dirty="0"/>
           </a:p>
@@ -13997,7 +14015,7 @@
                 <a:spcPct val="100000"/>
               </a:lnSpc>
               <a:spcAft>
-                <a:spcPts val="900"/>
+                <a:spcPts val="1000"/>
               </a:spcAft>
               <a:buSzPct val="100000"/>
               <a:buChar char="•"/>
@@ -14011,7 +14029,7 @@
                 <a:ea typeface="Calibri" pitchFamily="34" charset="-122"/>
                 <a:cs typeface="Calibri" pitchFamily="34" charset="-120"/>
               </a:rPr>
-              <a:t>Common scenarios: the COPD patient who tires after a week of escalating bronchospasm; the severe asthmatic whose minute ventilation drops to the point of…</a:t>
+              <a:t>Common scenarios: the COPD patient who tires after a week of escalating bronchospasm; the severe asthmatic whose minute ventilation drops to the point of quiet chest; the opioid-overdosed patient with…</a:t>
             </a:r>
             <a:endParaRPr lang="en-US" sz="1550" dirty="0"/>
           </a:p>
@@ -15464,7 +15482,7 @@
         <p:spPr>
           <a:xfrm>
             <a:off x="548640" y="2148840"/>
-            <a:ext cx="10058400" cy="4114800"/>
+            <a:ext cx="10058400" cy="4160520"/>
           </a:xfrm>
           <a:prstGeom prst="rect">
             <a:avLst/>
@@ -15481,7 +15499,7 @@
                 <a:spcPct val="100000"/>
               </a:lnSpc>
               <a:spcAft>
-                <a:spcPts val="900"/>
+                <a:spcPts val="1000"/>
               </a:spcAft>
               <a:buSzPct val="100000"/>
               <a:buChar char="•"/>
@@ -15495,7 +15513,7 @@
                 <a:ea typeface="Calibri" pitchFamily="34" charset="-122"/>
                 <a:cs typeface="Calibri" pitchFamily="34" charset="-120"/>
               </a:rPr>
-              <a:t>Early signs of respiratory failure are predictable.</a:t>
+              <a:t>Early signs of respiratory failure are predictable. Tachypnea is the earliest. Speech shortens. Patients tripod. Accessory muscles recruit. Skin becomes diaphoretic. The patient is often anxious or restless.</a:t>
             </a:r>
             <a:endParaRPr lang="en-US" sz="1550" dirty="0"/>
           </a:p>
@@ -15505,7 +15523,7 @@
                 <a:spcPct val="100000"/>
               </a:lnSpc>
               <a:spcAft>
-                <a:spcPts val="900"/>
+                <a:spcPts val="1000"/>
               </a:spcAft>
               <a:buSzPct val="100000"/>
               <a:buChar char="•"/>
@@ -15519,7 +15537,7 @@
                 <a:ea typeface="Calibri" pitchFamily="34" charset="-122"/>
                 <a:cs typeface="Calibri" pitchFamily="34" charset="-120"/>
               </a:rPr>
-              <a:t>Late signs are subtle and dangerous.</a:t>
+              <a:t>Late signs are subtle and dangerous. The previously tachypneic patient becomes quiet. RR drops. HR, which had been elevated, begins to fall.</a:t>
             </a:r>
             <a:endParaRPr lang="en-US" sz="1550" dirty="0"/>
           </a:p>
@@ -15529,7 +15547,7 @@
                 <a:spcPct val="100000"/>
               </a:lnSpc>
               <a:spcAft>
-                <a:spcPts val="900"/>
+                <a:spcPts val="1000"/>
               </a:spcAft>
               <a:buSzPct val="100000"/>
               <a:buChar char="•"/>
@@ -15543,7 +15561,7 @@
                 <a:ea typeface="Calibri" pitchFamily="34" charset="-122"/>
                 <a:cs typeface="Calibri" pitchFamily="34" charset="-120"/>
               </a:rPr>
-              <a:t>Some call this the calm before the storm.</a:t>
+              <a:t>Some call this the calm before the storm. It is pre-arrest. The patient has run out of compensatory reserve.</a:t>
             </a:r>
             <a:endParaRPr lang="en-US" sz="1550" dirty="0"/>
           </a:p>
@@ -15707,7 +15725,7 @@
         <p:spPr>
           <a:xfrm>
             <a:off x="548640" y="2148840"/>
-            <a:ext cx="10058400" cy="4114800"/>
+            <a:ext cx="10058400" cy="4160520"/>
           </a:xfrm>
           <a:prstGeom prst="rect">
             <a:avLst/>
@@ -15724,7 +15742,7 @@
                 <a:spcPct val="100000"/>
               </a:lnSpc>
               <a:spcAft>
-                <a:spcPts val="900"/>
+                <a:spcPts val="1000"/>
               </a:spcAft>
               <a:buSzPct val="100000"/>
               <a:buChar char="•"/>
@@ -15738,7 +15756,7 @@
                 <a:ea typeface="Calibri" pitchFamily="34" charset="-122"/>
                 <a:cs typeface="Calibri" pitchFamily="34" charset="-120"/>
               </a:rPr>
-              <a:t>EtCO₂ is the partial pressure of CO₂ measured at the end of exhalation.</a:t>
+              <a:t>EtCO₂ is the partial pressure of CO₂ measured at the end of exhalation. In a healthy patient, EtCO₂ runs 2 to 5 mmHg lower than PaCO₂.</a:t>
             </a:r>
             <a:endParaRPr lang="en-US" sz="1550" dirty="0"/>
           </a:p>
@@ -15748,7 +15766,7 @@
                 <a:spcPct val="100000"/>
               </a:lnSpc>
               <a:spcAft>
-                <a:spcPts val="900"/>
+                <a:spcPts val="1000"/>
               </a:spcAft>
               <a:buSzPct val="100000"/>
               <a:buChar char="•"/>
@@ -15762,7 +15780,7 @@
                 <a:ea typeface="Calibri" pitchFamily="34" charset="-122"/>
                 <a:cs typeface="Calibri" pitchFamily="34" charset="-120"/>
               </a:rPr>
-              <a:t>Normal adult EtCO₂ is 35 to 45 mmHg.</a:t>
+              <a:t>Normal adult EtCO₂ is 35 to 45 mmHg. A rising trend over several minutes in a non-intubated patient suggests fatigue.</a:t>
             </a:r>
             <a:endParaRPr lang="en-US" sz="1550" dirty="0"/>
           </a:p>
@@ -15772,7 +15790,7 @@
                 <a:spcPct val="100000"/>
               </a:lnSpc>
               <a:spcAft>
-                <a:spcPts val="900"/>
+                <a:spcPts val="1000"/>
               </a:spcAft>
               <a:buSzPct val="100000"/>
               <a:buChar char="•"/>
@@ -15786,7 +15804,7 @@
                 <a:ea typeface="Calibri" pitchFamily="34" charset="-122"/>
                 <a:cs typeface="Calibri" pitchFamily="34" charset="-120"/>
               </a:rPr>
-              <a:t>Capnography has an underappreciated role in CPR.</a:t>
+              <a:t>Capnography has an underappreciated role in CPR. AHA recommends continuous waveform capnography during resuscitation.</a:t>
             </a:r>
             <a:endParaRPr lang="en-US" sz="1550" dirty="0"/>
           </a:p>
@@ -15950,7 +15968,7 @@
         <p:spPr>
           <a:xfrm>
             <a:off x="548640" y="2148840"/>
-            <a:ext cx="6309360" cy="4114800"/>
+            <a:ext cx="6309360" cy="4160520"/>
           </a:xfrm>
           <a:prstGeom prst="rect">
             <a:avLst/>
@@ -15967,7 +15985,7 @@
                 <a:spcPct val="100000"/>
               </a:lnSpc>
               <a:spcAft>
-                <a:spcPts val="900"/>
+                <a:spcPts val="1000"/>
               </a:spcAft>
               <a:buSzPct val="100000"/>
               <a:buChar char="•"/>
@@ -15981,7 +15999,7 @@
                 <a:ea typeface="Calibri" pitchFamily="34" charset="-122"/>
                 <a:cs typeface="Calibri" pitchFamily="34" charset="-120"/>
               </a:rPr>
-              <a:t>Normal: a box-like waveform.</a:t>
+              <a:t>Normal: a box-like waveform. Sharp upstroke, flat plateau at the EtCO₂ value, sharp drop as the next inspiration begins.</a:t>
             </a:r>
             <a:endParaRPr lang="en-US" sz="1550" dirty="0"/>
           </a:p>
@@ -15991,7 +16009,7 @@
                 <a:spcPct val="100000"/>
               </a:lnSpc>
               <a:spcAft>
-                <a:spcPts val="900"/>
+                <a:spcPts val="1000"/>
               </a:spcAft>
               <a:buSzPct val="100000"/>
               <a:buChar char="•"/>
@@ -16005,7 +16023,7 @@
                 <a:ea typeface="Calibri" pitchFamily="34" charset="-122"/>
                 <a:cs typeface="Calibri" pitchFamily="34" charset="-120"/>
               </a:rPr>
-              <a:t>Shark fin: the upstroke is sloped rather than sharp.</a:t>
+              <a:t>Shark fin: the upstroke is sloped rather than sharp. This is the most specific bedside sign of bronchospasm — asthma, COPD exacerbation, anaphylaxis.</a:t>
             </a:r>
             <a:endParaRPr lang="en-US" sz="1550" dirty="0"/>
           </a:p>
@@ -16015,7 +16033,7 @@
                 <a:spcPct val="100000"/>
               </a:lnSpc>
               <a:spcAft>
-                <a:spcPts val="900"/>
+                <a:spcPts val="1000"/>
               </a:spcAft>
               <a:buSzPct val="100000"/>
               <a:buChar char="•"/>
@@ -16029,7 +16047,7 @@
                 <a:ea typeface="Calibri" pitchFamily="34" charset="-122"/>
                 <a:cs typeface="Calibri" pitchFamily="34" charset="-120"/>
               </a:rPr>
-              <a:t>Rebreathing: the baseline is elevated rather than returning to zero between breaths.</a:t>
+              <a:t>Rebreathing: the baseline is elevated rather than returning to zero between breaths. Common causes: a non-fitted NIV mask seal, an exhausted CO₂ absorber, or a kinked one-way valve.</a:t>
             </a:r>
             <a:endParaRPr lang="en-US" sz="1550" dirty="0"/>
           </a:p>
@@ -16039,7 +16057,7 @@
                 <a:spcPct val="100000"/>
               </a:lnSpc>
               <a:spcAft>
-                <a:spcPts val="900"/>
+                <a:spcPts val="1000"/>
               </a:spcAft>
               <a:buSzPct val="100000"/>
               <a:buChar char="•"/>
@@ -16053,7 +16071,7 @@
                 <a:ea typeface="Calibri" pitchFamily="34" charset="-122"/>
                 <a:cs typeface="Calibri" pitchFamily="34" charset="-120"/>
               </a:rPr>
-              <a:t>Lost waveform: sudden drop to near zero.</a:t>
+              <a:t>Lost waveform: sudden drop to near zero. DOPE algorithm time — dislodgement, obstruction, pneumothorax, equipment. We cover this in Module 7.</a:t>
             </a:r>
             <a:endParaRPr lang="en-US" sz="1550" dirty="0"/>
           </a:p>
@@ -16722,7 +16740,9 @@
       </p:sp>
       <p:sp>
         <p:nvSpPr>
-          <p:cNvPr id="14" name="Text 12"/>
+          <p:cNvPr id="14" name="Text 12">
+            <a:hlinkClick r:id="rId1" tooltip="Open this module's simulator mission"/>
+          </p:cNvPr>
           <p:cNvSpPr/>
           <p:nvPr/>
         </p:nvSpPr>
@@ -16745,13 +16765,20 @@
               <a:buNone/>
             </a:pPr>
             <a:r>
-              <a:rPr lang="en-US" sz="1700" b="1" dirty="0">
+              <a:rPr lang="en-US" sz="1700" b="1" u="sng" dirty="0">
                 <a:solidFill>
                   <a:srgbClr val="FFFFFF"/>
                 </a:solidFill>
                 <a:latin typeface="Calibri" pitchFamily="34" charset="0"/>
                 <a:ea typeface="Calibri" pitchFamily="34" charset="-122"/>
                 <a:cs typeface="Calibri" pitchFamily="34" charset="-120"/>
+                <a:hlinkClick r:id="rId1" invalidUrl="" action="" tgtFrame="" tooltip="Open this module's simulator mission" history="1" highlightClick="0" endSnd="0">
+                  <a:extLst>
+                    <a:ext uri="{A12FA001-AC4F-418D-AE19-62706E023703}">
+                      <ahyp:hlinkClr xmlns:ahyp="http://schemas.microsoft.com/office/drawing/2018/hyperlinkcolor" val="tx"/>
+                    </a:ext>
+                  </a:extLst>
+                </a:hlinkClick>
               </a:rPr>
               <a:t>LTV 1200 Simulator</a:t>
             </a:r>
@@ -16784,13 +16811,20 @@
               <a:buNone/>
             </a:pPr>
             <a:r>
-              <a:rPr lang="en-US" sz="1250" dirty="0">
-                <a:solidFill>
-                  <a:srgbClr val="A9C2E0"/>
-                </a:solidFill>
-                <a:latin typeface="Calibri" pitchFamily="34" charset="0"/>
-                <a:ea typeface="Calibri" pitchFamily="34" charset="-122"/>
-                <a:cs typeface="Calibri" pitchFamily="34" charset="-120"/>
+              <a:rPr lang="en-US" sz="1250" u="sng" dirty="0">
+                <a:solidFill>
+                  <a:srgbClr val="7FB0E6"/>
+                </a:solidFill>
+                <a:latin typeface="Calibri" pitchFamily="34" charset="0"/>
+                <a:ea typeface="Calibri" pitchFamily="34" charset="-122"/>
+                <a:cs typeface="Calibri" pitchFamily="34" charset="-120"/>
+                <a:hlinkClick r:id="rId2" invalidUrl="" action="" tgtFrame="" tooltip="" history="1" highlightClick="0" endSnd="0">
+                  <a:extLst>
+                    <a:ext uri="{A12FA001-AC4F-418D-AE19-62706E023703}">
+                      <ahyp:hlinkClr xmlns:ahyp="http://schemas.microsoft.com/office/drawing/2018/hyperlinkcolor" val="tx"/>
+                    </a:ext>
+                  </a:extLst>
+                </a:hlinkClick>
               </a:rPr>
               <a:t>vent-ltv1200.html?scenario=failure-type  —  Name the failure type from the monitor, then treat it — oxygenation vs ventilation.</a:t>
             </a:r>
@@ -16965,7 +16999,7 @@
                 <a:ea typeface="Calibri" pitchFamily="34" charset="-122"/>
                 <a:cs typeface="Calibri" pitchFamily="34" charset="-120"/>
               </a:rPr>
-              <a:t>We rarely have an arterial blood gas prehospital. Clinical signs + EtCO₂ + SpO₂ give us the same diagnosis a few minutes earlier than the lab does.…</a:t>
+              <a:t>We rarely have an arterial blood gas prehospital. Clinical signs + EtCO₂ + SpO₂ support recognition and let you act early — but they do NOT replace…</a:t>
             </a:r>
             <a:endParaRPr lang="en-US" sz="1700" dirty="0"/>
           </a:p>
@@ -17482,7 +17516,7 @@
                 <a:ea typeface="Calibri" pitchFamily="34" charset="-122"/>
                 <a:cs typeface="Calibri" pitchFamily="34" charset="-120"/>
               </a:rPr>
-              <a:t>Day 1 · Foundations</a:t>
+              <a:t>Foundations</a:t>
             </a:r>
             <a:pPr indent="0" marL="0">
               <a:buNone/>
@@ -17496,7 +17530,7 @@
                 <a:ea typeface="Calibri" pitchFamily="34" charset="-122"/>
                 <a:cs typeface="Calibri" pitchFamily="34" charset="-120"/>
               </a:rPr>
-              <a:t>   ·   ~40 min   ·   6 lessons</a:t>
+              <a:t>   ·   6 lessons</a:t>
             </a:r>
             <a:endParaRPr lang="en-US" sz="1300" dirty="0"/>
           </a:p>
@@ -18586,7 +18620,7 @@
         <p:spPr>
           <a:xfrm>
             <a:off x="548640" y="2148840"/>
-            <a:ext cx="6309360" cy="4114800"/>
+            <a:ext cx="6309360" cy="4160520"/>
           </a:xfrm>
           <a:prstGeom prst="rect">
             <a:avLst/>
@@ -18603,7 +18637,7 @@
                 <a:spcPct val="100000"/>
               </a:lnSpc>
               <a:spcAft>
-                <a:spcPts val="900"/>
+                <a:spcPts val="1000"/>
               </a:spcAft>
               <a:buSzPct val="100000"/>
               <a:buChar char="•"/>
@@ -18627,7 +18661,7 @@
                 <a:spcPct val="100000"/>
               </a:lnSpc>
               <a:spcAft>
-                <a:spcPts val="900"/>
+                <a:spcPts val="1000"/>
               </a:spcAft>
               <a:buSzPct val="100000"/>
               <a:buChar char="•"/>
@@ -18641,7 +18675,7 @@
                 <a:ea typeface="Calibri" pitchFamily="34" charset="-122"/>
                 <a:cs typeface="Calibri" pitchFamily="34" charset="-120"/>
               </a:rPr>
-              <a:t>For acute pulmonary edema, the foundational evidence is Bersten et al.</a:t>
+              <a:t>For acute pulmonary edema, the foundational evidence is Bersten et al. (NEJM 1991): 39 patients randomized to CPAP vs standard oxygen. Intubation rate dropped from 35% to 0% in the CPAP arm.</a:t>
             </a:r>
             <a:endParaRPr lang="en-US" sz="1550" dirty="0"/>
           </a:p>
@@ -18651,7 +18685,7 @@
                 <a:spcPct val="100000"/>
               </a:lnSpc>
               <a:spcAft>
-                <a:spcPts val="900"/>
+                <a:spcPts val="1000"/>
               </a:spcAft>
               <a:buSzPct val="100000"/>
               <a:buChar char="•"/>
@@ -18665,7 +18699,7 @@
                 <a:ea typeface="Calibri" pitchFamily="34" charset="-122"/>
                 <a:cs typeface="Calibri" pitchFamily="34" charset="-120"/>
               </a:rPr>
-              <a:t>For COPD exacerbation with hypercapnia, Brochard et al.</a:t>
+              <a:t>For COPD exacerbation with hypercapnia, Brochard et al. (NEJM 1995) randomized 85 patients to BiPAP vs standard care. Intubation: 26% vs 74%. Mortality: 9% vs 29%.</a:t>
             </a:r>
             <a:endParaRPr lang="en-US" sz="1550" dirty="0"/>
           </a:p>
@@ -18974,7 +19008,7 @@
         <p:spPr>
           <a:xfrm>
             <a:off x="548640" y="2148840"/>
-            <a:ext cx="10058400" cy="4114800"/>
+            <a:ext cx="10058400" cy="4160520"/>
           </a:xfrm>
           <a:prstGeom prst="rect">
             <a:avLst/>
@@ -18991,7 +19025,7 @@
                 <a:spcPct val="100000"/>
               </a:lnSpc>
               <a:spcAft>
-                <a:spcPts val="900"/>
+                <a:spcPts val="1000"/>
               </a:spcAft>
               <a:buSzPct val="100000"/>
               <a:buChar char="•"/>
@@ -19005,7 +19039,7 @@
                 <a:ea typeface="Calibri" pitchFamily="34" charset="-122"/>
                 <a:cs typeface="Calibri" pitchFamily="34" charset="-120"/>
               </a:rPr>
-              <a:t>Continuous Positive Airway Pressure (CPAP) is one steady pressure the whole cycle long — a doorstop wedged under the airway, holding it open the same…</a:t>
+              <a:t>Continuous Positive Airway Pressure (CPAP) is one steady pressure the whole cycle long — a doorstop wedged under the airway, holding it open the same amount whether the patient breathes in or out.</a:t>
             </a:r>
             <a:endParaRPr lang="en-US" sz="1550" dirty="0"/>
           </a:p>
@@ -19015,7 +19049,7 @@
                 <a:spcPct val="100000"/>
               </a:lnSpc>
               <a:spcAft>
-                <a:spcPts val="900"/>
+                <a:spcPts val="1000"/>
               </a:spcAft>
               <a:buSzPct val="100000"/>
               <a:buChar char="•"/>
@@ -19029,7 +19063,7 @@
                 <a:ea typeface="Calibri" pitchFamily="34" charset="-122"/>
                 <a:cs typeface="Calibri" pitchFamily="34" charset="-120"/>
               </a:rPr>
-              <a:t>Bilevel Positive Airway Pressure (BiPAP) adds a second, higher pressure on inspiration — like a spotter at the bench press who shoves the bar up each time…</a:t>
+              <a:t>Bilevel Positive Airway Pressure (BiPAP) adds a second, higher pressure on inspiration — like a spotter at the bench press who shoves the bar up each time you push and eases off as you lower it.</a:t>
             </a:r>
             <a:endParaRPr lang="en-US" sz="1550" dirty="0"/>
           </a:p>
@@ -19039,7 +19073,7 @@
                 <a:spcPct val="100000"/>
               </a:lnSpc>
               <a:spcAft>
-                <a:spcPts val="900"/>
+                <a:spcPts val="1000"/>
               </a:spcAft>
               <a:buSzPct val="100000"/>
               <a:buChar char="•"/>
@@ -19053,7 +19087,7 @@
                 <a:ea typeface="Calibri" pitchFamily="34" charset="-122"/>
                 <a:cs typeface="Calibri" pitchFamily="34" charset="-120"/>
               </a:rPr>
-              <a:t>Typical starting settings: CPAP at 5 to 10 cmH₂O with FiO₂ 100% initially, weaned.</a:t>
+              <a:t>Typical starting settings: CPAP at 5 to 10 cmH₂O with FiO₂ 100% initially, weaned. BiPAP at IPAP 10 / EPAP 5, FiO₂ titrated. Both require a good mask seal. Sit the patient up.</a:t>
             </a:r>
             <a:endParaRPr lang="en-US" sz="1550" dirty="0"/>
           </a:p>
@@ -19217,7 +19251,7 @@
         <p:spPr>
           <a:xfrm>
             <a:off x="548640" y="2148840"/>
-            <a:ext cx="6309360" cy="4114800"/>
+            <a:ext cx="6309360" cy="4160520"/>
           </a:xfrm>
           <a:prstGeom prst="rect">
             <a:avLst/>
@@ -19234,7 +19268,7 @@
                 <a:spcPct val="100000"/>
               </a:lnSpc>
               <a:spcAft>
-                <a:spcPts val="900"/>
+                <a:spcPts val="1000"/>
               </a:spcAft>
               <a:buSzPct val="100000"/>
               <a:buChar char="•"/>
@@ -19248,7 +19282,7 @@
                 <a:ea typeface="Calibri" pitchFamily="34" charset="-122"/>
                 <a:cs typeface="Calibri" pitchFamily="34" charset="-120"/>
               </a:rPr>
-              <a:t>NIV that is going to work shows signs of working within minutes.</a:t>
+              <a:t>NIV that is going to work shows signs of working within minutes. Improvement: falling respiratory rate, rising saturation, lengthening of speech, softening accessory muscle use, normalizing EtCO₂ trend.</a:t>
             </a:r>
             <a:endParaRPr lang="en-US" sz="1550" dirty="0"/>
           </a:p>
@@ -19258,7 +19292,7 @@
                 <a:spcPct val="100000"/>
               </a:lnSpc>
               <a:spcAft>
-                <a:spcPts val="900"/>
+                <a:spcPts val="1000"/>
               </a:spcAft>
               <a:buSzPct val="100000"/>
               <a:buChar char="•"/>
@@ -19272,7 +19306,7 @@
                 <a:ea typeface="Calibri" pitchFamily="34" charset="-122"/>
                 <a:cs typeface="Calibri" pitchFamily="34" charset="-120"/>
               </a:rPr>
-              <a:t>NIV that is not going to work also declares itself early.</a:t>
+              <a:t>NIV that is not going to work also declares itself early. Persistent or rising RR, no change in saturation, declining mental status, vomiting, inability to tolerate the mask are all signs of failure.</a:t>
             </a:r>
             <a:endParaRPr lang="en-US" sz="1550" dirty="0"/>
           </a:p>
@@ -19282,7 +19316,7 @@
                 <a:spcPct val="100000"/>
               </a:lnSpc>
               <a:spcAft>
-                <a:spcPts val="900"/>
+                <a:spcPts val="1000"/>
               </a:spcAft>
               <a:buSzPct val="100000"/>
               <a:buChar char="•"/>
@@ -19296,7 +19330,7 @@
                 <a:ea typeface="Calibri" pitchFamily="34" charset="-122"/>
                 <a:cs typeface="Calibri" pitchFamily="34" charset="-120"/>
               </a:rPr>
-              <a:t>Apply the 1-hour rule.</a:t>
+              <a:t>Apply the 1-hour rule. If the patient has been on NIV for 60 minutes without clear improvement, escalate to invasive ventilation.</a:t>
             </a:r>
             <a:endParaRPr lang="en-US" sz="1550" dirty="0"/>
           </a:p>
@@ -19715,7 +19749,7 @@
                 <a:ea typeface="Calibri" pitchFamily="34" charset="-122"/>
                 <a:cs typeface="Calibri" pitchFamily="34" charset="-120"/>
               </a:rPr>
-              <a:t>Day 1 · Foundations</a:t>
+              <a:t>Foundations</a:t>
             </a:r>
             <a:pPr indent="0" marL="0">
               <a:buNone/>
@@ -19729,7 +19763,7 @@
                 <a:ea typeface="Calibri" pitchFamily="34" charset="-122"/>
                 <a:cs typeface="Calibri" pitchFamily="34" charset="-120"/>
               </a:rPr>
-              <a:t>   ·   ~45 min   ·   7 lessons</a:t>
+              <a:t>   ·   7 lessons</a:t>
             </a:r>
             <a:endParaRPr lang="en-US" sz="1300" dirty="0"/>
           </a:p>
@@ -19932,7 +19966,7 @@
         <p:spPr>
           <a:xfrm>
             <a:off x="548640" y="2148840"/>
-            <a:ext cx="6309360" cy="4114800"/>
+            <a:ext cx="6309360" cy="4160520"/>
           </a:xfrm>
           <a:prstGeom prst="rect">
             <a:avLst/>
@@ -19949,13 +19983,13 @@
                 <a:spcPct val="100000"/>
               </a:lnSpc>
               <a:spcAft>
-                <a:spcPts val="900"/>
+                <a:spcPts val="800"/>
               </a:spcAft>
               <a:buSzPct val="100000"/>
               <a:buChar char="•"/>
             </a:pPr>
             <a:r>
-              <a:rPr lang="en-US" sz="1550" dirty="0">
+              <a:rPr lang="en-US" sz="1450" dirty="0">
                 <a:solidFill>
                   <a:srgbClr val="1B2433"/>
                 </a:solidFill>
@@ -19965,7 +19999,7 @@
               </a:rPr>
               <a:t>ABSOLUTE contraindications must be respected.</a:t>
             </a:r>
-            <a:endParaRPr lang="en-US" sz="1550" dirty="0"/>
+            <a:endParaRPr lang="en-US" sz="1450" dirty="0"/>
           </a:p>
           <a:p>
             <a:pPr marL="177800" indent="-177800">
@@ -19973,13 +20007,13 @@
                 <a:spcPct val="100000"/>
               </a:lnSpc>
               <a:spcAft>
-                <a:spcPts val="900"/>
+                <a:spcPts val="800"/>
               </a:spcAft>
               <a:buSzPct val="100000"/>
               <a:buChar char="•"/>
             </a:pPr>
             <a:r>
-              <a:rPr lang="en-US" sz="1550" dirty="0">
+              <a:rPr lang="en-US" sz="1450" dirty="0">
                 <a:solidFill>
                   <a:srgbClr val="1B2433"/>
                 </a:solidFill>
@@ -19987,9 +20021,9 @@
                 <a:ea typeface="Calibri" pitchFamily="34" charset="-122"/>
                 <a:cs typeface="Calibri" pitchFamily="34" charset="-120"/>
               </a:rPr>
-              <a:t>1.</a:t>
-            </a:r>
-            <a:endParaRPr lang="en-US" sz="1550" dirty="0"/>
+              <a:t>Inability to protect the airway — GCS ≤ 8, no gag, active vomiting, copious secretions. NIV in such a patient is a comfortable way to deliver gastric contents into the lung.</a:t>
+            </a:r>
+            <a:endParaRPr lang="en-US" sz="1450" dirty="0"/>
           </a:p>
           <a:p>
             <a:pPr marL="177800" indent="-177800">
@@ -19997,13 +20031,13 @@
                 <a:spcPct val="100000"/>
               </a:lnSpc>
               <a:spcAft>
-                <a:spcPts val="900"/>
+                <a:spcPts val="800"/>
               </a:spcAft>
               <a:buSzPct val="100000"/>
               <a:buChar char="•"/>
             </a:pPr>
             <a:r>
-              <a:rPr lang="en-US" sz="1550" dirty="0">
+              <a:rPr lang="en-US" sz="1450" dirty="0">
                 <a:solidFill>
                   <a:srgbClr val="1B2433"/>
                 </a:solidFill>
@@ -20011,9 +20045,9 @@
                 <a:ea typeface="Calibri" pitchFamily="34" charset="-122"/>
                 <a:cs typeface="Calibri" pitchFamily="34" charset="-120"/>
               </a:rPr>
-              <a:t>2.</a:t>
-            </a:r>
-            <a:endParaRPr lang="en-US" sz="1550" dirty="0"/>
+              <a:t>Facial trauma or severe deformity preventing mask seal.</a:t>
+            </a:r>
+            <a:endParaRPr lang="en-US" sz="1450" dirty="0"/>
           </a:p>
           <a:p>
             <a:pPr marL="177800" indent="-177800">
@@ -20021,13 +20055,13 @@
                 <a:spcPct val="100000"/>
               </a:lnSpc>
               <a:spcAft>
-                <a:spcPts val="900"/>
+                <a:spcPts val="800"/>
               </a:spcAft>
               <a:buSzPct val="100000"/>
               <a:buChar char="•"/>
             </a:pPr>
             <a:r>
-              <a:rPr lang="en-US" sz="1550" dirty="0">
+              <a:rPr lang="en-US" sz="1450" dirty="0">
                 <a:solidFill>
                   <a:srgbClr val="1B2433"/>
                 </a:solidFill>
@@ -20035,9 +20069,9 @@
                 <a:ea typeface="Calibri" pitchFamily="34" charset="-122"/>
                 <a:cs typeface="Calibri" pitchFamily="34" charset="-120"/>
               </a:rPr>
-              <a:t>3.</a:t>
-            </a:r>
-            <a:endParaRPr lang="en-US" sz="1550" dirty="0"/>
+              <a:t>Hemodynamic instability or peri-arrest state. The time required to set up NIV is wasted on a patient who needs definitive airway control.</a:t>
+            </a:r>
+            <a:endParaRPr lang="en-US" sz="1450" dirty="0"/>
           </a:p>
           <a:p>
             <a:pPr marL="177800" indent="-177800">
@@ -20045,13 +20079,13 @@
                 <a:spcPct val="100000"/>
               </a:lnSpc>
               <a:spcAft>
-                <a:spcPts val="900"/>
+                <a:spcPts val="800"/>
               </a:spcAft>
               <a:buSzPct val="100000"/>
               <a:buChar char="•"/>
             </a:pPr>
             <a:r>
-              <a:rPr lang="en-US" sz="1550" dirty="0">
+              <a:rPr lang="en-US" sz="1450" dirty="0">
                 <a:solidFill>
                   <a:srgbClr val="1B2433"/>
                 </a:solidFill>
@@ -20059,9 +20093,9 @@
                 <a:ea typeface="Calibri" pitchFamily="34" charset="-122"/>
                 <a:cs typeface="Calibri" pitchFamily="34" charset="-120"/>
               </a:rPr>
-              <a:t>4.</a:t>
-            </a:r>
-            <a:endParaRPr lang="en-US" sz="1550" dirty="0"/>
+              <a:t>Pneumothorax (until decompressed). Positive pressure can tension a small PTX into a fatal one.</a:t>
+            </a:r>
+            <a:endParaRPr lang="en-US" sz="1450" dirty="0"/>
           </a:p>
         </p:txBody>
       </p:sp>
@@ -20368,7 +20402,7 @@
         <p:spPr>
           <a:xfrm>
             <a:off x="548640" y="2148840"/>
-            <a:ext cx="10058400" cy="4114800"/>
+            <a:ext cx="10058400" cy="4160520"/>
           </a:xfrm>
           <a:prstGeom prst="rect">
             <a:avLst/>
@@ -20385,13 +20419,13 @@
                 <a:spcPct val="100000"/>
               </a:lnSpc>
               <a:spcAft>
-                <a:spcPts val="900"/>
+                <a:spcPts val="600"/>
               </a:spcAft>
               <a:buSzPct val="100000"/>
               <a:buChar char="•"/>
             </a:pPr>
             <a:r>
-              <a:rPr lang="en-US" sz="1550" dirty="0">
+              <a:rPr lang="en-US" sz="1350" dirty="0">
                 <a:solidFill>
                   <a:srgbClr val="1B2433"/>
                 </a:solidFill>
@@ -20401,7 +20435,7 @@
               </a:rPr>
               <a:t>Move to invasive mechanical ventilation when:</a:t>
             </a:r>
-            <a:endParaRPr lang="en-US" sz="1550" dirty="0"/>
+            <a:endParaRPr lang="en-US" sz="1350" dirty="0"/>
           </a:p>
           <a:p>
             <a:pPr marL="177800" indent="-177800">
@@ -20409,13 +20443,13 @@
                 <a:spcPct val="100000"/>
               </a:lnSpc>
               <a:spcAft>
-                <a:spcPts val="900"/>
+                <a:spcPts val="600"/>
               </a:spcAft>
               <a:buSzPct val="100000"/>
               <a:buChar char="•"/>
             </a:pPr>
             <a:r>
-              <a:rPr lang="en-US" sz="1550" dirty="0">
+              <a:rPr lang="en-US" sz="1350" dirty="0">
                 <a:solidFill>
                   <a:srgbClr val="1B2433"/>
                 </a:solidFill>
@@ -20423,9 +20457,9 @@
                 <a:ea typeface="Calibri" pitchFamily="34" charset="-122"/>
                 <a:cs typeface="Calibri" pitchFamily="34" charset="-120"/>
               </a:rPr>
-              <a:t>1.</a:t>
-            </a:r>
-            <a:endParaRPr lang="en-US" sz="1550" dirty="0"/>
+              <a:t>NIV is failing after a fair trial (typically 30 to 60 minutes; maximum 2 hours).</a:t>
+            </a:r>
+            <a:endParaRPr lang="en-US" sz="1350" dirty="0"/>
           </a:p>
           <a:p>
             <a:pPr marL="177800" indent="-177800">
@@ -20433,13 +20467,13 @@
                 <a:spcPct val="100000"/>
               </a:lnSpc>
               <a:spcAft>
-                <a:spcPts val="900"/>
+                <a:spcPts val="600"/>
               </a:spcAft>
               <a:buSzPct val="100000"/>
               <a:buChar char="•"/>
             </a:pPr>
             <a:r>
-              <a:rPr lang="en-US" sz="1550" dirty="0">
+              <a:rPr lang="en-US" sz="1350" dirty="0">
                 <a:solidFill>
                   <a:srgbClr val="1B2433"/>
                 </a:solidFill>
@@ -20447,9 +20481,9 @@
                 <a:ea typeface="Calibri" pitchFamily="34" charset="-122"/>
                 <a:cs typeface="Calibri" pitchFamily="34" charset="-120"/>
               </a:rPr>
-              <a:t>2.</a:t>
-            </a:r>
-            <a:endParaRPr lang="en-US" sz="1550" dirty="0"/>
+              <a:t>GCS ≤ 8 or unable to protect airway.</a:t>
+            </a:r>
+            <a:endParaRPr lang="en-US" sz="1350" dirty="0"/>
           </a:p>
           <a:p>
             <a:pPr marL="177800" indent="-177800">
@@ -20457,13 +20491,13 @@
                 <a:spcPct val="100000"/>
               </a:lnSpc>
               <a:spcAft>
-                <a:spcPts val="900"/>
+                <a:spcPts val="600"/>
               </a:spcAft>
               <a:buSzPct val="100000"/>
               <a:buChar char="•"/>
             </a:pPr>
             <a:r>
-              <a:rPr lang="en-US" sz="1550" dirty="0">
+              <a:rPr lang="en-US" sz="1350" dirty="0">
                 <a:solidFill>
                   <a:srgbClr val="1B2433"/>
                 </a:solidFill>
@@ -20471,9 +20505,9 @@
                 <a:ea typeface="Calibri" pitchFamily="34" charset="-122"/>
                 <a:cs typeface="Calibri" pitchFamily="34" charset="-120"/>
               </a:rPr>
-              <a:t>3.</a:t>
-            </a:r>
-            <a:endParaRPr lang="en-US" sz="1550" dirty="0"/>
+              <a:t>Apnea or agonal respirations.</a:t>
+            </a:r>
+            <a:endParaRPr lang="en-US" sz="1350" dirty="0"/>
           </a:p>
           <a:p>
             <a:pPr marL="177800" indent="-177800">
@@ -20481,13 +20515,13 @@
                 <a:spcPct val="100000"/>
               </a:lnSpc>
               <a:spcAft>
-                <a:spcPts val="900"/>
+                <a:spcPts val="600"/>
               </a:spcAft>
               <a:buSzPct val="100000"/>
               <a:buChar char="•"/>
             </a:pPr>
             <a:r>
-              <a:rPr lang="en-US" sz="1550" dirty="0">
+              <a:rPr lang="en-US" sz="1350" dirty="0">
                 <a:solidFill>
                   <a:srgbClr val="1B2433"/>
                 </a:solidFill>
@@ -20495,9 +20529,33 @@
                 <a:ea typeface="Calibri" pitchFamily="34" charset="-122"/>
                 <a:cs typeface="Calibri" pitchFamily="34" charset="-120"/>
               </a:rPr>
-              <a:t>4.</a:t>
-            </a:r>
-            <a:endParaRPr lang="en-US" sz="1550" dirty="0"/>
+              <a:t>Refractory hypoxia despite high-FiO₂ NIV.</a:t>
+            </a:r>
+            <a:endParaRPr lang="en-US" sz="1350" dirty="0"/>
+          </a:p>
+          <a:p>
+            <a:pPr marL="177800" indent="-177800">
+              <a:lnSpc>
+                <a:spcPct val="100000"/>
+              </a:lnSpc>
+              <a:spcAft>
+                <a:spcPts val="600"/>
+              </a:spcAft>
+              <a:buSzPct val="100000"/>
+              <a:buChar char="•"/>
+            </a:pPr>
+            <a:r>
+              <a:rPr lang="en-US" sz="1350" dirty="0">
+                <a:solidFill>
+                  <a:srgbClr val="1B2433"/>
+                </a:solidFill>
+                <a:latin typeface="Calibri" pitchFamily="34" charset="0"/>
+                <a:ea typeface="Calibri" pitchFamily="34" charset="-122"/>
+                <a:cs typeface="Calibri" pitchFamily="34" charset="-120"/>
+              </a:rPr>
+              <a:t>Hemodynamic instability requiring control of work of breathing.</a:t>
+            </a:r>
+            <a:endParaRPr lang="en-US" sz="1350" dirty="0"/>
           </a:p>
         </p:txBody>
       </p:sp>
@@ -20659,7 +20717,7 @@
         <p:spPr>
           <a:xfrm>
             <a:off x="548640" y="2148840"/>
-            <a:ext cx="6309360" cy="4114800"/>
+            <a:ext cx="6309360" cy="4160520"/>
           </a:xfrm>
           <a:prstGeom prst="rect">
             <a:avLst/>
@@ -20676,7 +20734,7 @@
                 <a:spcPct val="100000"/>
               </a:lnSpc>
               <a:spcAft>
-                <a:spcPts val="900"/>
+                <a:spcPts val="1000"/>
               </a:spcAft>
               <a:buSzPct val="100000"/>
               <a:buChar char="•"/>
@@ -20690,7 +20748,7 @@
                 <a:ea typeface="Calibri" pitchFamily="34" charset="-122"/>
                 <a:cs typeface="Calibri" pitchFamily="34" charset="-120"/>
               </a:rPr>
-              <a:t>Pre-oxygenation before RSI is topping off the tank before a free-dive: you flush the nitrogen out of the lung's reservoir — the functional residual…</a:t>
+              <a:t>Pre-oxygenation before RSI is topping off the tank before a free-dive: you flush the nitrogen out of the lung's reservoir — the functional residual capacity (FRC) — and fill it with oxygen, so the patient can…</a:t>
             </a:r>
             <a:endParaRPr lang="en-US" sz="1550" dirty="0"/>
           </a:p>
@@ -20700,7 +20758,7 @@
                 <a:spcPct val="100000"/>
               </a:lnSpc>
               <a:spcAft>
-                <a:spcPts val="900"/>
+                <a:spcPts val="1000"/>
               </a:spcAft>
               <a:buSzPct val="100000"/>
               <a:buChar char="•"/>
@@ -20714,7 +20772,7 @@
                 <a:ea typeface="Calibri" pitchFamily="34" charset="-122"/>
                 <a:cs typeface="Calibri" pitchFamily="34" charset="-120"/>
               </a:rPr>
-              <a:t>Standard technique: 3 minutes of tidal-volume breathing on a tight-sealed NRB at flush rate (15 L/min or higher).</a:t>
+              <a:t>Standard technique: 3 minutes of tidal-volume breathing on a tight-sealed NRB at flush rate (15 L/min or higher). Alternative: 8 vital-capacity breaths.</a:t>
             </a:r>
             <a:endParaRPr lang="en-US" sz="1550" dirty="0"/>
           </a:p>
@@ -20724,7 +20782,7 @@
                 <a:spcPct val="100000"/>
               </a:lnSpc>
               <a:spcAft>
-                <a:spcPts val="900"/>
+                <a:spcPts val="1000"/>
               </a:spcAft>
               <a:buSzPct val="100000"/>
               <a:buChar char="•"/>
@@ -20738,7 +20796,7 @@
                 <a:ea typeface="Calibri" pitchFamily="34" charset="-122"/>
                 <a:cs typeface="Calibri" pitchFamily="34" charset="-120"/>
               </a:rPr>
-              <a:t>Apneic oxygenation extends safe apnea further.</a:t>
+              <a:t>Apneic oxygenation extends safe apnea further. A nasal cannula at 15 L/min applied during the laryngoscopy itself continues to deliver oxygen during the apneic interval.</a:t>
             </a:r>
             <a:endParaRPr lang="en-US" sz="1550" dirty="0"/>
           </a:p>
@@ -21407,7 +21465,9 @@
       </p:sp>
       <p:sp>
         <p:nvSpPr>
-          <p:cNvPr id="14" name="Text 12"/>
+          <p:cNvPr id="14" name="Text 12">
+            <a:hlinkClick r:id="rId1" tooltip="Open this module's simulator mission"/>
+          </p:cNvPr>
           <p:cNvSpPr/>
           <p:nvPr/>
         </p:nvSpPr>
@@ -21430,13 +21490,20 @@
               <a:buNone/>
             </a:pPr>
             <a:r>
-              <a:rPr lang="en-US" sz="1700" b="1" dirty="0">
+              <a:rPr lang="en-US" sz="1700" b="1" u="sng" dirty="0">
                 <a:solidFill>
                   <a:srgbClr val="FFFFFF"/>
                 </a:solidFill>
                 <a:latin typeface="Calibri" pitchFamily="34" charset="0"/>
                 <a:ea typeface="Calibri" pitchFamily="34" charset="-122"/>
                 <a:cs typeface="Calibri" pitchFamily="34" charset="-120"/>
+                <a:hlinkClick r:id="rId1" invalidUrl="" action="" tgtFrame="" tooltip="Open this module's simulator mission" history="1" highlightClick="0" endSnd="0">
+                  <a:extLst>
+                    <a:ext uri="{A12FA001-AC4F-418D-AE19-62706E023703}">
+                      <ahyp:hlinkClr xmlns:ahyp="http://schemas.microsoft.com/office/drawing/2018/hyperlinkcolor" val="tx"/>
+                    </a:ext>
+                  </a:extLst>
+                </a:hlinkClick>
               </a:rPr>
               <a:t>LTV 1200 Simulator</a:t>
             </a:r>
@@ -21469,13 +21536,20 @@
               <a:buNone/>
             </a:pPr>
             <a:r>
-              <a:rPr lang="en-US" sz="1250" dirty="0">
-                <a:solidFill>
-                  <a:srgbClr val="A9C2E0"/>
-                </a:solidFill>
-                <a:latin typeface="Calibri" pitchFamily="34" charset="0"/>
-                <a:ea typeface="Calibri" pitchFamily="34" charset="-122"/>
-                <a:cs typeface="Calibri" pitchFamily="34" charset="-120"/>
+              <a:rPr lang="en-US" sz="1250" u="sng" dirty="0">
+                <a:solidFill>
+                  <a:srgbClr val="7FB0E6"/>
+                </a:solidFill>
+                <a:latin typeface="Calibri" pitchFamily="34" charset="0"/>
+                <a:ea typeface="Calibri" pitchFamily="34" charset="-122"/>
+                <a:cs typeface="Calibri" pitchFamily="34" charset="-120"/>
+                <a:hlinkClick r:id="rId2" invalidUrl="" action="" tgtFrame="" tooltip="" history="1" highlightClick="0" endSnd="0">
+                  <a:extLst>
+                    <a:ext uri="{A12FA001-AC4F-418D-AE19-62706E023703}">
+                      <ahyp:hlinkClr xmlns:ahyp="http://schemas.microsoft.com/office/drawing/2018/hyperlinkcolor" val="tx"/>
+                    </a:ext>
+                  </a:extLst>
+                </a:hlinkClick>
               </a:rPr>
               <a:t>vent-ltv1200.html?scenario=niv-vs-tube  —  Make the indication call on an awake COPD patient — BiPAP trial vs the tube — then set…</a:t>
             </a:r>
@@ -22167,7 +22241,7 @@
                 <a:ea typeface="Calibri" pitchFamily="34" charset="-122"/>
                 <a:cs typeface="Calibri" pitchFamily="34" charset="-120"/>
               </a:rPr>
-              <a:t>Day 1 · Foundations</a:t>
+              <a:t>Foundations</a:t>
             </a:r>
             <a:pPr indent="0" marL="0">
               <a:buNone/>
@@ -22181,7 +22255,7 @@
                 <a:ea typeface="Calibri" pitchFamily="34" charset="-122"/>
                 <a:cs typeface="Calibri" pitchFamily="34" charset="-120"/>
               </a:rPr>
-              <a:t>   ·   ~50 min   ·   6 lessons</a:t>
+              <a:t>   ·   6 lessons</a:t>
             </a:r>
             <a:endParaRPr lang="en-US" sz="1300" dirty="0"/>
           </a:p>
@@ -23271,7 +23345,7 @@
         <p:spPr>
           <a:xfrm>
             <a:off x="548640" y="2148840"/>
-            <a:ext cx="6309360" cy="4114800"/>
+            <a:ext cx="6309360" cy="4160520"/>
           </a:xfrm>
           <a:prstGeom prst="rect">
             <a:avLst/>
@@ -23288,7 +23362,7 @@
                 <a:spcPct val="100000"/>
               </a:lnSpc>
               <a:spcAft>
-                <a:spcPts val="900"/>
+                <a:spcPts val="1000"/>
               </a:spcAft>
               <a:buSzPct val="100000"/>
               <a:buChar char="•"/>
@@ -23312,7 +23386,7 @@
                 <a:spcPct val="100000"/>
               </a:lnSpc>
               <a:spcAft>
-                <a:spcPts val="900"/>
+                <a:spcPts val="1000"/>
               </a:spcAft>
               <a:buSzPct val="100000"/>
               <a:buChar char="•"/>
@@ -23326,7 +23400,7 @@
                 <a:ea typeface="Calibri" pitchFamily="34" charset="-122"/>
                 <a:cs typeface="Calibri" pitchFamily="34" charset="-120"/>
               </a:rPr>
-              <a:t>Modern adult target: 6 to 8 mL per kilogram of IDEAL body weight.</a:t>
+              <a:t>Modern adult target: 6 to 8 mL per kilogram of IDEAL body weight. Lower (4 to 6 mL/kg IBW) for ARDS. Pediatric: 6 to 8 mL/kg of ACTUAL body weight.</a:t>
             </a:r>
             <a:endParaRPr lang="en-US" sz="1550" dirty="0"/>
           </a:p>
@@ -23336,7 +23410,7 @@
                 <a:spcPct val="100000"/>
               </a:lnSpc>
               <a:spcAft>
-                <a:spcPts val="900"/>
+                <a:spcPts val="1000"/>
               </a:spcAft>
               <a:buSzPct val="100000"/>
               <a:buChar char="•"/>
@@ -23350,7 +23424,7 @@
                 <a:ea typeface="Calibri" pitchFamily="34" charset="-122"/>
                 <a:cs typeface="Calibri" pitchFamily="34" charset="-120"/>
               </a:rPr>
-              <a:t>History matters.</a:t>
+              <a:t>History matters. The 1990s standard was 10 to 12 mL/kg. ARDSNet ARMA (NEJM 2000) randomized 861 ARDS patients to 12 vs 6 mL/kg IBW. Mortality dropped from 39.8% to 31.0% (NNT 11).</a:t>
             </a:r>
             <a:endParaRPr lang="en-US" sz="1550" dirty="0"/>
           </a:p>
@@ -23360,7 +23434,7 @@
                 <a:spcPct val="100000"/>
               </a:lnSpc>
               <a:spcAft>
-                <a:spcPts val="900"/>
+                <a:spcPts val="1000"/>
               </a:spcAft>
               <a:buSzPct val="100000"/>
               <a:buChar char="•"/>
@@ -23374,7 +23448,7 @@
                 <a:ea typeface="Calibri" pitchFamily="34" charset="-122"/>
                 <a:cs typeface="Calibri" pitchFamily="34" charset="-120"/>
               </a:rPr>
-              <a:t>Too low: dead space eats the breath; CO₂ rises despite normal-looking MV.</a:t>
+              <a:t>Too low: dead space eats the breath; CO₂ rises despite normal-looking MV. Too high: alveolar over-distention, volutrauma. Always use IBW, not actual.</a:t>
             </a:r>
             <a:endParaRPr lang="en-US" sz="1550" dirty="0"/>
           </a:p>
@@ -23683,7 +23757,7 @@
         <p:spPr>
           <a:xfrm>
             <a:off x="548640" y="2148840"/>
-            <a:ext cx="10058400" cy="4114800"/>
+            <a:ext cx="10058400" cy="4160520"/>
           </a:xfrm>
           <a:prstGeom prst="rect">
             <a:avLst/>
@@ -23700,7 +23774,7 @@
                 <a:spcPct val="100000"/>
               </a:lnSpc>
               <a:spcAft>
-                <a:spcPts val="900"/>
+                <a:spcPts val="1000"/>
               </a:spcAft>
               <a:buSzPct val="100000"/>
               <a:buChar char="•"/>
@@ -23714,7 +23788,7 @@
                 <a:ea typeface="Calibri" pitchFamily="34" charset="-122"/>
                 <a:cs typeface="Calibri" pitchFamily="34" charset="-120"/>
               </a:rPr>
-              <a:t>Respiratory rate is the number of mandatory breaths per minute the vent delivers.</a:t>
+              <a:t>Respiratory rate is the number of mandatory breaths per minute the vent delivers. Adult initial: 12 to 16, titrated to EtCO₂ 35 to 45.</a:t>
             </a:r>
             <a:endParaRPr lang="en-US" sz="1550" dirty="0"/>
           </a:p>
@@ -23724,7 +23798,7 @@
                 <a:spcPct val="100000"/>
               </a:lnSpc>
               <a:spcAft>
-                <a:spcPts val="900"/>
+                <a:spcPts val="1000"/>
               </a:spcAft>
               <a:buSzPct val="100000"/>
               <a:buChar char="•"/>
@@ -23738,7 +23812,7 @@
                 <a:ea typeface="Calibri" pitchFamily="34" charset="-122"/>
                 <a:cs typeface="Calibri" pitchFamily="34" charset="-120"/>
               </a:rPr>
-              <a:t>Lower (8 to 10) for asthma/COPD — let them exhale.</a:t>
+              <a:t>Lower (8 to 10) for asthma/COPD — let them exhale. Higher (18 to 22) in ARDS where Vt is reduced.</a:t>
             </a:r>
             <a:endParaRPr lang="en-US" sz="1550" dirty="0"/>
           </a:p>
@@ -23748,7 +23822,7 @@
                 <a:spcPct val="100000"/>
               </a:lnSpc>
               <a:spcAft>
-                <a:spcPts val="900"/>
+                <a:spcPts val="1000"/>
               </a:spcAft>
               <a:buSzPct val="100000"/>
               <a:buChar char="•"/>
@@ -23762,7 +23836,7 @@
                 <a:ea typeface="Calibri" pitchFamily="34" charset="-122"/>
                 <a:cs typeface="Calibri" pitchFamily="34" charset="-120"/>
               </a:rPr>
-              <a:t>Minute ventilation (MV) = RR × Vt.</a:t>
+              <a:t>Minute ventilation (MV) = RR × Vt. Adult target 6 to 8 L/min. For a 70 kg IBW adult: Vt 480 mL × RR 14 = 6.7 L/min, right in range.</a:t>
             </a:r>
             <a:endParaRPr lang="en-US" sz="1550" dirty="0"/>
           </a:p>
@@ -23772,7 +23846,7 @@
                 <a:spcPct val="100000"/>
               </a:lnSpc>
               <a:spcAft>
-                <a:spcPts val="900"/>
+                <a:spcPts val="1000"/>
               </a:spcAft>
               <a:buSzPct val="100000"/>
               <a:buChar char="•"/>
@@ -23786,7 +23860,7 @@
                 <a:ea typeface="Calibri" pitchFamily="34" charset="-122"/>
                 <a:cs typeface="Calibri" pitchFamily="34" charset="-120"/>
               </a:rPr>
-              <a:t>Set the LOW MV alarm at ~70% of expected MV.</a:t>
+              <a:t>Set the LOW MV alarm at ~70% of expected MV. The apnea alarm fires after 20 seconds of no breath — by then the patient has been failing for a while.</a:t>
             </a:r>
             <a:endParaRPr lang="en-US" sz="1550" dirty="0"/>
           </a:p>
@@ -23950,7 +24024,7 @@
         <p:spPr>
           <a:xfrm>
             <a:off x="548640" y="2148840"/>
-            <a:ext cx="6309360" cy="4114800"/>
+            <a:ext cx="6309360" cy="4160520"/>
           </a:xfrm>
           <a:prstGeom prst="rect">
             <a:avLst/>
@@ -23967,7 +24041,7 @@
                 <a:spcPct val="100000"/>
               </a:lnSpc>
               <a:spcAft>
-                <a:spcPts val="900"/>
+                <a:spcPts val="1000"/>
               </a:spcAft>
               <a:buSzPct val="100000"/>
               <a:buChar char="•"/>
@@ -23981,7 +24055,7 @@
                 <a:ea typeface="Calibri" pitchFamily="34" charset="-122"/>
                 <a:cs typeface="Calibri" pitchFamily="34" charset="-120"/>
               </a:rPr>
-              <a:t>FiO₂ is the fraction of oxygen in the inspired gas.</a:t>
+              <a:t>FiO₂ is the fraction of oxygen in the inspired gas. Range 0.21 (room air) to 1.00 (100%). Start at 100% on every fresh intubation; wean.</a:t>
             </a:r>
             <a:endParaRPr lang="en-US" sz="1550" dirty="0"/>
           </a:p>
@@ -23991,7 +24065,7 @@
                 <a:spcPct val="100000"/>
               </a:lnSpc>
               <a:spcAft>
-                <a:spcPts val="900"/>
+                <a:spcPts val="1000"/>
               </a:spcAft>
               <a:buSzPct val="100000"/>
               <a:buChar char="•"/>
@@ -24005,7 +24079,7 @@
                 <a:ea typeface="Calibri" pitchFamily="34" charset="-122"/>
                 <a:cs typeface="Calibri" pitchFamily="34" charset="-120"/>
               </a:rPr>
-              <a:t>Target SpO₂ ≥ 92% (adult), ≥ 88% (COPD per GOLD), ≥ 94% (TBI per BTF).</a:t>
+              <a:t>Target SpO₂ ≥ 92% (adult), ≥ 88% (COPD per GOLD), ≥ 94% (TBI per BTF). Hyperoxia post-ROSC worsens neurologic outcome — AHA recommends SpO₂ 90–98% after cardiac arrest (2025 update; previously 92–98%).</a:t>
             </a:r>
             <a:endParaRPr lang="en-US" sz="1550" dirty="0"/>
           </a:p>
@@ -24015,7 +24089,7 @@
                 <a:spcPct val="100000"/>
               </a:lnSpc>
               <a:spcAft>
-                <a:spcPts val="900"/>
+                <a:spcPts val="1000"/>
               </a:spcAft>
               <a:buSzPct val="100000"/>
               <a:buChar char="•"/>
@@ -24029,7 +24103,7 @@
                 <a:ea typeface="Calibri" pitchFamily="34" charset="-122"/>
                 <a:cs typeface="Calibri" pitchFamily="34" charset="-120"/>
               </a:rPr>
-              <a:t>PEEP is the pressure remaining in airways at end-exhalation.</a:t>
+              <a:t>PEEP is the pressure remaining in airways at end-exhalation. Adult default 5 cmH₂O. ARDS uses 10–15 cmH₂O paired with FiO₂ per the ARDSNet table.</a:t>
             </a:r>
             <a:endParaRPr lang="en-US" sz="1550" dirty="0"/>
           </a:p>
@@ -24039,7 +24113,7 @@
                 <a:spcPct val="100000"/>
               </a:lnSpc>
               <a:spcAft>
-                <a:spcPts val="900"/>
+                <a:spcPts val="1000"/>
               </a:spcAft>
               <a:buSzPct val="100000"/>
               <a:buChar char="•"/>
@@ -24053,7 +24127,7 @@
                 <a:ea typeface="Calibri" pitchFamily="34" charset="-122"/>
                 <a:cs typeface="Calibri" pitchFamily="34" charset="-120"/>
               </a:rPr>
-              <a:t>PEEP recruits collapsed alveoli — the fix for shunt physiology.</a:t>
+              <a:t>PEEP recruits collapsed alveoli — the fix for shunt physiology. It also reduces preload, which can drop BP in volume-depleted patients. Pair PEEP with FiO₂ together, not separately.</a:t>
             </a:r>
             <a:endParaRPr lang="en-US" sz="1550" dirty="0"/>
           </a:p>
@@ -25351,7 +25425,7 @@
         <p:spPr>
           <a:xfrm>
             <a:off x="548640" y="2148840"/>
-            <a:ext cx="10058400" cy="4114800"/>
+            <a:ext cx="10058400" cy="4160520"/>
           </a:xfrm>
           <a:prstGeom prst="rect">
             <a:avLst/>
@@ -25368,7 +25442,7 @@
                 <a:spcPct val="100000"/>
               </a:lnSpc>
               <a:spcAft>
-                <a:spcPts val="900"/>
+                <a:spcPts val="1000"/>
               </a:spcAft>
               <a:buSzPct val="100000"/>
               <a:buChar char="•"/>
@@ -25382,7 +25456,7 @@
                 <a:ea typeface="Calibri" pitchFamily="34" charset="-122"/>
                 <a:cs typeface="Calibri" pitchFamily="34" charset="-120"/>
               </a:rPr>
-              <a:t>I:E is the ratio of inspiratory time to expiratory time.</a:t>
+              <a:t>I:E is the ratio of inspiratory time to expiratory time. Adult default is 1:2 — inspiration takes half as long as exhalation.</a:t>
             </a:r>
             <a:endParaRPr lang="en-US" sz="1550" dirty="0"/>
           </a:p>
@@ -25392,7 +25466,7 @@
                 <a:spcPct val="100000"/>
               </a:lnSpc>
               <a:spcAft>
-                <a:spcPts val="900"/>
+                <a:spcPts val="1000"/>
               </a:spcAft>
               <a:buSzPct val="100000"/>
               <a:buChar char="•"/>
@@ -25406,7 +25480,7 @@
                 <a:ea typeface="Calibri" pitchFamily="34" charset="-122"/>
                 <a:cs typeface="Calibri" pitchFamily="34" charset="-120"/>
               </a:rPr>
-              <a:t>In obstructive disease (asthma, COPD), set 1:4 or 1:5.</a:t>
+              <a:t>In obstructive disease (asthma, COPD), set 1:4 or 1:5. Let the patient exhale. Forcing the rate up traps gas (auto-PEEP), drops blood pressure, and risks barotrauma.</a:t>
             </a:r>
             <a:endParaRPr lang="en-US" sz="1550" dirty="0"/>
           </a:p>
@@ -25416,7 +25490,7 @@
                 <a:spcPct val="100000"/>
               </a:lnSpc>
               <a:spcAft>
-                <a:spcPts val="900"/>
+                <a:spcPts val="1000"/>
               </a:spcAft>
               <a:buSzPct val="100000"/>
               <a:buChar char="•"/>
@@ -25430,7 +25504,7 @@
                 <a:ea typeface="Calibri" pitchFamily="34" charset="-122"/>
                 <a:cs typeface="Calibri" pitchFamily="34" charset="-120"/>
               </a:rPr>
-              <a:t>On the LTV: you set inspiratory TIME in seconds (typically 1.0 to 1.2 in adults).</a:t>
+              <a:t>On the LTV: you set inspiratory TIME in seconds (typically 1.0 to 1.2 in adults). The screen calculates the I:E.</a:t>
             </a:r>
             <a:endParaRPr lang="en-US" sz="1550" dirty="0"/>
           </a:p>
@@ -25440,7 +25514,7 @@
                 <a:spcPct val="100000"/>
               </a:lnSpc>
               <a:spcAft>
-                <a:spcPts val="900"/>
+                <a:spcPts val="1000"/>
               </a:spcAft>
               <a:buSzPct val="100000"/>
               <a:buChar char="•"/>
@@ -25454,7 +25528,7 @@
                 <a:ea typeface="Calibri" pitchFamily="34" charset="-122"/>
                 <a:cs typeface="Calibri" pitchFamily="34" charset="-120"/>
               </a:rPr>
-              <a:t>Watch the expiratory flow waveform.</a:t>
+              <a:t>Watch the expiratory flow waveform. If it doesn't return to zero before the next breath starts, you have auto-PEEP. Slow the rate and lengthen exhalation.</a:t>
             </a:r>
             <a:endParaRPr lang="en-US" sz="1550" dirty="0"/>
           </a:p>
@@ -25618,7 +25692,7 @@
         <p:spPr>
           <a:xfrm>
             <a:off x="548640" y="2148840"/>
-            <a:ext cx="6309360" cy="4114800"/>
+            <a:ext cx="6309360" cy="4160520"/>
           </a:xfrm>
           <a:prstGeom prst="rect">
             <a:avLst/>
@@ -25635,7 +25709,7 @@
                 <a:spcPct val="100000"/>
               </a:lnSpc>
               <a:spcAft>
-                <a:spcPts val="900"/>
+                <a:spcPts val="1000"/>
               </a:spcAft>
               <a:buSzPct val="100000"/>
               <a:buChar char="•"/>
@@ -25649,7 +25723,7 @@
                 <a:ea typeface="Calibri" pitchFamily="34" charset="-122"/>
                 <a:cs typeface="Calibri" pitchFamily="34" charset="-120"/>
               </a:rPr>
-              <a:t>Peak Inspiratory Pressure (PIP): highest airway pressure during inspiration.</a:t>
+              <a:t>Peak Inspiratory Pressure (PIP): highest airway pressure during inspiration. Displayed continuously. Keep &lt; 35 cmH₂O.</a:t>
             </a:r>
             <a:endParaRPr lang="en-US" sz="1550" dirty="0"/>
           </a:p>
@@ -25659,7 +25733,7 @@
                 <a:spcPct val="100000"/>
               </a:lnSpc>
               <a:spcAft>
-                <a:spcPts val="900"/>
+                <a:spcPts val="1000"/>
               </a:spcAft>
               <a:buSzPct val="100000"/>
               <a:buChar char="•"/>
@@ -25673,7 +25747,7 @@
                 <a:ea typeface="Calibri" pitchFamily="34" charset="-122"/>
                 <a:cs typeface="Calibri" pitchFamily="34" charset="-120"/>
               </a:rPr>
-              <a:t>Plateau Pressure (Pplat): airway pressure during a 0.5-second inspiratory hold (no flow).</a:t>
+              <a:t>Plateau Pressure (Pplat): airway pressure during a 0.5-second inspiratory hold (no flow). Reflects alveolar pressure / compliance. Keep &lt; 30 cmH₂O — ARDSNet protocol.</a:t>
             </a:r>
             <a:endParaRPr lang="en-US" sz="1550" dirty="0"/>
           </a:p>
@@ -25683,7 +25757,7 @@
                 <a:spcPct val="100000"/>
               </a:lnSpc>
               <a:spcAft>
-                <a:spcPts val="900"/>
+                <a:spcPts val="1000"/>
               </a:spcAft>
               <a:buSzPct val="100000"/>
               <a:buChar char="•"/>
@@ -25697,7 +25771,7 @@
                 <a:ea typeface="Calibri" pitchFamily="34" charset="-122"/>
                 <a:cs typeface="Calibri" pitchFamily="34" charset="-120"/>
               </a:rPr>
-              <a:t>Math: PIP ≈ Pplat + (Resistance × Flow).</a:t>
+              <a:t>Math: PIP ≈ Pplat + (Resistance × Flow). High PIP + normal Pplat = AIRWAY problem (resistance). Both high = LUNG problem (compliance).</a:t>
             </a:r>
             <a:endParaRPr lang="en-US" sz="1550" dirty="0"/>
           </a:p>
@@ -25707,7 +25781,7 @@
                 <a:spcPct val="100000"/>
               </a:lnSpc>
               <a:spcAft>
-                <a:spcPts val="900"/>
+                <a:spcPts val="1000"/>
               </a:spcAft>
               <a:buSzPct val="100000"/>
               <a:buChar char="•"/>
@@ -25721,7 +25795,7 @@
                 <a:ea typeface="Calibri" pitchFamily="34" charset="-122"/>
                 <a:cs typeface="Calibri" pitchFamily="34" charset="-120"/>
               </a:rPr>
-              <a:t>Driving pressure (ΔP) = Pplat − PEEP.</a:t>
+              <a:t>Driving pressure (ΔP) = Pplat − PEEP. Amato et al. (NEJM 2015) reanalyzed nine ARDS RCTs and showed ΔP was the strongest mortality predictor. Each 7 cmH₂O rise increased mortality ~40%.</a:t>
             </a:r>
             <a:endParaRPr lang="en-US" sz="1550" dirty="0"/>
           </a:p>
@@ -26030,7 +26104,7 @@
         <p:spPr>
           <a:xfrm>
             <a:off x="548640" y="2148840"/>
-            <a:ext cx="6309360" cy="4114800"/>
+            <a:ext cx="6309360" cy="4160520"/>
           </a:xfrm>
           <a:prstGeom prst="rect">
             <a:avLst/>
@@ -26047,7 +26121,7 @@
                 <a:spcPct val="100000"/>
               </a:lnSpc>
               <a:spcAft>
-                <a:spcPts val="900"/>
+                <a:spcPts val="1000"/>
               </a:spcAft>
               <a:buSzPct val="100000"/>
               <a:buChar char="•"/>
@@ -26061,7 +26135,7 @@
                 <a:ea typeface="Calibri" pitchFamily="34" charset="-122"/>
                 <a:cs typeface="Calibri" pitchFamily="34" charset="-120"/>
               </a:rPr>
-              <a:t>Devine IBW formulas.</a:t>
+              <a:t>Devine IBW formulas. Men: 50 + 2.3 × (inches over 60). Women: 45.5 + 2.3 × (inches over 60).</a:t>
             </a:r>
             <a:endParaRPr lang="en-US" sz="1550" dirty="0"/>
           </a:p>
@@ -26071,7 +26145,7 @@
                 <a:spcPct val="100000"/>
               </a:lnSpc>
               <a:spcAft>
-                <a:spcPts val="900"/>
+                <a:spcPts val="1000"/>
               </a:spcAft>
               <a:buSzPct val="100000"/>
               <a:buChar char="•"/>
@@ -26085,7 +26159,7 @@
                 <a:ea typeface="Calibri" pitchFamily="34" charset="-122"/>
                 <a:cs typeface="Calibri" pitchFamily="34" charset="-120"/>
               </a:rPr>
-              <a:t>Examples.</a:t>
+              <a:t>Examples. 5'6" man: 50 + 2.3 × 6 = 63.8 kg → safe Vt 380–510 mL. 5'10" woman: 45.5 + 2.3 × 10 = 68.5 kg → safe Vt 410–548 mL.</a:t>
             </a:r>
             <a:endParaRPr lang="en-US" sz="1550" dirty="0"/>
           </a:p>
@@ -26095,7 +26169,7 @@
                 <a:spcPct val="100000"/>
               </a:lnSpc>
               <a:spcAft>
-                <a:spcPts val="900"/>
+                <a:spcPts val="1000"/>
               </a:spcAft>
               <a:buSzPct val="100000"/>
               <a:buChar char="•"/>
@@ -26109,7 +26183,7 @@
                 <a:ea typeface="Calibri" pitchFamily="34" charset="-122"/>
                 <a:cs typeface="Calibri" pitchFamily="34" charset="-120"/>
               </a:rPr>
-              <a:t>Safe adult defaults to defend: AC/VC mode; Vt 6–8 mL/kg IBW; RR 14, titrated to EtCO₂ 35–45; FiO₂ 100% then wean; PEEP 5; I:E 1:2; alarms PIP 35, low MV…</a:t>
+              <a:t>Safe adult defaults to defend: AC/VC mode; Vt 6–8 mL/kg IBW; RR 14, titrated to EtCO₂ 35–45; FiO₂ 100% then wean; PEEP 5; I:E 1:2; alarms PIP 35, low MV 4, low PEEP 3, apnea 20 sec.</a:t>
             </a:r>
             <a:endParaRPr lang="en-US" sz="1550" dirty="0"/>
           </a:p>
@@ -26119,7 +26193,7 @@
                 <a:spcPct val="100000"/>
               </a:lnSpc>
               <a:spcAft>
-                <a:spcPts val="900"/>
+                <a:spcPts val="1000"/>
               </a:spcAft>
               <a:buSzPct val="100000"/>
               <a:buChar char="•"/>
@@ -26133,7 +26207,7 @@
                 <a:ea typeface="Calibri" pitchFamily="34" charset="-122"/>
                 <a:cs typeface="Calibri" pitchFamily="34" charset="-120"/>
               </a:rPr>
-              <a:t>When in doubt, return to defaults.</a:t>
+              <a:t>When in doubt, return to defaults. Change ONE thing at a time, reassess in 30 seconds, and document with vitals before and after.</a:t>
             </a:r>
             <a:endParaRPr lang="en-US" sz="1550" dirty="0"/>
           </a:p>
@@ -26278,7 +26352,7 @@
                 <a:ea typeface="Calibri" pitchFamily="34" charset="-122"/>
                 <a:cs typeface="Calibri" pitchFamily="34" charset="-120"/>
               </a:rPr>
-              <a:t>5'10" adult ≈ 73 kg IBW → Vt 440–580 mL. Memorize this anchor for when you don't have a card handy.</a:t>
+              <a:t>IBW is sex-specific — one number won't do. By the Devine formulas a 5'10" man ≈ 73 kg (Vt 440–580 mL) and a 5'10" woman ≈ 68.5 kg (Vt 410–548 mL). Anchor to the patient's sex and height, never actual weight.</a:t>
             </a:r>
             <a:endParaRPr lang="en-US" sz="1350" dirty="0"/>
           </a:p>
@@ -26802,7 +26876,9 @@
       </p:sp>
       <p:sp>
         <p:nvSpPr>
-          <p:cNvPr id="14" name="Text 12"/>
+          <p:cNvPr id="14" name="Text 12">
+            <a:hlinkClick r:id="rId1" tooltip="Open this module's simulator mission"/>
+          </p:cNvPr>
           <p:cNvSpPr/>
           <p:nvPr/>
         </p:nvSpPr>
@@ -26825,13 +26901,20 @@
               <a:buNone/>
             </a:pPr>
             <a:r>
-              <a:rPr lang="en-US" sz="1700" b="1" dirty="0">
+              <a:rPr lang="en-US" sz="1700" b="1" u="sng" dirty="0">
                 <a:solidFill>
                   <a:srgbClr val="FFFFFF"/>
                 </a:solidFill>
                 <a:latin typeface="Calibri" pitchFamily="34" charset="0"/>
                 <a:ea typeface="Calibri" pitchFamily="34" charset="-122"/>
                 <a:cs typeface="Calibri" pitchFamily="34" charset="-120"/>
+                <a:hlinkClick r:id="rId1" invalidUrl="" action="" tgtFrame="" tooltip="Open this module's simulator mission" history="1" highlightClick="0" endSnd="0">
+                  <a:extLst>
+                    <a:ext uri="{A12FA001-AC4F-418D-AE19-62706E023703}">
+                      <ahyp:hlinkClr xmlns:ahyp="http://schemas.microsoft.com/office/drawing/2018/hyperlinkcolor" val="tx"/>
+                    </a:ext>
+                  </a:extLst>
+                </a:hlinkClick>
               </a:rPr>
               <a:t>LTV 1200 Simulator</a:t>
             </a:r>
@@ -26864,13 +26947,20 @@
               <a:buNone/>
             </a:pPr>
             <a:r>
-              <a:rPr lang="en-US" sz="1250" dirty="0">
-                <a:solidFill>
-                  <a:srgbClr val="A9C2E0"/>
-                </a:solidFill>
-                <a:latin typeface="Calibri" pitchFamily="34" charset="0"/>
-                <a:ea typeface="Calibri" pitchFamily="34" charset="-122"/>
-                <a:cs typeface="Calibri" pitchFamily="34" charset="-120"/>
+              <a:rPr lang="en-US" sz="1250" u="sng" dirty="0">
+                <a:solidFill>
+                  <a:srgbClr val="7FB0E6"/>
+                </a:solidFill>
+                <a:latin typeface="Calibri" pitchFamily="34" charset="0"/>
+                <a:ea typeface="Calibri" pitchFamily="34" charset="-122"/>
+                <a:cs typeface="Calibri" pitchFamily="34" charset="-120"/>
+                <a:hlinkClick r:id="rId2" invalidUrl="" action="" tgtFrame="" tooltip="" history="1" highlightClick="0" endSnd="0">
+                  <a:extLst>
+                    <a:ext uri="{A12FA001-AC4F-418D-AE19-62706E023703}">
+                      <ahyp:hlinkClr xmlns:ahyp="http://schemas.microsoft.com/office/drawing/2018/hyperlinkcolor" val="tx"/>
+                    </a:ext>
+                  </a:extLst>
+                </a:hlinkClick>
               </a:rPr>
               <a:t>vent-ltv1200.html?scenario=initial-settings  —  Build safe initial settings on a freshly intubated patient — Vt by IBW, PEEP, and…</a:t>
             </a:r>
@@ -27147,7 +27237,7 @@
                 <a:ea typeface="Calibri" pitchFamily="34" charset="-122"/>
                 <a:cs typeface="Calibri" pitchFamily="34" charset="-120"/>
               </a:rPr>
-              <a:t>5'10" adult ≈ 73 kg IBW → Vt 440–580 mL. Memorize this anchor for when you don't have a card handy.</a:t>
+              <a:t>IBW is sex-specific — one number won't do. By the Devine formulas a 5'10" man ≈ 73 kg (Vt 440–580 mL) and a 5'10" woman ≈ 68.5 kg (Vt 410–548 mL).…</a:t>
             </a:r>
             <a:endParaRPr lang="en-US" sz="1700" dirty="0"/>
           </a:p>
@@ -27664,7 +27754,7 @@
                 <a:ea typeface="Calibri" pitchFamily="34" charset="-122"/>
                 <a:cs typeface="Calibri" pitchFamily="34" charset="-120"/>
               </a:rPr>
-              <a:t>Day 1 · Foundations</a:t>
+              <a:t>Foundations</a:t>
             </a:r>
             <a:pPr indent="0" marL="0">
               <a:buNone/>
@@ -27678,7 +27768,7 @@
                 <a:ea typeface="Calibri" pitchFamily="34" charset="-122"/>
                 <a:cs typeface="Calibri" pitchFamily="34" charset="-120"/>
               </a:rPr>
-              <a:t>   ·   ~60 min   ·   6 lessons</a:t>
+              <a:t>   ·   6 lessons</a:t>
             </a:r>
             <a:endParaRPr lang="en-US" sz="1300" dirty="0"/>
           </a:p>
@@ -28768,7 +28858,7 @@
         <p:spPr>
           <a:xfrm>
             <a:off x="548640" y="2148840"/>
-            <a:ext cx="10058400" cy="4114800"/>
+            <a:ext cx="10058400" cy="4160520"/>
           </a:xfrm>
           <a:prstGeom prst="rect">
             <a:avLst/>
@@ -28785,7 +28875,7 @@
                 <a:spcPct val="100000"/>
               </a:lnSpc>
               <a:spcAft>
-                <a:spcPts val="900"/>
+                <a:spcPts val="1000"/>
               </a:spcAft>
               <a:buSzPct val="100000"/>
               <a:buChar char="•"/>
@@ -28799,7 +28889,7 @@
                 <a:ea typeface="Calibri" pitchFamily="34" charset="-122"/>
                 <a:cs typeface="Calibri" pitchFamily="34" charset="-120"/>
               </a:rPr>
-              <a:t>Every vent breath guarantees one thing and lets the other float — like inflating a tire: pump to a set volume of air and the pressure lands where it…</a:t>
+              <a:t>Every vent breath guarantees one thing and lets the other float — like inflating a tire: pump to a set volume of air and the pressure lands where it lands, or pump to a set pressure and the volume lands where it lands.</a:t>
             </a:r>
             <a:endParaRPr lang="en-US" sz="1550" dirty="0"/>
           </a:p>
@@ -28809,7 +28899,7 @@
                 <a:spcPct val="100000"/>
               </a:lnSpc>
               <a:spcAft>
-                <a:spcPts val="900"/>
+                <a:spcPts val="1000"/>
               </a:spcAft>
               <a:buSzPct val="100000"/>
               <a:buChar char="•"/>
@@ -28823,7 +28913,7 @@
                 <a:ea typeface="Calibri" pitchFamily="34" charset="-122"/>
                 <a:cs typeface="Calibri" pitchFamily="34" charset="-120"/>
               </a:rPr>
-              <a:t>Volume-targeted (AC/VC): you set Vt — vent delivers it.</a:t>
+              <a:t>Volume-targeted (AC/VC): you set Vt — vent delivers it. PRESSURE varies with lung compliance. Most EMS default. Watch PIP / Pplat.</a:t>
             </a:r>
             <a:endParaRPr lang="en-US" sz="1550" dirty="0"/>
           </a:p>
@@ -28833,7 +28923,7 @@
                 <a:spcPct val="100000"/>
               </a:lnSpc>
               <a:spcAft>
-                <a:spcPts val="900"/>
+                <a:spcPts val="1000"/>
               </a:spcAft>
               <a:buSzPct val="100000"/>
               <a:buChar char="•"/>
@@ -28847,7 +28937,7 @@
                 <a:ea typeface="Calibri" pitchFamily="34" charset="-122"/>
                 <a:cs typeface="Calibri" pitchFamily="34" charset="-120"/>
               </a:rPr>
-              <a:t>Pressure-targeted (AC/PC): you set inspiratory pressure — vent delivers it.</a:t>
+              <a:t>Pressure-targeted (AC/PC): you set inspiratory pressure — vent delivers it. VOLUME varies. Pressure capped, so barotrauma risk lower. Watch delivered Vt.</a:t>
             </a:r>
             <a:endParaRPr lang="en-US" sz="1550" dirty="0"/>
           </a:p>
@@ -28857,7 +28947,7 @@
                 <a:spcPct val="100000"/>
               </a:lnSpc>
               <a:spcAft>
-                <a:spcPts val="900"/>
+                <a:spcPts val="1000"/>
               </a:spcAft>
               <a:buSzPct val="100000"/>
               <a:buChar char="•"/>
@@ -28871,7 +28961,7 @@
                 <a:ea typeface="Calibri" pitchFamily="34" charset="-122"/>
                 <a:cs typeface="Calibri" pitchFamily="34" charset="-120"/>
               </a:rPr>
-              <a:t>Trade-off: AC/VC gives predictable minute ventilation but variable pressure.</a:t>
+              <a:t>Trade-off: AC/VC gives predictable minute ventilation but variable pressure. AC/PC caps pressure but volume floats with stiffness.</a:t>
             </a:r>
             <a:endParaRPr lang="en-US" sz="1550" dirty="0"/>
           </a:p>
@@ -29035,7 +29125,7 @@
         <p:spPr>
           <a:xfrm>
             <a:off x="548640" y="2148840"/>
-            <a:ext cx="6309360" cy="4114800"/>
+            <a:ext cx="6309360" cy="4160520"/>
           </a:xfrm>
           <a:prstGeom prst="rect">
             <a:avLst/>
@@ -29052,7 +29142,7 @@
                 <a:spcPct val="100000"/>
               </a:lnSpc>
               <a:spcAft>
-                <a:spcPts val="900"/>
+                <a:spcPts val="1000"/>
               </a:spcAft>
               <a:buSzPct val="100000"/>
               <a:buChar char="•"/>
@@ -29066,7 +29156,7 @@
                 <a:ea typeface="Calibri" pitchFamily="34" charset="-122"/>
                 <a:cs typeface="Calibri" pitchFamily="34" charset="-120"/>
               </a:rPr>
-              <a:t>"Control" does NOT mean the patient is locked out.</a:t>
+              <a:t>"Control" does NOT mean the patient is locked out. In AC mode, the patient can trigger their own breaths above the set rate.</a:t>
             </a:r>
             <a:endParaRPr lang="en-US" sz="1550" dirty="0"/>
           </a:p>
@@ -29076,7 +29166,7 @@
                 <a:spcPct val="100000"/>
               </a:lnSpc>
               <a:spcAft>
-                <a:spcPts val="900"/>
+                <a:spcPts val="1000"/>
               </a:spcAft>
               <a:buSzPct val="100000"/>
               <a:buChar char="•"/>
@@ -29090,7 +29180,7 @@
                 <a:ea typeface="Calibri" pitchFamily="34" charset="-122"/>
                 <a:cs typeface="Calibri" pitchFamily="34" charset="-120"/>
               </a:rPr>
-              <a:t>AC guarantees a MINIMUM number of breaths per minute (set by RR).</a:t>
+              <a:t>AC guarantees a MINIMUM number of breaths per minute (set by RR). Patient-triggered breaths receive the full set Vt (or pressure) too. No "small supportive" breaths in pure AC.</a:t>
             </a:r>
             <a:endParaRPr lang="en-US" sz="1550" dirty="0"/>
           </a:p>
@@ -29100,7 +29190,7 @@
                 <a:spcPct val="100000"/>
               </a:lnSpc>
               <a:spcAft>
-                <a:spcPts val="900"/>
+                <a:spcPts val="1000"/>
               </a:spcAft>
               <a:buSzPct val="100000"/>
               <a:buChar char="•"/>
@@ -29114,7 +29204,7 @@
                 <a:ea typeface="Calibri" pitchFamily="34" charset="-122"/>
                 <a:cs typeface="Calibri" pitchFamily="34" charset="-120"/>
               </a:rPr>
-              <a:t>Historical note: the original mode was CMV (Continuous Mandatory Ventilation) — patient locked out completely.</a:t>
+              <a:t>Historical note: the original mode was CMV (Continuous Mandatory Ventilation) — patient locked out completely. AC came along to allow triggering, dramatically improving comfort.</a:t>
             </a:r>
             <a:endParaRPr lang="en-US" sz="1550" dirty="0"/>
           </a:p>
@@ -29124,7 +29214,7 @@
                 <a:spcPct val="100000"/>
               </a:lnSpc>
               <a:spcAft>
-                <a:spcPts val="900"/>
+                <a:spcPts val="1000"/>
               </a:spcAft>
               <a:buSzPct val="100000"/>
               <a:buChar char="•"/>
@@ -29138,7 +29228,7 @@
                 <a:ea typeface="Calibri" pitchFamily="34" charset="-122"/>
                 <a:cs typeface="Calibri" pitchFamily="34" charset="-120"/>
               </a:rPr>
-              <a:t>Tachypneic patient on AC can stack breaths and develop auto-PEEP.</a:t>
+              <a:t>Tachypneic patient on AC can stack breaths and develop auto-PEEP. Fix the cause of tachypnea (sedation, pain, hypoxia) — don't just lower the set rate.</a:t>
             </a:r>
             <a:endParaRPr lang="en-US" sz="1550" dirty="0"/>
           </a:p>
@@ -29447,7 +29537,7 @@
         <p:spPr>
           <a:xfrm>
             <a:off x="548640" y="2148840"/>
-            <a:ext cx="6309360" cy="4114800"/>
+            <a:ext cx="6309360" cy="4160520"/>
           </a:xfrm>
           <a:prstGeom prst="rect">
             <a:avLst/>
@@ -29464,7 +29554,7 @@
                 <a:spcPct val="100000"/>
               </a:lnSpc>
               <a:spcAft>
-                <a:spcPts val="900"/>
+                <a:spcPts val="1000"/>
               </a:spcAft>
               <a:buSzPct val="100000"/>
               <a:buChar char="•"/>
@@ -29478,7 +29568,7 @@
                 <a:ea typeface="Calibri" pitchFamily="34" charset="-122"/>
                 <a:cs typeface="Calibri" pitchFamily="34" charset="-120"/>
               </a:rPr>
-              <a:t>Synchronized Intermittent Mandatory Ventilation: vent delivers a SET rate of mandatory breaths.</a:t>
+              <a:t>Synchronized Intermittent Mandatory Ventilation: vent delivers a SET rate of mandatory breaths. Between mandatory breaths, the patient breathes spontaneously at any volume.</a:t>
             </a:r>
             <a:endParaRPr lang="en-US" sz="1550" dirty="0"/>
           </a:p>
@@ -29488,7 +29578,7 @@
                 <a:spcPct val="100000"/>
               </a:lnSpc>
               <a:spcAft>
-                <a:spcPts val="900"/>
+                <a:spcPts val="1000"/>
               </a:spcAft>
               <a:buSzPct val="100000"/>
               <a:buChar char="•"/>
@@ -29502,7 +29592,7 @@
                 <a:ea typeface="Calibri" pitchFamily="34" charset="-122"/>
                 <a:cs typeface="Calibri" pitchFamily="34" charset="-120"/>
               </a:rPr>
-              <a:t>Originally designed as a weaning mode — set rate decreased as the patient improved.</a:t>
+              <a:t>Originally designed as a weaning mode — set rate decreased as the patient improved. Intuitive but not supported by evidence.</a:t>
             </a:r>
             <a:endParaRPr lang="en-US" sz="1550" dirty="0"/>
           </a:p>
@@ -29512,7 +29602,7 @@
                 <a:spcPct val="100000"/>
               </a:lnSpc>
               <a:spcAft>
-                <a:spcPts val="900"/>
+                <a:spcPts val="1000"/>
               </a:spcAft>
               <a:buSzPct val="100000"/>
               <a:buChar char="•"/>
@@ -29526,7 +29616,7 @@
                 <a:ea typeface="Calibri" pitchFamily="34" charset="-122"/>
                 <a:cs typeface="Calibri" pitchFamily="34" charset="-120"/>
               </a:rPr>
-              <a:t>Esteban et al.</a:t>
+              <a:t>Esteban et al. (NEJM 1995) randomized weaning strategies. SIMV was the SLOWEST of four methods. Once-daily T-piece trials and PSV alone produced faster extubation. Most modern ICUs no longer use SIMV.</a:t>
             </a:r>
             <a:endParaRPr lang="en-US" sz="1550" dirty="0"/>
           </a:p>
@@ -29536,7 +29626,7 @@
                 <a:spcPct val="100000"/>
               </a:lnSpc>
               <a:spcAft>
-                <a:spcPts val="900"/>
+                <a:spcPts val="1000"/>
               </a:spcAft>
               <a:buSzPct val="100000"/>
               <a:buChar char="•"/>
@@ -29550,7 +29640,7 @@
                 <a:ea typeface="Calibri" pitchFamily="34" charset="-122"/>
                 <a:cs typeface="Calibri" pitchFamily="34" charset="-120"/>
               </a:rPr>
-              <a:t>Pressure Support (PSV): vent senses spontaneous effort and adds a fixed pressure (5–15 cmH₂O).</a:t>
+              <a:t>Pressure Support (PSV): vent senses spontaneous effort and adds a fixed pressure (5–15 cmH₂O). Compensates for ETT/circuit resistance (~5) or actively unloads the diaphragm (10–15).</a:t>
             </a:r>
             <a:endParaRPr lang="en-US" sz="1550" dirty="0"/>
           </a:p>
@@ -29859,7 +29949,7 @@
         <p:spPr>
           <a:xfrm>
             <a:off x="548640" y="2148840"/>
-            <a:ext cx="6309360" cy="4114800"/>
+            <a:ext cx="6309360" cy="4160520"/>
           </a:xfrm>
           <a:prstGeom prst="rect">
             <a:avLst/>
@@ -29876,7 +29966,7 @@
                 <a:spcPct val="100000"/>
               </a:lnSpc>
               <a:spcAft>
-                <a:spcPts val="900"/>
+                <a:spcPts val="1000"/>
               </a:spcAft>
               <a:buSzPct val="100000"/>
               <a:buChar char="•"/>
@@ -29900,7 +29990,7 @@
                 <a:spcPct val="100000"/>
               </a:lnSpc>
               <a:spcAft>
-                <a:spcPts val="900"/>
+                <a:spcPts val="1000"/>
               </a:spcAft>
               <a:buSzPct val="100000"/>
               <a:buChar char="•"/>
@@ -29924,7 +30014,7 @@
                 <a:spcPct val="100000"/>
               </a:lnSpc>
               <a:spcAft>
-                <a:spcPts val="900"/>
+                <a:spcPts val="1000"/>
               </a:spcAft>
               <a:buSzPct val="100000"/>
               <a:buChar char="•"/>
@@ -29948,7 +30038,7 @@
                 <a:spcPct val="100000"/>
               </a:lnSpc>
               <a:spcAft>
-                <a:spcPts val="900"/>
+                <a:spcPts val="1000"/>
               </a:spcAft>
               <a:buSzPct val="100000"/>
               <a:buChar char="•"/>
@@ -30271,7 +30361,7 @@
         <p:spPr>
           <a:xfrm>
             <a:off x="548640" y="2148840"/>
-            <a:ext cx="10058400" cy="4114800"/>
+            <a:ext cx="10058400" cy="4160520"/>
           </a:xfrm>
           <a:prstGeom prst="rect">
             <a:avLst/>
@@ -30288,7 +30378,7 @@
                 <a:spcPct val="100000"/>
               </a:lnSpc>
               <a:spcAft>
-                <a:spcPts val="900"/>
+                <a:spcPts val="1000"/>
               </a:spcAft>
               <a:buSzPct val="100000"/>
               <a:buChar char="•"/>
@@ -30302,7 +30392,7 @@
                 <a:ea typeface="Calibri" pitchFamily="34" charset="-122"/>
                 <a:cs typeface="Calibri" pitchFamily="34" charset="-120"/>
               </a:rPr>
-              <a:t>CPAP: ONE pressure throughout the breath.</a:t>
+              <a:t>CPAP: ONE pressure throughout the breath. Patient does all the work. Best for OXYGENATION problems (CHF, acute pulmonary edema).</a:t>
             </a:r>
             <a:endParaRPr lang="en-US" sz="1550" dirty="0"/>
           </a:p>
@@ -30312,7 +30402,7 @@
                 <a:spcPct val="100000"/>
               </a:lnSpc>
               <a:spcAft>
-                <a:spcPts val="900"/>
+                <a:spcPts val="1000"/>
               </a:spcAft>
               <a:buSzPct val="100000"/>
               <a:buChar char="•"/>
@@ -30326,7 +30416,7 @@
                 <a:ea typeface="Calibri" pitchFamily="34" charset="-122"/>
                 <a:cs typeface="Calibri" pitchFamily="34" charset="-120"/>
               </a:rPr>
-              <a:t>Bersten et al.</a:t>
+              <a:t>Bersten et al. (NEJM 1991): in cardiogenic pulmonary edema, CPAP eliminated intubation in the treated arm. Cochrane: NNT 4–7 to prevent intubation.</a:t>
             </a:r>
             <a:endParaRPr lang="en-US" sz="1550" dirty="0"/>
           </a:p>
@@ -30336,7 +30426,7 @@
                 <a:spcPct val="100000"/>
               </a:lnSpc>
               <a:spcAft>
-                <a:spcPts val="900"/>
+                <a:spcPts val="1000"/>
               </a:spcAft>
               <a:buSzPct val="100000"/>
               <a:buChar char="•"/>
@@ -30350,7 +30440,7 @@
                 <a:ea typeface="Calibri" pitchFamily="34" charset="-122"/>
                 <a:cs typeface="Calibri" pitchFamily="34" charset="-120"/>
               </a:rPr>
-              <a:t>BiPAP: TWO pressures (IPAP / EPAP).</a:t>
+              <a:t>BiPAP: TWO pressures (IPAP / EPAP). IPAP − EPAP = pressure support per breath. Best for VENTILATION problems (COPD with hypercapnia). Mechanism: EPAP overcomes auto-PEEP; IPAP unloads tired diaphragm.</a:t>
             </a:r>
             <a:endParaRPr lang="en-US" sz="1550" dirty="0"/>
           </a:p>
@@ -30360,7 +30450,7 @@
                 <a:spcPct val="100000"/>
               </a:lnSpc>
               <a:spcAft>
-                <a:spcPts val="900"/>
+                <a:spcPts val="1000"/>
               </a:spcAft>
               <a:buSzPct val="100000"/>
               <a:buChar char="•"/>
@@ -30374,7 +30464,7 @@
                 <a:ea typeface="Calibri" pitchFamily="34" charset="-122"/>
                 <a:cs typeface="Calibri" pitchFamily="34" charset="-120"/>
               </a:rPr>
-              <a:t>Brochard et al.</a:t>
+              <a:t>Brochard et al. (NEJM 1995): in COPD exacerbation with hypercapnia, BiPAP reduced intubation from 74% to 26% and mortality from 29% to 9%.</a:t>
             </a:r>
             <a:endParaRPr lang="en-US" sz="1550" dirty="0"/>
           </a:p>
@@ -30538,7 +30628,7 @@
         <p:spPr>
           <a:xfrm>
             <a:off x="548640" y="2148840"/>
-            <a:ext cx="10058400" cy="4114800"/>
+            <a:ext cx="10058400" cy="4160520"/>
           </a:xfrm>
           <a:prstGeom prst="rect">
             <a:avLst/>
@@ -30555,7 +30645,7 @@
                 <a:spcPct val="100000"/>
               </a:lnSpc>
               <a:spcAft>
-                <a:spcPts val="900"/>
+                <a:spcPts val="1000"/>
               </a:spcAft>
               <a:buSzPct val="100000"/>
               <a:buChar char="•"/>
@@ -30569,7 +30659,7 @@
                 <a:ea typeface="Calibri" pitchFamily="34" charset="-122"/>
                 <a:cs typeface="Calibri" pitchFamily="34" charset="-120"/>
               </a:rPr>
-              <a:t>Pressure-Regulated Volume Control: a HYBRID.</a:t>
+              <a:t>Pressure-Regulated Volume Control: a HYBRID. You set a Vt target; the vent delivers it using the LOWEST pressure required, measuring compliance breath-by-breath.</a:t>
             </a:r>
             <a:endParaRPr lang="en-US" sz="1550" dirty="0"/>
           </a:p>
@@ -30579,7 +30669,7 @@
                 <a:spcPct val="100000"/>
               </a:lnSpc>
               <a:spcAft>
-                <a:spcPts val="900"/>
+                <a:spcPts val="1000"/>
               </a:spcAft>
               <a:buSzPct val="100000"/>
               <a:buChar char="•"/>
@@ -30603,7 +30693,7 @@
                 <a:spcPct val="100000"/>
               </a:lnSpc>
               <a:spcAft>
-                <a:spcPts val="900"/>
+                <a:spcPts val="1000"/>
               </a:spcAft>
               <a:buSzPct val="100000"/>
               <a:buChar char="•"/>
@@ -30617,7 +30707,7 @@
                 <a:ea typeface="Calibri" pitchFamily="34" charset="-122"/>
                 <a:cs typeface="Calibri" pitchFamily="34" charset="-120"/>
               </a:rPr>
-              <a:t>The LTV 1200 does NOT natively offer PRVC.</a:t>
+              <a:t>The LTV 1200 does NOT natively offer PRVC. If you inherit a patient on PRVC from a sending facility, coordinate with the team, then switch to AC/VC (matching Vt and RR) or AC/PC.</a:t>
             </a:r>
             <a:endParaRPr lang="en-US" sz="1550" dirty="0"/>
           </a:p>
@@ -30627,7 +30717,7 @@
                 <a:spcPct val="100000"/>
               </a:lnSpc>
               <a:spcAft>
-                <a:spcPts val="900"/>
+                <a:spcPts val="1000"/>
               </a:spcAft>
               <a:buSzPct val="100000"/>
               <a:buChar char="•"/>
@@ -30641,7 +30731,7 @@
                 <a:ea typeface="Calibri" pitchFamily="34" charset="-122"/>
                 <a:cs typeface="Calibri" pitchFamily="34" charset="-120"/>
               </a:rPr>
-              <a:t>APRV (Airway Pressure Release Ventilation) — used in refractory ARDS.</a:t>
+              <a:t>APRV (Airway Pressure Release Ventilation) — used in refractory ARDS. NAVA (Neurally Adjusted Ventilatory Assist) — ICU-level synchrony. HFOV — once a rescue, OSCILLATE (NEJM 2013) showed harm.</a:t>
             </a:r>
             <a:endParaRPr lang="en-US" sz="1550" dirty="0"/>
           </a:p>
@@ -30805,7 +30895,7 @@
         <p:spPr>
           <a:xfrm>
             <a:off x="548640" y="2148840"/>
-            <a:ext cx="10058400" cy="4114800"/>
+            <a:ext cx="10058400" cy="4160520"/>
           </a:xfrm>
           <a:prstGeom prst="rect">
             <a:avLst/>
@@ -30822,7 +30912,7 @@
                 <a:spcPct val="100000"/>
               </a:lnSpc>
               <a:spcAft>
-                <a:spcPts val="900"/>
+                <a:spcPts val="1000"/>
               </a:spcAft>
               <a:buSzPct val="100000"/>
               <a:buChar char="•"/>
@@ -30836,7 +30926,7 @@
                 <a:ea typeface="Calibri" pitchFamily="34" charset="-122"/>
                 <a:cs typeface="Calibri" pitchFamily="34" charset="-120"/>
               </a:rPr>
-              <a:t>Patient-vent dyssynchrony is the patient and the machine fighting over who leads the breath — pushing and pulling at different moments, like two people…</a:t>
+              <a:t>Patient-vent dyssynchrony is the patient and the machine fighting over who leads the breath — pushing and pulling at different moments, like two people trying to row out of step.</a:t>
             </a:r>
             <a:endParaRPr lang="en-US" sz="1550" dirty="0"/>
           </a:p>
@@ -30846,7 +30936,7 @@
                 <a:spcPct val="100000"/>
               </a:lnSpc>
               <a:spcAft>
-                <a:spcPts val="900"/>
+                <a:spcPts val="1000"/>
               </a:spcAft>
               <a:buSzPct val="100000"/>
               <a:buChar char="•"/>
@@ -30860,7 +30950,7 @@
                 <a:ea typeface="Calibri" pitchFamily="34" charset="-122"/>
                 <a:cs typeface="Calibri" pitchFamily="34" charset="-120"/>
               </a:rPr>
-              <a:t>Trigger sensitivity controls how easily the patient initiates a breath.</a:t>
+              <a:t>Trigger sensitivity controls how easily the patient initiates a breath. Pressure trigger (−1 to −2 cmH₂O) is the common default. Flow trigger (1–3 L/min) is more responsive.</a:t>
             </a:r>
             <a:endParaRPr lang="en-US" sz="1550" dirty="0"/>
           </a:p>
@@ -30870,7 +30960,7 @@
                 <a:spcPct val="100000"/>
               </a:lnSpc>
               <a:spcAft>
-                <a:spcPts val="900"/>
+                <a:spcPts val="1000"/>
               </a:spcAft>
               <a:buSzPct val="100000"/>
               <a:buChar char="•"/>
@@ -30884,7 +30974,7 @@
                 <a:ea typeface="Calibri" pitchFamily="34" charset="-122"/>
                 <a:cs typeface="Calibri" pitchFamily="34" charset="-120"/>
               </a:rPr>
-              <a:t>Inspiratory rise time: how fast the pressure ramps up at the start of inspiration (pressure-targeted modes).</a:t>
+              <a:t>Inspiratory rise time: how fast the pressure ramps up at the start of inspiration (pressure-targeted modes). Faster rise (0.1–0.2 sec) feels powerful but can jolt awake patients.</a:t>
             </a:r>
             <a:endParaRPr lang="en-US" sz="1550" dirty="0"/>
           </a:p>
@@ -30894,7 +30984,7 @@
                 <a:spcPct val="100000"/>
               </a:lnSpc>
               <a:spcAft>
-                <a:spcPts val="900"/>
+                <a:spcPts val="1000"/>
               </a:spcAft>
               <a:buSzPct val="100000"/>
               <a:buChar char="•"/>
@@ -31432,7 +31522,9 @@
       </p:sp>
       <p:sp>
         <p:nvSpPr>
-          <p:cNvPr id="14" name="Text 12"/>
+          <p:cNvPr id="14" name="Text 12">
+            <a:hlinkClick r:id="rId1" tooltip="Open this module's simulator mission"/>
+          </p:cNvPr>
           <p:cNvSpPr/>
           <p:nvPr/>
         </p:nvSpPr>
@@ -31455,13 +31547,20 @@
               <a:buNone/>
             </a:pPr>
             <a:r>
-              <a:rPr lang="en-US" sz="1700" b="1" dirty="0">
+              <a:rPr lang="en-US" sz="1700" b="1" u="sng" dirty="0">
                 <a:solidFill>
                   <a:srgbClr val="FFFFFF"/>
                 </a:solidFill>
                 <a:latin typeface="Calibri" pitchFamily="34" charset="0"/>
                 <a:ea typeface="Calibri" pitchFamily="34" charset="-122"/>
                 <a:cs typeface="Calibri" pitchFamily="34" charset="-120"/>
+                <a:hlinkClick r:id="rId1" invalidUrl="" action="" tgtFrame="" tooltip="Open this module's simulator mission" history="1" highlightClick="0" endSnd="0">
+                  <a:extLst>
+                    <a:ext uri="{A12FA001-AC4F-418D-AE19-62706E023703}">
+                      <ahyp:hlinkClr xmlns:ahyp="http://schemas.microsoft.com/office/drawing/2018/hyperlinkcolor" val="tx"/>
+                    </a:ext>
+                  </a:extLst>
+                </a:hlinkClick>
               </a:rPr>
               <a:t>LTV 1200 Simulator</a:t>
             </a:r>
@@ -31494,13 +31593,20 @@
               <a:buNone/>
             </a:pPr>
             <a:r>
-              <a:rPr lang="en-US" sz="1250" dirty="0">
-                <a:solidFill>
-                  <a:srgbClr val="A9C2E0"/>
-                </a:solidFill>
-                <a:latin typeface="Calibri" pitchFamily="34" charset="0"/>
-                <a:ea typeface="Calibri" pitchFamily="34" charset="-122"/>
-                <a:cs typeface="Calibri" pitchFamily="34" charset="-120"/>
+              <a:rPr lang="en-US" sz="1250" u="sng" dirty="0">
+                <a:solidFill>
+                  <a:srgbClr val="7FB0E6"/>
+                </a:solidFill>
+                <a:latin typeface="Calibri" pitchFamily="34" charset="0"/>
+                <a:ea typeface="Calibri" pitchFamily="34" charset="-122"/>
+                <a:cs typeface="Calibri" pitchFamily="34" charset="-120"/>
+                <a:hlinkClick r:id="rId2" invalidUrl="" action="" tgtFrame="" tooltip="" history="1" highlightClick="0" endSnd="0">
+                  <a:extLst>
+                    <a:ext uri="{A12FA001-AC4F-418D-AE19-62706E023703}">
+                      <ahyp:hlinkClr xmlns:ahyp="http://schemas.microsoft.com/office/drawing/2018/hyperlinkcolor" val="tx"/>
+                    </a:ext>
+                  </a:extLst>
+                </a:hlinkClick>
               </a:rPr>
               <a:t>vent-ltv1200.html?scenario=niv-setup  —  Pick and set the right mode for an awake CHF patient — non-invasive CPAP before the…</a:t>
             </a:r>
@@ -32294,7 +32400,7 @@
                 <a:ea typeface="Calibri" pitchFamily="34" charset="-122"/>
                 <a:cs typeface="Calibri" pitchFamily="34" charset="-120"/>
               </a:rPr>
-              <a:t>Day 2 · Application</a:t>
+              <a:t>Application</a:t>
             </a:r>
             <a:pPr indent="0" marL="0">
               <a:buNone/>
@@ -32308,7 +32414,7 @@
                 <a:ea typeface="Calibri" pitchFamily="34" charset="-122"/>
                 <a:cs typeface="Calibri" pitchFamily="34" charset="-120"/>
               </a:rPr>
-              <a:t>   ·   ~50 min   ·   6 lessons</a:t>
+              <a:t>   ·   6 lessons</a:t>
             </a:r>
             <a:endParaRPr lang="en-US" sz="1300" dirty="0"/>
           </a:p>
@@ -32819,7 +32925,7 @@
                 <a:ea typeface="Calibri" pitchFamily="34" charset="-122"/>
                 <a:cs typeface="Calibri" pitchFamily="34" charset="-120"/>
               </a:rPr>
-              <a:t>The Six Alarms</a:t>
+              <a:t>The Core Alarms</a:t>
             </a:r>
             <a:endParaRPr lang="en-US" sz="1100" dirty="0"/>
           </a:p>
@@ -33398,7 +33504,7 @@
         <p:spPr>
           <a:xfrm>
             <a:off x="548640" y="2148840"/>
-            <a:ext cx="6309360" cy="4114800"/>
+            <a:ext cx="6309360" cy="4160520"/>
           </a:xfrm>
           <a:prstGeom prst="rect">
             <a:avLst/>
@@ -33415,7 +33521,7 @@
                 <a:spcPct val="100000"/>
               </a:lnSpc>
               <a:spcAft>
-                <a:spcPts val="900"/>
+                <a:spcPts val="1000"/>
               </a:spcAft>
               <a:buSzPct val="100000"/>
               <a:buChar char="•"/>
@@ -33429,7 +33535,7 @@
                 <a:ea typeface="Calibri" pitchFamily="34" charset="-122"/>
                 <a:cs typeface="Calibri" pitchFamily="34" charset="-120"/>
               </a:rPr>
-              <a:t>Front panel essentials: Power button (top corner, momentary press).</a:t>
+              <a:t>Front panel essentials: Power button (top corner, momentary press). Display (settings on left, monitored on right). Control knob (right of display — scrolls values).</a:t>
             </a:r>
             <a:endParaRPr lang="en-US" sz="1550" dirty="0"/>
           </a:p>
@@ -33439,7 +33545,7 @@
                 <a:spcPct val="100000"/>
               </a:lnSpc>
               <a:spcAft>
-                <a:spcPts val="900"/>
+                <a:spcPts val="1000"/>
               </a:spcAft>
               <a:buSzPct val="100000"/>
               <a:buChar char="•"/>
@@ -33453,7 +33559,7 @@
                 <a:ea typeface="Calibri" pitchFamily="34" charset="-122"/>
                 <a:cs typeface="Calibri" pitchFamily="34" charset="-120"/>
               </a:rPr>
-              <a:t>Side panel: O₂ inlet at 50 PSI (DISS or quick-connect).</a:t>
+              <a:t>Side panel: O₂ inlet at 50 PSI (DISS or quick-connect). Patient circuit ports including the easily-missed exhalation valve drive line.</a:t>
             </a:r>
             <a:endParaRPr lang="en-US" sz="1550" dirty="0"/>
           </a:p>
@@ -33463,7 +33569,7 @@
                 <a:spcPct val="100000"/>
               </a:lnSpc>
               <a:spcAft>
-                <a:spcPts val="900"/>
+                <a:spcPts val="1000"/>
               </a:spcAft>
               <a:buSzPct val="100000"/>
               <a:buChar char="•"/>
@@ -33477,7 +33583,7 @@
                 <a:ea typeface="Calibri" pitchFamily="34" charset="-122"/>
                 <a:cs typeface="Calibri" pitchFamily="34" charset="-120"/>
               </a:rPr>
-              <a:t>Practice on the unit until you can find every control by feel.</a:t>
+              <a:t>Practice on the unit until you can find every control by feel. In a noisy ambulance bay or moving aircraft, you can't read labels.</a:t>
             </a:r>
             <a:endParaRPr lang="en-US" sz="1550" dirty="0"/>
           </a:p>
@@ -33487,7 +33593,7 @@
                 <a:spcPct val="100000"/>
               </a:lnSpc>
               <a:spcAft>
-                <a:spcPts val="900"/>
+                <a:spcPts val="1000"/>
               </a:spcAft>
               <a:buSzPct val="100000"/>
               <a:buChar char="•"/>
@@ -33501,7 +33607,7 @@
                 <a:ea typeface="Calibri" pitchFamily="34" charset="-122"/>
                 <a:cs typeface="Calibri" pitchFamily="34" charset="-120"/>
               </a:rPr>
-              <a:t>The exhalation valve drive line is the most-missed connection.</a:t>
+              <a:t>The exhalation valve drive line is the most-missed connection. Without it, the patient cannot exhale. Verify every POST.</a:t>
             </a:r>
             <a:endParaRPr lang="en-US" sz="1550" dirty="0"/>
           </a:p>
@@ -33810,7 +33916,7 @@
         <p:spPr>
           <a:xfrm>
             <a:off x="548640" y="2148840"/>
-            <a:ext cx="10058400" cy="4114800"/>
+            <a:ext cx="10058400" cy="4160520"/>
           </a:xfrm>
           <a:prstGeom prst="rect">
             <a:avLst/>
@@ -33827,7 +33933,7 @@
                 <a:spcPct val="100000"/>
               </a:lnSpc>
               <a:spcAft>
-                <a:spcPts val="900"/>
+                <a:spcPts val="1000"/>
               </a:spcAft>
               <a:buSzPct val="100000"/>
               <a:buChar char="•"/>
@@ -33841,7 +33947,7 @@
                 <a:ea typeface="Calibri" pitchFamily="34" charset="-122"/>
                 <a:cs typeface="Calibri" pitchFamily="34" charset="-120"/>
               </a:rPr>
-              <a:t>Internal battery: lithium-ion, ~60 min at moderate load.</a:t>
+              <a:t>Internal battery: sealed lead-acid, ~45 min at nominal settings (per the LTV operator manual). Drains FASTER at high FiO₂, high PEEP, rapid rates — plan far less for a sick lung.</a:t>
             </a:r>
             <a:endParaRPr lang="en-US" sz="1550" dirty="0"/>
           </a:p>
@@ -33851,7 +33957,7 @@
                 <a:spcPct val="100000"/>
               </a:lnSpc>
               <a:spcAft>
-                <a:spcPts val="900"/>
+                <a:spcPts val="1000"/>
               </a:spcAft>
               <a:buSzPct val="100000"/>
               <a:buChar char="•"/>
@@ -33865,7 +33971,7 @@
                 <a:ea typeface="Calibri" pitchFamily="34" charset="-122"/>
                 <a:cs typeface="Calibri" pitchFamily="34" charset="-120"/>
               </a:rPr>
-              <a:t>Battery health degrades over service life.</a:t>
+              <a:t>Battery health degrades over service life. A unit in service &gt; 3 years and never replaced will deliver less than spec. Document unexpected battery alarms.</a:t>
             </a:r>
             <a:endParaRPr lang="en-US" sz="1550" dirty="0"/>
           </a:p>
@@ -33875,7 +33981,7 @@
                 <a:spcPct val="100000"/>
               </a:lnSpc>
               <a:spcAft>
-                <a:spcPts val="900"/>
+                <a:spcPts val="1000"/>
               </a:spcAft>
               <a:buSzPct val="100000"/>
               <a:buChar char="•"/>
@@ -33899,7 +34005,7 @@
                 <a:spcPct val="100000"/>
               </a:lnSpc>
               <a:spcAft>
-                <a:spcPts val="900"/>
+                <a:spcPts val="1000"/>
               </a:spcAft>
               <a:buSzPct val="100000"/>
               <a:buChar char="•"/>
@@ -33913,7 +34019,7 @@
                 <a:ea typeface="Calibri" pitchFamily="34" charset="-122"/>
                 <a:cs typeface="Calibri" pitchFamily="34" charset="-120"/>
               </a:rPr>
-              <a:t>Pre-flight rule: 100% battery + line power confirmed = ready.</a:t>
+              <a:t>Pre-flight rule: 100% battery + line power confirmed = ready. Test external battery packs under load — a pack that holds static charge but fails under demand is a transport hazard.</a:t>
             </a:r>
             <a:endParaRPr lang="en-US" sz="1550" dirty="0"/>
           </a:p>
@@ -34077,7 +34183,7 @@
         <p:spPr>
           <a:xfrm>
             <a:off x="548640" y="2148840"/>
-            <a:ext cx="6309360" cy="4114800"/>
+            <a:ext cx="6309360" cy="4160520"/>
           </a:xfrm>
           <a:prstGeom prst="rect">
             <a:avLst/>
@@ -34094,7 +34200,7 @@
                 <a:spcPct val="100000"/>
               </a:lnSpc>
               <a:spcAft>
-                <a:spcPts val="900"/>
+                <a:spcPts val="1000"/>
               </a:spcAft>
               <a:buSzPct val="100000"/>
               <a:buChar char="•"/>
@@ -34108,7 +34214,7 @@
                 <a:ea typeface="Calibri" pitchFamily="34" charset="-122"/>
                 <a:cs typeface="Calibri" pitchFamily="34" charset="-120"/>
               </a:rPr>
-              <a:t>Display is organized left-to-right.</a:t>
+              <a:t>Display is organized left-to-right. SETTINGS on the left — what you programmed. MONITORED VALUES on the right — what the patient is actually receiving.</a:t>
             </a:r>
             <a:endParaRPr lang="en-US" sz="1550" dirty="0"/>
           </a:p>
@@ -34118,7 +34224,7 @@
                 <a:spcPct val="100000"/>
               </a:lnSpc>
               <a:spcAft>
-                <a:spcPts val="900"/>
+                <a:spcPts val="1000"/>
               </a:spcAft>
               <a:buSzPct val="100000"/>
               <a:buChar char="•"/>
@@ -34132,7 +34238,7 @@
                 <a:ea typeface="Calibri" pitchFamily="34" charset="-122"/>
                 <a:cs typeface="Calibri" pitchFamily="34" charset="-120"/>
               </a:rPr>
-              <a:t>Settings half: Mode (top), Vt, RR, FiO₂, PEEP, I:E, trigger sensitivity.</a:t>
+              <a:t>Settings half: Mode (top), Vt, RR, FiO₂, PEEP, I:E, trigger sensitivity. Scan top to bottom on every check.</a:t>
             </a:r>
             <a:endParaRPr lang="en-US" sz="1550" dirty="0"/>
           </a:p>
@@ -34142,7 +34248,7 @@
                 <a:spcPct val="100000"/>
               </a:lnSpc>
               <a:spcAft>
-                <a:spcPts val="900"/>
+                <a:spcPts val="1000"/>
               </a:spcAft>
               <a:buSzPct val="100000"/>
               <a:buChar char="•"/>
@@ -34156,7 +34262,7 @@
                 <a:ea typeface="Calibri" pitchFamily="34" charset="-122"/>
                 <a:cs typeface="Calibri" pitchFamily="34" charset="-120"/>
               </a:rPr>
-              <a:t>Monitored half: PIP, exhaled Vt, total RR (set + spontaneous), exhaled MV, Pplat (when inspiratory hold is pressed), calculated I:E, FiO₂ delivered (if…</a:t>
+              <a:t>Monitored half: PIP, exhaled Vt, total RR (set + spontaneous), exhaled MV, Pplat (when inspiratory hold is pressed), calculated I:E, FiO₂ delivered (if sensor present).</a:t>
             </a:r>
             <a:endParaRPr lang="en-US" sz="1550" dirty="0"/>
           </a:p>
@@ -34166,7 +34272,7 @@
                 <a:spcPct val="100000"/>
               </a:lnSpc>
               <a:spcAft>
-                <a:spcPts val="900"/>
+                <a:spcPts val="1000"/>
               </a:spcAft>
               <a:buSzPct val="100000"/>
               <a:buChar char="•"/>
@@ -34180,7 +34286,7 @@
                 <a:ea typeface="Calibri" pitchFamily="34" charset="-122"/>
                 <a:cs typeface="Calibri" pitchFamily="34" charset="-120"/>
               </a:rPr>
-              <a:t>Divergence between SET Vt and EXHALED Vt is the earliest sign of a leak or compliance change.</a:t>
+              <a:t>Divergence between SET Vt and EXHALED Vt is the earliest sign of a leak or compliance change. Don't silence — investigate.</a:t>
             </a:r>
             <a:endParaRPr lang="en-US" sz="1550" dirty="0"/>
           </a:p>
@@ -34489,7 +34595,7 @@
         <p:spPr>
           <a:xfrm>
             <a:off x="548640" y="2148840"/>
-            <a:ext cx="6309360" cy="4114800"/>
+            <a:ext cx="6309360" cy="4160520"/>
           </a:xfrm>
           <a:prstGeom prst="rect">
             <a:avLst/>
@@ -34506,7 +34612,7 @@
                 <a:spcPct val="100000"/>
               </a:lnSpc>
               <a:spcAft>
-                <a:spcPts val="900"/>
+                <a:spcPts val="1000"/>
               </a:spcAft>
               <a:buSzPct val="100000"/>
               <a:buChar char="•"/>
@@ -34520,7 +34626,7 @@
                 <a:ea typeface="Calibri" pitchFamily="34" charset="-122"/>
                 <a:cs typeface="Calibri" pitchFamily="34" charset="-120"/>
               </a:rPr>
-              <a:t>The pulmonary system has two zones.</a:t>
+              <a:t>The pulmonary system has two zones. The conducting zone is everything from the mouth to the terminal bronchioles. It moves air. No gas exchange occurs here.</a:t>
             </a:r>
             <a:endParaRPr lang="en-US" sz="1550" dirty="0"/>
           </a:p>
@@ -34530,7 +34636,7 @@
                 <a:spcPct val="100000"/>
               </a:lnSpc>
               <a:spcAft>
-                <a:spcPts val="900"/>
+                <a:spcPts val="1000"/>
               </a:spcAft>
               <a:buSzPct val="100000"/>
               <a:buChar char="•"/>
@@ -34544,7 +34650,7 @@
                 <a:ea typeface="Calibri" pitchFamily="34" charset="-122"/>
                 <a:cs typeface="Calibri" pitchFamily="34" charset="-120"/>
               </a:rPr>
-              <a:t>The respiratory zone is where gas exchange happens.</a:t>
+              <a:t>The respiratory zone is where gas exchange happens. Type I pneumocytes form the thin alveolar wall (0.2–0.5 µm thick — about 1/100 the diameter of a red blood cell). Type II pneumocytes produce surfactant.</a:t>
             </a:r>
             <a:endParaRPr lang="en-US" sz="1550" dirty="0"/>
           </a:p>
@@ -34554,7 +34660,7 @@
                 <a:spcPct val="100000"/>
               </a:lnSpc>
               <a:spcAft>
-                <a:spcPts val="900"/>
+                <a:spcPts val="1000"/>
               </a:spcAft>
               <a:buSzPct val="100000"/>
               <a:buChar char="•"/>
@@ -34568,7 +34674,7 @@
                 <a:ea typeface="Calibri" pitchFamily="34" charset="-122"/>
                 <a:cs typeface="Calibri" pitchFamily="34" charset="-120"/>
               </a:rPr>
-              <a:t>Picture two soap bubbles tied to the ends of a straw, one small and one large.</a:t>
+              <a:t>Picture two soap bubbles tied to the ends of a straw, one small and one large. By Laplace's law the small bubble has the higher pressure, so it empties itself into the big one and collapses.</a:t>
             </a:r>
             <a:endParaRPr lang="en-US" sz="1550" dirty="0"/>
           </a:p>
@@ -34578,7 +34684,7 @@
                 <a:spcPct val="100000"/>
               </a:lnSpc>
               <a:spcAft>
-                <a:spcPts val="900"/>
+                <a:spcPts val="1000"/>
               </a:spcAft>
               <a:buSzPct val="100000"/>
               <a:buChar char="•"/>
@@ -34592,7 +34698,7 @@
                 <a:ea typeface="Calibri" pitchFamily="34" charset="-122"/>
                 <a:cs typeface="Calibri" pitchFamily="34" charset="-120"/>
               </a:rPr>
-              <a:t>When the soap is gone, PEEP is your bedside replacement: it is the doorstop you wedge under each alveolus, splinting it open mechanically until surfactant…</a:t>
+              <a:t>When the soap is gone, PEEP is your bedside replacement: it is the doorstop you wedge under each alveolus, splinting it open mechanically until surfactant function returns.</a:t>
             </a:r>
             <a:endParaRPr lang="en-US" sz="1550" dirty="0"/>
           </a:p>
@@ -34843,7 +34949,7 @@
                 <a:ea typeface="Cambria" pitchFamily="34" charset="-122"/>
                 <a:cs typeface="Cambria" pitchFamily="34" charset="-120"/>
               </a:rPr>
-              <a:t>The Six Alarms</a:t>
+              <a:t>The Core Alarms</a:t>
             </a:r>
             <a:endParaRPr lang="en-US" sz="2900" dirty="0"/>
           </a:p>
@@ -34901,7 +35007,7 @@
         <p:spPr>
           <a:xfrm>
             <a:off x="548640" y="2148840"/>
-            <a:ext cx="10058400" cy="4114800"/>
+            <a:ext cx="10058400" cy="4160520"/>
           </a:xfrm>
           <a:prstGeom prst="rect">
             <a:avLst/>
@@ -34918,13 +35024,13 @@
                 <a:spcPct val="100000"/>
               </a:lnSpc>
               <a:spcAft>
-                <a:spcPts val="900"/>
+                <a:spcPts val="600"/>
               </a:spcAft>
               <a:buSzPct val="100000"/>
               <a:buChar char="•"/>
             </a:pPr>
             <a:r>
-              <a:rPr lang="en-US" sz="1550" dirty="0">
+              <a:rPr lang="en-US" sz="1350" dirty="0">
                 <a:solidFill>
                   <a:srgbClr val="1B2433"/>
                 </a:solidFill>
@@ -34932,9 +35038,9 @@
                 <a:ea typeface="Calibri" pitchFamily="34" charset="-122"/>
                 <a:cs typeface="Calibri" pitchFamily="34" charset="-120"/>
               </a:rPr>
-              <a:t>HIGH PRESSURE — PIP exceeded threshold (default ~40 cmH₂O; set to 35 in lung-protective).</a:t>
-            </a:r>
-            <a:endParaRPr lang="en-US" sz="1550" dirty="0"/>
+              <a:t>HIGH PRESSURE — PIP exceeded threshold (default ~40 cmH₂O; set to 35 in lung-protective). Most common in EMS.</a:t>
+            </a:r>
+            <a:endParaRPr lang="en-US" sz="1350" dirty="0"/>
           </a:p>
           <a:p>
             <a:pPr marL="177800" indent="-177800">
@@ -34942,13 +35048,13 @@
                 <a:spcPct val="100000"/>
               </a:lnSpc>
               <a:spcAft>
-                <a:spcPts val="900"/>
+                <a:spcPts val="600"/>
               </a:spcAft>
               <a:buSzPct val="100000"/>
               <a:buChar char="•"/>
             </a:pPr>
             <a:r>
-              <a:rPr lang="en-US" sz="1550" dirty="0">
+              <a:rPr lang="en-US" sz="1350" dirty="0">
                 <a:solidFill>
                   <a:srgbClr val="1B2433"/>
                 </a:solidFill>
@@ -34956,9 +35062,9 @@
                 <a:ea typeface="Calibri" pitchFamily="34" charset="-122"/>
                 <a:cs typeface="Calibri" pitchFamily="34" charset="-120"/>
               </a:rPr>
-              <a:t>LOW PRESSURE / LOW PEEP — circuit leak, disconnect, ETT cuff leak.</a:t>
-            </a:r>
-            <a:endParaRPr lang="en-US" sz="1550" dirty="0"/>
+              <a:t>LOW PRESSURE / LOW PEEP — circuit leak, disconnect, ETT cuff leak. Default 4 cmH₂O below set PEEP.</a:t>
+            </a:r>
+            <a:endParaRPr lang="en-US" sz="1350" dirty="0"/>
           </a:p>
           <a:p>
             <a:pPr marL="177800" indent="-177800">
@@ -34966,13 +35072,13 @@
                 <a:spcPct val="100000"/>
               </a:lnSpc>
               <a:spcAft>
-                <a:spcPts val="900"/>
+                <a:spcPts val="600"/>
               </a:spcAft>
               <a:buSzPct val="100000"/>
               <a:buChar char="•"/>
             </a:pPr>
             <a:r>
-              <a:rPr lang="en-US" sz="1550" dirty="0">
+              <a:rPr lang="en-US" sz="1350" dirty="0">
                 <a:solidFill>
                   <a:srgbClr val="1B2433"/>
                 </a:solidFill>
@@ -34980,9 +35086,9 @@
                 <a:ea typeface="Calibri" pitchFamily="34" charset="-122"/>
                 <a:cs typeface="Calibri" pitchFamily="34" charset="-120"/>
               </a:rPr>
-              <a:t>LOW MINUTE VOLUME — exhaled MV below threshold.</a:t>
-            </a:r>
-            <a:endParaRPr lang="en-US" sz="1550" dirty="0"/>
+              <a:t>LOW MINUTE VOLUME — exhaled MV below threshold. Default is often 0 — set this to ~70% of expected MV.</a:t>
+            </a:r>
+            <a:endParaRPr lang="en-US" sz="1350" dirty="0"/>
           </a:p>
           <a:p>
             <a:pPr marL="177800" indent="-177800">
@@ -34990,13 +35096,13 @@
                 <a:spcPct val="100000"/>
               </a:lnSpc>
               <a:spcAft>
-                <a:spcPts val="900"/>
+                <a:spcPts val="600"/>
               </a:spcAft>
               <a:buSzPct val="100000"/>
               <a:buChar char="•"/>
             </a:pPr>
             <a:r>
-              <a:rPr lang="en-US" sz="1550" dirty="0">
+              <a:rPr lang="en-US" sz="1350" dirty="0">
                 <a:solidFill>
                   <a:srgbClr val="1B2433"/>
                 </a:solidFill>
@@ -35004,9 +35110,9 @@
                 <a:ea typeface="Calibri" pitchFamily="34" charset="-122"/>
                 <a:cs typeface="Calibri" pitchFamily="34" charset="-120"/>
               </a:rPr>
-              <a:t>APNEA — no detected breath in apnea time (default 20 sec).</a:t>
-            </a:r>
-            <a:endParaRPr lang="en-US" sz="1550" dirty="0"/>
+              <a:t>APNEA — no detected breath in apnea time (default 20 sec). Triggered by complete loss of effort or sensor failure.</a:t>
+            </a:r>
+            <a:endParaRPr lang="en-US" sz="1350" dirty="0"/>
           </a:p>
           <a:p>
             <a:pPr marL="177800" indent="-177800">
@@ -35014,13 +35120,13 @@
                 <a:spcPct val="100000"/>
               </a:lnSpc>
               <a:spcAft>
-                <a:spcPts val="900"/>
+                <a:spcPts val="600"/>
               </a:spcAft>
               <a:buSzPct val="100000"/>
               <a:buChar char="•"/>
             </a:pPr>
             <a:r>
-              <a:rPr lang="en-US" sz="1550" dirty="0">
+              <a:rPr lang="en-US" sz="1350" dirty="0">
                 <a:solidFill>
                   <a:srgbClr val="1B2433"/>
                 </a:solidFill>
@@ -35028,9 +35134,33 @@
                 <a:ea typeface="Calibri" pitchFamily="34" charset="-122"/>
                 <a:cs typeface="Calibri" pitchFamily="34" charset="-120"/>
               </a:rPr>
-              <a:t>POWER FAILURE / LOW BATTERY — switch to AC immediately.</a:t>
-            </a:r>
-            <a:endParaRPr lang="en-US" sz="1550" dirty="0"/>
+              <a:t>POWER LOST / LOW BATTERY — external power lost (transfer to internal battery) or battery depleting. Restore AC promptly.</a:t>
+            </a:r>
+            <a:endParaRPr lang="en-US" sz="1350" dirty="0"/>
+          </a:p>
+          <a:p>
+            <a:pPr marL="177800" indent="-177800">
+              <a:lnSpc>
+                <a:spcPct val="100000"/>
+              </a:lnSpc>
+              <a:spcAft>
+                <a:spcPts val="600"/>
+              </a:spcAft>
+              <a:buSzPct val="100000"/>
+              <a:buChar char="•"/>
+            </a:pPr>
+            <a:r>
+              <a:rPr lang="en-US" sz="1350" dirty="0">
+                <a:solidFill>
+                  <a:srgbClr val="1B2433"/>
+                </a:solidFill>
+                <a:latin typeface="Calibri" pitchFamily="34" charset="0"/>
+                <a:ea typeface="Calibri" pitchFamily="34" charset="-122"/>
+                <a:cs typeface="Calibri" pitchFamily="34" charset="-120"/>
+              </a:rPr>
+              <a:t>GAS SUPPLY — O₂ source pressure low; check tank, regulator, and hose.</a:t>
+            </a:r>
+            <a:endParaRPr lang="en-US" sz="1350" dirty="0"/>
           </a:p>
         </p:txBody>
       </p:sp>
@@ -35192,7 +35322,7 @@
         <p:spPr>
           <a:xfrm>
             <a:off x="548640" y="2148840"/>
-            <a:ext cx="6309360" cy="4114800"/>
+            <a:ext cx="6309360" cy="4160520"/>
           </a:xfrm>
           <a:prstGeom prst="rect">
             <a:avLst/>
@@ -35209,13 +35339,13 @@
                 <a:spcPct val="100000"/>
               </a:lnSpc>
               <a:spcAft>
-                <a:spcPts val="900"/>
+                <a:spcPts val="800"/>
               </a:spcAft>
               <a:buSzPct val="100000"/>
               <a:buChar char="•"/>
             </a:pPr>
             <a:r>
-              <a:rPr lang="en-US" sz="1550" dirty="0">
+              <a:rPr lang="en-US" sz="1450" dirty="0">
                 <a:solidFill>
                   <a:srgbClr val="1B2433"/>
                 </a:solidFill>
@@ -35223,9 +35353,9 @@
                 <a:ea typeface="Calibri" pitchFamily="34" charset="-122"/>
                 <a:cs typeface="Calibri" pitchFamily="34" charset="-120"/>
               </a:rPr>
-              <a:t>Every shift change, every patient.</a:t>
-            </a:r>
-            <a:endParaRPr lang="en-US" sz="1550" dirty="0"/>
+              <a:t>Every shift change, every patient. Five steps.</a:t>
+            </a:r>
+            <a:endParaRPr lang="en-US" sz="1450" dirty="0"/>
           </a:p>
           <a:p>
             <a:pPr marL="177800" indent="-177800">
@@ -35233,13 +35363,13 @@
                 <a:spcPct val="100000"/>
               </a:lnSpc>
               <a:spcAft>
-                <a:spcPts val="900"/>
+                <a:spcPts val="800"/>
               </a:spcAft>
               <a:buSzPct val="100000"/>
               <a:buChar char="•"/>
             </a:pPr>
             <a:r>
-              <a:rPr lang="en-US" sz="1550" dirty="0">
+              <a:rPr lang="en-US" sz="1450" dirty="0">
                 <a:solidFill>
                   <a:srgbClr val="1B2433"/>
                 </a:solidFill>
@@ -35247,9 +35377,9 @@
                 <a:ea typeface="Calibri" pitchFamily="34" charset="-122"/>
                 <a:cs typeface="Calibri" pitchFamily="34" charset="-120"/>
               </a:rPr>
-              <a:t>1.</a:t>
-            </a:r>
-            <a:endParaRPr lang="en-US" sz="1550" dirty="0"/>
+              <a:t>Connect circuit + test lung BEFORE powering on. POST without a circuit is meaningless.</a:t>
+            </a:r>
+            <a:endParaRPr lang="en-US" sz="1450" dirty="0"/>
           </a:p>
           <a:p>
             <a:pPr marL="177800" indent="-177800">
@@ -35257,13 +35387,13 @@
                 <a:spcPct val="100000"/>
               </a:lnSpc>
               <a:spcAft>
-                <a:spcPts val="900"/>
+                <a:spcPts val="800"/>
               </a:spcAft>
               <a:buSzPct val="100000"/>
               <a:buChar char="•"/>
             </a:pPr>
             <a:r>
-              <a:rPr lang="en-US" sz="1550" dirty="0">
+              <a:rPr lang="en-US" sz="1450" dirty="0">
                 <a:solidFill>
                   <a:srgbClr val="1B2433"/>
                 </a:solidFill>
@@ -35271,9 +35401,9 @@
                 <a:ea typeface="Calibri" pitchFamily="34" charset="-122"/>
                 <a:cs typeface="Calibri" pitchFamily="34" charset="-120"/>
               </a:rPr>
-              <a:t>2.</a:t>
-            </a:r>
-            <a:endParaRPr lang="en-US" sz="1550" dirty="0"/>
+              <a:t>Power on. Watch screen for any RED indicator. POST runs automatically — let it complete.</a:t>
+            </a:r>
+            <a:endParaRPr lang="en-US" sz="1450" dirty="0"/>
           </a:p>
           <a:p>
             <a:pPr marL="177800" indent="-177800">
@@ -35281,13 +35411,13 @@
                 <a:spcPct val="100000"/>
               </a:lnSpc>
               <a:spcAft>
-                <a:spcPts val="900"/>
+                <a:spcPts val="800"/>
               </a:spcAft>
               <a:buSzPct val="100000"/>
               <a:buChar char="•"/>
             </a:pPr>
             <a:r>
-              <a:rPr lang="en-US" sz="1550" dirty="0">
+              <a:rPr lang="en-US" sz="1450" dirty="0">
                 <a:solidFill>
                   <a:srgbClr val="1B2433"/>
                 </a:solidFill>
@@ -35295,9 +35425,9 @@
                 <a:ea typeface="Calibri" pitchFamily="34" charset="-122"/>
                 <a:cs typeface="Calibri" pitchFamily="34" charset="-120"/>
               </a:rPr>
-              <a:t>3.</a:t>
-            </a:r>
-            <a:endParaRPr lang="en-US" sz="1550" dirty="0"/>
+              <a:t>Verify alarms by triggering them: occlude circuit (high pressure should fire). Disconnect lung (low pressure should fire).</a:t>
+            </a:r>
+            <a:endParaRPr lang="en-US" sz="1450" dirty="0"/>
           </a:p>
           <a:p>
             <a:pPr marL="177800" indent="-177800">
@@ -35305,13 +35435,13 @@
                 <a:spcPct val="100000"/>
               </a:lnSpc>
               <a:spcAft>
-                <a:spcPts val="900"/>
+                <a:spcPts val="800"/>
               </a:spcAft>
               <a:buSzPct val="100000"/>
               <a:buChar char="•"/>
             </a:pPr>
             <a:r>
-              <a:rPr lang="en-US" sz="1550" dirty="0">
+              <a:rPr lang="en-US" sz="1450" dirty="0">
                 <a:solidFill>
                   <a:srgbClr val="1B2433"/>
                 </a:solidFill>
@@ -35319,9 +35449,9 @@
                 <a:ea typeface="Calibri" pitchFamily="34" charset="-122"/>
                 <a:cs typeface="Calibri" pitchFamily="34" charset="-120"/>
               </a:rPr>
-              <a:t>4.</a:t>
-            </a:r>
-            <a:endParaRPr lang="en-US" sz="1550" dirty="0"/>
+              <a:t>Verify Pplat: press inspiratory hold; confirm reading on display.</a:t>
+            </a:r>
+            <a:endParaRPr lang="en-US" sz="1450" dirty="0"/>
           </a:p>
         </p:txBody>
       </p:sp>
@@ -35628,7 +35758,7 @@
         <p:spPr>
           <a:xfrm>
             <a:off x="548640" y="2148840"/>
-            <a:ext cx="10058400" cy="4114800"/>
+            <a:ext cx="10058400" cy="4160520"/>
           </a:xfrm>
           <a:prstGeom prst="rect">
             <a:avLst/>
@@ -35645,7 +35775,7 @@
                 <a:spcPct val="100000"/>
               </a:lnSpc>
               <a:spcAft>
-                <a:spcPts val="900"/>
+                <a:spcPts val="1000"/>
               </a:spcAft>
               <a:buSzPct val="100000"/>
               <a:buChar char="•"/>
@@ -35659,7 +35789,7 @@
                 <a:ea typeface="Calibri" pitchFamily="34" charset="-122"/>
                 <a:cs typeface="Calibri" pitchFamily="34" charset="-120"/>
               </a:rPr>
-              <a:t>Safe-change workflow: 1) Verbalize the change BEFORE you turn the dial.</a:t>
+              <a:t>Safe-change workflow: 1) Verbalize the change BEFORE you turn the dial. 2) Press SELECT to navigate. 3) Rotate CONTROL knob. 4) Press SELECT (or wait 5 sec) to commit. 5) Reassess in 30 sec.</a:t>
             </a:r>
             <a:endParaRPr lang="en-US" sz="1550" dirty="0"/>
           </a:p>
@@ -35669,7 +35799,7 @@
                 <a:spcPct val="100000"/>
               </a:lnSpc>
               <a:spcAft>
-                <a:spcPts val="900"/>
+                <a:spcPts val="1000"/>
               </a:spcAft>
               <a:buSzPct val="100000"/>
               <a:buChar char="•"/>
@@ -35683,7 +35813,7 @@
                 <a:ea typeface="Calibri" pitchFamily="34" charset="-122"/>
                 <a:cs typeface="Calibri" pitchFamily="34" charset="-120"/>
               </a:rPr>
-              <a:t>Common pitfalls from incident reviews: forgetting to set LOW MV alarm; setting PEEP at the dial but forgetting to attach the PEEP valve; pediatric patient…</a:t>
+              <a:t>Common pitfalls from incident reviews: forgetting to set LOW MV alarm; setting PEEP at the dial but forgetting to attach the PEEP valve; pediatric patient on the adult circuit (dead space &gt; Vt); missing the…</a:t>
             </a:r>
             <a:endParaRPr lang="en-US" sz="1550" dirty="0"/>
           </a:p>
@@ -36207,7 +36337,9 @@
       </p:sp>
       <p:sp>
         <p:nvSpPr>
-          <p:cNvPr id="14" name="Text 12"/>
+          <p:cNvPr id="14" name="Text 12">
+            <a:hlinkClick r:id="rId1" tooltip="Open this module's simulator mission"/>
+          </p:cNvPr>
           <p:cNvSpPr/>
           <p:nvPr/>
         </p:nvSpPr>
@@ -36230,13 +36362,20 @@
               <a:buNone/>
             </a:pPr>
             <a:r>
-              <a:rPr lang="en-US" sz="1700" b="1" dirty="0">
+              <a:rPr lang="en-US" sz="1700" b="1" u="sng" dirty="0">
                 <a:solidFill>
                   <a:srgbClr val="FFFFFF"/>
                 </a:solidFill>
                 <a:latin typeface="Calibri" pitchFamily="34" charset="0"/>
                 <a:ea typeface="Calibri" pitchFamily="34" charset="-122"/>
                 <a:cs typeface="Calibri" pitchFamily="34" charset="-120"/>
+                <a:hlinkClick r:id="rId1" invalidUrl="" action="" tgtFrame="" tooltip="Open this module's simulator mission" history="1" highlightClick="0" endSnd="0">
+                  <a:extLst>
+                    <a:ext uri="{A12FA001-AC4F-418D-AE19-62706E023703}">
+                      <ahyp:hlinkClr xmlns:ahyp="http://schemas.microsoft.com/office/drawing/2018/hyperlinkcolor" val="tx"/>
+                    </a:ext>
+                  </a:extLst>
+                </a:hlinkClick>
               </a:rPr>
               <a:t>LTV 1200 Simulator</a:t>
             </a:r>
@@ -36269,13 +36408,20 @@
               <a:buNone/>
             </a:pPr>
             <a:r>
-              <a:rPr lang="en-US" sz="1250" dirty="0">
-                <a:solidFill>
-                  <a:srgbClr val="A9C2E0"/>
-                </a:solidFill>
-                <a:latin typeface="Calibri" pitchFamily="34" charset="0"/>
-                <a:ea typeface="Calibri" pitchFamily="34" charset="-122"/>
-                <a:cs typeface="Calibri" pitchFamily="34" charset="-120"/>
+              <a:rPr lang="en-US" sz="1250" u="sng" dirty="0">
+                <a:solidFill>
+                  <a:srgbClr val="7FB0E6"/>
+                </a:solidFill>
+                <a:latin typeface="Calibri" pitchFamily="34" charset="0"/>
+                <a:ea typeface="Calibri" pitchFamily="34" charset="-122"/>
+                <a:cs typeface="Calibri" pitchFamily="34" charset="-120"/>
+                <a:hlinkClick r:id="rId2" invalidUrl="" action="" tgtFrame="" tooltip="" history="1" highlightClick="0" endSnd="0">
+                  <a:extLst>
+                    <a:ext uri="{A12FA001-AC4F-418D-AE19-62706E023703}">
+                      <ahyp:hlinkClr xmlns:ahyp="http://schemas.microsoft.com/office/drawing/2018/hyperlinkcolor" val="tx"/>
+                    </a:ext>
+                  </a:extLst>
+                </a:hlinkClick>
               </a:rPr>
               <a:t>vent-ltv1200.html?level=1  —  Learn the controls hands-on: work the LTV 1200 tutorial on the simulator.</a:t>
             </a:r>
@@ -36756,7 +36902,7 @@
                 <a:ea typeface="Calibri" pitchFamily="34" charset="-122"/>
                 <a:cs typeface="Calibri" pitchFamily="34" charset="-120"/>
               </a:rPr>
-              <a:t>The Six Alarms</a:t>
+              <a:t>The Core Alarms</a:t>
             </a:r>
             <a:endParaRPr lang="en-US" sz="1700" dirty="0"/>
           </a:p>
@@ -37069,7 +37215,7 @@
                 <a:ea typeface="Calibri" pitchFamily="34" charset="-122"/>
                 <a:cs typeface="Calibri" pitchFamily="34" charset="-120"/>
               </a:rPr>
-              <a:t>Day 2 · Application</a:t>
+              <a:t>Application</a:t>
             </a:r>
             <a:pPr indent="0" marL="0">
               <a:buNone/>
@@ -37083,7 +37229,7 @@
                 <a:ea typeface="Calibri" pitchFamily="34" charset="-122"/>
                 <a:cs typeface="Calibri" pitchFamily="34" charset="-120"/>
               </a:rPr>
-              <a:t>   ·   ~55 min   ·   7 lessons</a:t>
+              <a:t>   ·   7 lessons</a:t>
             </a:r>
             <a:endParaRPr lang="en-US" sz="1300" dirty="0"/>
           </a:p>
@@ -38275,7 +38421,7 @@
         <p:spPr>
           <a:xfrm>
             <a:off x="548640" y="2148840"/>
-            <a:ext cx="6309360" cy="4114800"/>
+            <a:ext cx="6309360" cy="4160520"/>
           </a:xfrm>
           <a:prstGeom prst="rect">
             <a:avLst/>
@@ -38292,7 +38438,7 @@
                 <a:spcPct val="100000"/>
               </a:lnSpc>
               <a:spcAft>
-                <a:spcPts val="900"/>
+                <a:spcPts val="1000"/>
               </a:spcAft>
               <a:buSzPct val="100000"/>
               <a:buChar char="•"/>
@@ -38306,7 +38452,7 @@
                 <a:ea typeface="Calibri" pitchFamily="34" charset="-122"/>
                 <a:cs typeface="Calibri" pitchFamily="34" charset="-120"/>
               </a:rPr>
-              <a:t>Alarms are NOT nuisances.</a:t>
+              <a:t>Alarms are NOT nuisances. They are information about a deteriorating system. Two kinds: equipment alarms (machine problem) and patient alarms (patient problem). Some are both.</a:t>
             </a:r>
             <a:endParaRPr lang="en-US" sz="1550" dirty="0"/>
           </a:p>
@@ -38316,7 +38462,7 @@
                 <a:spcPct val="100000"/>
               </a:lnSpc>
               <a:spcAft>
-                <a:spcPts val="900"/>
+                <a:spcPts val="1000"/>
               </a:spcAft>
               <a:buSzPct val="100000"/>
               <a:buChar char="•"/>
@@ -38330,7 +38476,7 @@
                 <a:ea typeface="Calibri" pitchFamily="34" charset="-122"/>
                 <a:cs typeface="Calibri" pitchFamily="34" charset="-120"/>
               </a:rPr>
-              <a:t>The cardinal rule: READ the alarm before you SILENCE it.</a:t>
+              <a:t>The cardinal rule: READ the alarm before you SILENCE it. Silencing an alarm without identifying the cause is a sentinel-level safety event, documented in nearly every transport-service incident review.</a:t>
             </a:r>
             <a:endParaRPr lang="en-US" sz="1550" dirty="0"/>
           </a:p>
@@ -38340,7 +38486,7 @@
                 <a:spcPct val="100000"/>
               </a:lnSpc>
               <a:spcAft>
-                <a:spcPts val="900"/>
+                <a:spcPts val="1000"/>
               </a:spcAft>
               <a:buSzPct val="100000"/>
               <a:buChar char="•"/>
@@ -38354,7 +38500,7 @@
                 <a:ea typeface="Calibri" pitchFamily="34" charset="-122"/>
                 <a:cs typeface="Calibri" pitchFamily="34" charset="-120"/>
               </a:rPr>
-              <a:t>Silence gives you 60 seconds of quiet to fix.</a:t>
+              <a:t>Silence gives you 60 seconds of quiet to fix. Not 60 seconds to ignore. After 60 sec, if the problem persists, the alarm re-fires.</a:t>
             </a:r>
             <a:endParaRPr lang="en-US" sz="1550" dirty="0"/>
           </a:p>
@@ -38364,7 +38510,7 @@
                 <a:spcPct val="100000"/>
               </a:lnSpc>
               <a:spcAft>
-                <a:spcPts val="900"/>
+                <a:spcPts val="1000"/>
               </a:spcAft>
               <a:buSzPct val="100000"/>
               <a:buChar char="•"/>
@@ -38378,7 +38524,7 @@
                 <a:ea typeface="Calibri" pitchFamily="34" charset="-122"/>
                 <a:cs typeface="Calibri" pitchFamily="34" charset="-120"/>
               </a:rPr>
-              <a:t>Build the habit: read first, silence second, fix third, document fourth.</a:t>
+              <a:t>Build the habit: read first, silence second, fix third, document fourth. Train it until it's automatic.</a:t>
             </a:r>
             <a:endParaRPr lang="en-US" sz="1550" dirty="0"/>
           </a:p>
@@ -38687,7 +38833,7 @@
         <p:spPr>
           <a:xfrm>
             <a:off x="548640" y="2148840"/>
-            <a:ext cx="10058400" cy="4114800"/>
+            <a:ext cx="10058400" cy="4160520"/>
           </a:xfrm>
           <a:prstGeom prst="rect">
             <a:avLst/>
@@ -38704,13 +38850,13 @@
                 <a:spcPct val="100000"/>
               </a:lnSpc>
               <a:spcAft>
-                <a:spcPts val="900"/>
+                <a:spcPts val="800"/>
               </a:spcAft>
               <a:buSzPct val="100000"/>
               <a:buChar char="•"/>
             </a:pPr>
             <a:r>
-              <a:rPr lang="en-US" sz="1550" dirty="0">
+              <a:rPr lang="en-US" sz="1450" dirty="0">
                 <a:solidFill>
                   <a:srgbClr val="1B2433"/>
                 </a:solidFill>
@@ -38718,9 +38864,9 @@
                 <a:ea typeface="Calibri" pitchFamily="34" charset="-122"/>
                 <a:cs typeface="Calibri" pitchFamily="34" charset="-120"/>
               </a:rPr>
-              <a:t>Most common cause of sudden vent crisis in transport.</a:t>
-            </a:r>
-            <a:endParaRPr lang="en-US" sz="1550" dirty="0"/>
+              <a:t>Most common cause of sudden vent crisis in transport. Movement during loading, lifting, transferring between gurney and aircraft, or a road bump can dislodge an ETT.</a:t>
+            </a:r>
+            <a:endParaRPr lang="en-US" sz="1450" dirty="0"/>
           </a:p>
           <a:p>
             <a:pPr marL="177800" indent="-177800">
@@ -38728,13 +38874,13 @@
                 <a:spcPct val="100000"/>
               </a:lnSpc>
               <a:spcAft>
-                <a:spcPts val="900"/>
+                <a:spcPts val="800"/>
               </a:spcAft>
               <a:buSzPct val="100000"/>
               <a:buChar char="•"/>
             </a:pPr>
             <a:r>
-              <a:rPr lang="en-US" sz="1550" dirty="0">
+              <a:rPr lang="en-US" sz="1450" dirty="0">
                 <a:solidFill>
                   <a:srgbClr val="1B2433"/>
                 </a:solidFill>
@@ -38744,7 +38890,7 @@
               </a:rPr>
               <a:t>Confirm depth: marking at the lip should match what was secured (21 cm women, 23 cm men typically).</a:t>
             </a:r>
-            <a:endParaRPr lang="en-US" sz="1550" dirty="0"/>
+            <a:endParaRPr lang="en-US" sz="1450" dirty="0"/>
           </a:p>
           <a:p>
             <a:pPr marL="177800" indent="-177800">
@@ -38752,13 +38898,13 @@
                 <a:spcPct val="100000"/>
               </a:lnSpc>
               <a:spcAft>
-                <a:spcPts val="900"/>
+                <a:spcPts val="800"/>
               </a:spcAft>
               <a:buSzPct val="100000"/>
               <a:buChar char="•"/>
             </a:pPr>
             <a:r>
-              <a:rPr lang="en-US" sz="1550" dirty="0">
+              <a:rPr lang="en-US" sz="1450" dirty="0">
                 <a:solidFill>
                   <a:srgbClr val="1B2433"/>
                 </a:solidFill>
@@ -38768,7 +38914,7 @@
               </a:rPr>
               <a:t>Confirm capnography: a sudden drop to zero is dislodgement until proven otherwise.</a:t>
             </a:r>
-            <a:endParaRPr lang="en-US" sz="1550" dirty="0"/>
+            <a:endParaRPr lang="en-US" sz="1450" dirty="0"/>
           </a:p>
           <a:p>
             <a:pPr marL="177800" indent="-177800">
@@ -38776,13 +38922,13 @@
                 <a:spcPct val="100000"/>
               </a:lnSpc>
               <a:spcAft>
-                <a:spcPts val="900"/>
+                <a:spcPts val="800"/>
               </a:spcAft>
               <a:buSzPct val="100000"/>
               <a:buChar char="•"/>
             </a:pPr>
             <a:r>
-              <a:rPr lang="en-US" sz="1550" dirty="0">
+              <a:rPr lang="en-US" sz="1450" dirty="0">
                 <a:solidFill>
                   <a:srgbClr val="1B2433"/>
                 </a:solidFill>
@@ -38790,9 +38936,9 @@
                 <a:ea typeface="Calibri" pitchFamily="34" charset="-122"/>
                 <a:cs typeface="Calibri" pitchFamily="34" charset="-120"/>
               </a:rPr>
-              <a:t>Auscultate: equal bilateral breath sounds.</a:t>
-            </a:r>
-            <a:endParaRPr lang="en-US" sz="1550" dirty="0"/>
+              <a:t>Auscultate: equal bilateral breath sounds. Right-only = mainstem migration. Absent or epigastric = esophageal or completely out.</a:t>
+            </a:r>
+            <a:endParaRPr lang="en-US" sz="1450" dirty="0"/>
           </a:p>
           <a:p>
             <a:pPr marL="177800" indent="-177800">
@@ -38800,13 +38946,13 @@
                 <a:spcPct val="100000"/>
               </a:lnSpc>
               <a:spcAft>
-                <a:spcPts val="900"/>
+                <a:spcPts val="800"/>
               </a:spcAft>
               <a:buSzPct val="100000"/>
               <a:buChar char="•"/>
             </a:pPr>
             <a:r>
-              <a:rPr lang="en-US" sz="1550" dirty="0">
+              <a:rPr lang="en-US" sz="1450" dirty="0">
                 <a:solidFill>
                   <a:srgbClr val="1B2433"/>
                 </a:solidFill>
@@ -38814,9 +38960,9 @@
                 <a:ea typeface="Calibri" pitchFamily="34" charset="-122"/>
                 <a:cs typeface="Calibri" pitchFamily="34" charset="-120"/>
               </a:rPr>
-              <a:t>If the tube is out, bag with BVM + mask while preparing to re-intubate.</a:t>
-            </a:r>
-            <a:endParaRPr lang="en-US" sz="1550" dirty="0"/>
+              <a:t>If the tube is out, bag with BVM + mask while preparing to re-intubate. Verify depth AGAIN after every transition.</a:t>
+            </a:r>
+            <a:endParaRPr lang="en-US" sz="1450" dirty="0"/>
           </a:p>
         </p:txBody>
       </p:sp>
@@ -38978,7 +39124,7 @@
         <p:spPr>
           <a:xfrm>
             <a:off x="548640" y="2148840"/>
-            <a:ext cx="10058400" cy="4114800"/>
+            <a:ext cx="10058400" cy="4160520"/>
           </a:xfrm>
           <a:prstGeom prst="rect">
             <a:avLst/>
@@ -38995,7 +39141,7 @@
                 <a:spcPct val="100000"/>
               </a:lnSpc>
               <a:spcAft>
-                <a:spcPts val="900"/>
+                <a:spcPts val="1000"/>
               </a:spcAft>
               <a:buSzPct val="100000"/>
               <a:buChar char="•"/>
@@ -39019,7 +39165,7 @@
                 <a:spcPct val="100000"/>
               </a:lnSpc>
               <a:spcAft>
-                <a:spcPts val="900"/>
+                <a:spcPts val="1000"/>
               </a:spcAft>
               <a:buSzPct val="100000"/>
               <a:buChar char="•"/>
@@ -39033,7 +39179,7 @@
                 <a:ea typeface="Calibri" pitchFamily="34" charset="-122"/>
                 <a:cs typeface="Calibri" pitchFamily="34" charset="-120"/>
               </a:rPr>
-              <a:t>Pass a suction catheter.</a:t>
+              <a:t>Pass a suction catheter. This is BOTH diagnostic AND therapeutic. If it passes easily and brings back secretions, you've solved the problem.</a:t>
             </a:r>
             <a:endParaRPr lang="en-US" sz="1550" dirty="0"/>
           </a:p>
@@ -39043,7 +39189,7 @@
                 <a:spcPct val="100000"/>
               </a:lnSpc>
               <a:spcAft>
-                <a:spcPts val="900"/>
+                <a:spcPts val="1000"/>
               </a:spcAft>
               <a:buSzPct val="100000"/>
               <a:buChar char="•"/>
@@ -39067,7 +39213,7 @@
                 <a:spcPct val="100000"/>
               </a:lnSpc>
               <a:spcAft>
-                <a:spcPts val="900"/>
+                <a:spcPts val="1000"/>
               </a:spcAft>
               <a:buSzPct val="100000"/>
               <a:buChar char="•"/>
@@ -39081,7 +39227,7 @@
                 <a:ea typeface="Calibri" pitchFamily="34" charset="-122"/>
                 <a:cs typeface="Calibri" pitchFamily="34" charset="-120"/>
               </a:rPr>
-              <a:t>If suction doesn't pass — you have a fixed obstruction or dislodgement.</a:t>
+              <a:t>If suction doesn't pass — you have a fixed obstruction or dislodgement. Disconnect and bag while investigating.</a:t>
             </a:r>
             <a:endParaRPr lang="en-US" sz="1550" dirty="0"/>
           </a:p>
@@ -39245,7 +39391,7 @@
         <p:spPr>
           <a:xfrm>
             <a:off x="548640" y="2148840"/>
-            <a:ext cx="6309360" cy="4114800"/>
+            <a:ext cx="6309360" cy="4160520"/>
           </a:xfrm>
           <a:prstGeom prst="rect">
             <a:avLst/>
@@ -39262,7 +39408,7 @@
                 <a:spcPct val="100000"/>
               </a:lnSpc>
               <a:spcAft>
-                <a:spcPts val="900"/>
+                <a:spcPts val="1000"/>
               </a:spcAft>
               <a:buSzPct val="100000"/>
               <a:buChar char="•"/>
@@ -39276,7 +39422,7 @@
                 <a:ea typeface="Calibri" pitchFamily="34" charset="-122"/>
                 <a:cs typeface="Calibri" pitchFamily="34" charset="-120"/>
               </a:rPr>
-              <a:t>This is the single most useful mental model in mechanical ventilation — memorize it now.</a:t>
+              <a:t>This is the single most useful mental model in mechanical ventilation — memorize it now. Picture the lung as a house with two completely separate chores, each with its own set of controls.</a:t>
             </a:r>
             <a:endParaRPr lang="en-US" sz="1550" dirty="0"/>
           </a:p>
@@ -39286,7 +39432,7 @@
                 <a:spcPct val="100000"/>
               </a:lnSpc>
               <a:spcAft>
-                <a:spcPts val="900"/>
+                <a:spcPts val="1000"/>
               </a:spcAft>
               <a:buSzPct val="100000"/>
               <a:buChar char="•"/>
@@ -39300,7 +39446,7 @@
                 <a:ea typeface="Calibri" pitchFamily="34" charset="-122"/>
                 <a:cs typeface="Calibri" pitchFamily="34" charset="-120"/>
               </a:rPr>
-              <a:t>Ventilation is taking out the trash — clearing CO₂.</a:t>
+              <a:t>Ventilation is taking out the trash — clearing CO₂. You run it with two knobs: Respiratory Rate (RR) and Tidal Volume (Vt) — how often the trash goes out and how big each load is.</a:t>
             </a:r>
             <a:endParaRPr lang="en-US" sz="1550" dirty="0"/>
           </a:p>
@@ -39310,7 +39456,7 @@
                 <a:spcPct val="100000"/>
               </a:lnSpc>
               <a:spcAft>
-                <a:spcPts val="900"/>
+                <a:spcPts val="1000"/>
               </a:spcAft>
               <a:buSzPct val="100000"/>
               <a:buChar char="•"/>
@@ -39334,7 +39480,7 @@
                 <a:spcPct val="100000"/>
               </a:lnSpc>
               <a:spcAft>
-                <a:spcPts val="900"/>
+                <a:spcPts val="1000"/>
               </a:spcAft>
               <a:buSzPct val="100000"/>
               <a:buChar char="•"/>
@@ -39348,7 +39494,7 @@
                 <a:ea typeface="Calibri" pitchFamily="34" charset="-122"/>
                 <a:cs typeface="Calibri" pitchFamily="34" charset="-120"/>
               </a:rPr>
-              <a:t>Most ventilator errors are turning the wrong knob — bumping FiO₂ to fix a rising CO₂, or cranking the rate to fix a low saturation.</a:t>
+              <a:t>Most ventilator errors are turning the wrong knob — bumping FiO₂ to fix a rising CO₂, or cranking the rate to fix a low saturation. Pair them in your head: RR + Vt for ventilation, FiO₂ + PEEP for oxygenation.</a:t>
             </a:r>
             <a:endParaRPr lang="en-US" sz="1550" dirty="0"/>
           </a:p>
@@ -39657,7 +39803,7 @@
         <p:spPr>
           <a:xfrm>
             <a:off x="548640" y="2148840"/>
-            <a:ext cx="10058400" cy="4114800"/>
+            <a:ext cx="10058400" cy="4160520"/>
           </a:xfrm>
           <a:prstGeom prst="rect">
             <a:avLst/>
@@ -39674,7 +39820,7 @@
                 <a:spcPct val="100000"/>
               </a:lnSpc>
               <a:spcAft>
-                <a:spcPts val="900"/>
+                <a:spcPts val="1000"/>
               </a:spcAft>
               <a:buSzPct val="100000"/>
               <a:buChar char="•"/>
@@ -39688,7 +39834,7 @@
                 <a:ea typeface="Calibri" pitchFamily="34" charset="-122"/>
                 <a:cs typeface="Calibri" pitchFamily="34" charset="-120"/>
               </a:rPr>
-              <a:t>Sudden rise in PIP, often with falling SpO₂ and BP.</a:t>
+              <a:t>Sudden rise in PIP, often with falling SpO₂ and BP. Decreased or absent breath sounds on the affected side. Tracheal deviation away from the affected side (LATE).</a:t>
             </a:r>
             <a:endParaRPr lang="en-US" sz="1550" dirty="0"/>
           </a:p>
@@ -39698,7 +39844,7 @@
                 <a:spcPct val="100000"/>
               </a:lnSpc>
               <a:spcAft>
-                <a:spcPts val="900"/>
+                <a:spcPts val="1000"/>
               </a:spcAft>
               <a:buSzPct val="100000"/>
               <a:buChar char="•"/>
@@ -39712,7 +39858,7 @@
                 <a:ea typeface="Calibri" pitchFamily="34" charset="-122"/>
                 <a:cs typeface="Calibri" pitchFamily="34" charset="-120"/>
               </a:rPr>
-              <a:t>Hyperresonance to percussion of the affected side.</a:t>
+              <a:t>Hyperresonance to percussion of the affected side. JVD + hemodynamic compromise = TENSION pneumothorax. Clinical diagnosis at the bedside, not waiting for imaging.</a:t>
             </a:r>
             <a:endParaRPr lang="en-US" sz="1550" dirty="0"/>
           </a:p>
@@ -39722,7 +39868,7 @@
                 <a:spcPct val="100000"/>
               </a:lnSpc>
               <a:spcAft>
-                <a:spcPts val="900"/>
+                <a:spcPts val="1000"/>
               </a:spcAft>
               <a:buSzPct val="100000"/>
               <a:buChar char="•"/>
@@ -39736,7 +39882,7 @@
                 <a:ea typeface="Calibri" pitchFamily="34" charset="-122"/>
                 <a:cs typeface="Calibri" pitchFamily="34" charset="-120"/>
               </a:rPr>
-              <a:t>Decompress per protocol: needle thoracostomy at the 2nd ICS midclavicular OR 4th–5th ICS midaxillary.</a:t>
+              <a:t>Decompress per protocol: needle thoracostomy at the 2nd ICS midclavicular OR 4th–5th ICS midaxillary. Then chest seal / tube as appropriate.</a:t>
             </a:r>
             <a:endParaRPr lang="en-US" sz="1550" dirty="0"/>
           </a:p>
@@ -39746,7 +39892,7 @@
                 <a:spcPct val="100000"/>
               </a:lnSpc>
               <a:spcAft>
-                <a:spcPts val="900"/>
+                <a:spcPts val="1000"/>
               </a:spcAft>
               <a:buSzPct val="100000"/>
               <a:buChar char="•"/>
@@ -39760,7 +39906,7 @@
                 <a:ea typeface="Calibri" pitchFamily="34" charset="-122"/>
                 <a:cs typeface="Calibri" pitchFamily="34" charset="-120"/>
               </a:rPr>
-              <a:t>High-risk populations: asthma/COPD on positive pressure, trauma, recent central line placement.</a:t>
+              <a:t>High-risk populations: asthma/COPD on positive pressure, trauma, recent central line placement. Suspect early.</a:t>
             </a:r>
             <a:endParaRPr lang="en-US" sz="1550" dirty="0"/>
           </a:p>
@@ -39924,7 +40070,7 @@
         <p:spPr>
           <a:xfrm>
             <a:off x="548640" y="2148840"/>
-            <a:ext cx="10058400" cy="4114800"/>
+            <a:ext cx="10058400" cy="4160520"/>
           </a:xfrm>
           <a:prstGeom prst="rect">
             <a:avLst/>
@@ -39941,7 +40087,7 @@
                 <a:spcPct val="100000"/>
               </a:lnSpc>
               <a:spcAft>
-                <a:spcPts val="900"/>
+                <a:spcPts val="1000"/>
               </a:spcAft>
               <a:buSzPct val="100000"/>
               <a:buChar char="•"/>
@@ -39955,7 +40101,7 @@
                 <a:ea typeface="Calibri" pitchFamily="34" charset="-122"/>
                 <a:cs typeface="Calibri" pitchFamily="34" charset="-120"/>
               </a:rPr>
-              <a:t>Machine is the problem.</a:t>
+              <a:t>Machine is the problem. Causes: disconnected circuit (most often exhalation valve drive line), failed sensor or transducer, silent battery switch, O₂ source disconnect, software hang, loose ETT cuff.</a:t>
             </a:r>
             <a:endParaRPr lang="en-US" sz="1550" dirty="0"/>
           </a:p>
@@ -39965,7 +40111,7 @@
                 <a:spcPct val="100000"/>
               </a:lnSpc>
               <a:spcAft>
-                <a:spcPts val="900"/>
+                <a:spcPts val="1000"/>
               </a:spcAft>
               <a:buSzPct val="100000"/>
               <a:buChar char="•"/>
@@ -39979,7 +40125,7 @@
                 <a:ea typeface="Calibri" pitchFamily="34" charset="-122"/>
                 <a:cs typeface="Calibri" pitchFamily="34" charset="-120"/>
               </a:rPr>
-              <a:t>Universal answer: DISCONNECT FROM THE VENT AND BAG WITH 100% O₂.</a:t>
+              <a:t>Universal answer: DISCONNECT FROM THE VENT AND BAG WITH 100% O₂. The bag tells you whether the problem is patient or machine.</a:t>
             </a:r>
             <a:endParaRPr lang="en-US" sz="1550" dirty="0"/>
           </a:p>
@@ -39989,7 +40135,7 @@
                 <a:spcPct val="100000"/>
               </a:lnSpc>
               <a:spcAft>
-                <a:spcPts val="900"/>
+                <a:spcPts val="1000"/>
               </a:spcAft>
               <a:buSzPct val="100000"/>
               <a:buChar char="•"/>
@@ -40003,7 +40149,7 @@
                 <a:ea typeface="Calibri" pitchFamily="34" charset="-122"/>
                 <a:cs typeface="Calibri" pitchFamily="34" charset="-120"/>
               </a:rPr>
-              <a:t>Easy bag + sat rises = vent problem.</a:t>
+              <a:t>Easy bag + sat rises = vent problem. Troubleshoot vent off-patient. Hard bag = patient problem — apply DOPE (D, O, or P).</a:t>
             </a:r>
             <a:endParaRPr lang="en-US" sz="1550" dirty="0"/>
           </a:p>
@@ -40013,7 +40159,7 @@
                 <a:spcPct val="100000"/>
               </a:lnSpc>
               <a:spcAft>
-                <a:spcPts val="900"/>
+                <a:spcPts val="1000"/>
               </a:spcAft>
               <a:buSzPct val="100000"/>
               <a:buChar char="•"/>
@@ -40027,7 +40173,7 @@
                 <a:ea typeface="Calibri" pitchFamily="34" charset="-122"/>
                 <a:cs typeface="Calibri" pitchFamily="34" charset="-120"/>
               </a:rPr>
-              <a:t>Bagging is rarely the wrong answer.</a:t>
+              <a:t>Bagging is rarely the wrong answer. It is diagnostic AND therapeutic at the same time.</a:t>
             </a:r>
             <a:endParaRPr lang="en-US" sz="1550" dirty="0"/>
           </a:p>
@@ -40191,7 +40337,7 @@
         <p:spPr>
           <a:xfrm>
             <a:off x="548640" y="2148840"/>
-            <a:ext cx="6309360" cy="4114800"/>
+            <a:ext cx="6309360" cy="4160520"/>
           </a:xfrm>
           <a:prstGeom prst="rect">
             <a:avLst/>
@@ -40208,7 +40354,7 @@
                 <a:spcPct val="100000"/>
               </a:lnSpc>
               <a:spcAft>
-                <a:spcPts val="900"/>
+                <a:spcPts val="1000"/>
               </a:spcAft>
               <a:buSzPct val="100000"/>
               <a:buChar char="•"/>
@@ -40222,7 +40368,7 @@
                 <a:ea typeface="Calibri" pitchFamily="34" charset="-122"/>
                 <a:cs typeface="Calibri" pitchFamily="34" charset="-120"/>
               </a:rPr>
-              <a:t>If you cannot identify and fix an alarm in 10 seconds, disconnect from the ventilator and bag with 100% oxygen.</a:t>
+              <a:t>If you cannot identify and fix an alarm in 10 seconds, disconnect from the ventilator and bag with 100% oxygen. Then troubleshoot.</a:t>
             </a:r>
             <a:endParaRPr lang="en-US" sz="1550" dirty="0"/>
           </a:p>
@@ -40232,7 +40378,7 @@
                 <a:spcPct val="100000"/>
               </a:lnSpc>
               <a:spcAft>
-                <a:spcPts val="900"/>
+                <a:spcPts val="1000"/>
               </a:spcAft>
               <a:buSzPct val="100000"/>
               <a:buChar char="•"/>
@@ -40246,7 +40392,7 @@
                 <a:ea typeface="Calibri" pitchFamily="34" charset="-122"/>
                 <a:cs typeface="Calibri" pitchFamily="34" charset="-120"/>
               </a:rPr>
-              <a:t>Vented patients deteriorate fast — sats can drop 20 points in two minutes of failed ventilation.</a:t>
+              <a:t>Vented patients deteriorate fast — sats can drop 20 points in two minutes of failed ventilation. Bagging buys time.</a:t>
             </a:r>
             <a:endParaRPr lang="en-US" sz="1550" dirty="0"/>
           </a:p>
@@ -40256,7 +40402,7 @@
                 <a:spcPct val="100000"/>
               </a:lnSpc>
               <a:spcAft>
-                <a:spcPts val="900"/>
+                <a:spcPts val="1000"/>
               </a:spcAft>
               <a:buSzPct val="100000"/>
               <a:buChar char="•"/>
@@ -40270,7 +40416,7 @@
                 <a:ea typeface="Calibri" pitchFamily="34" charset="-122"/>
                 <a:cs typeface="Calibri" pitchFamily="34" charset="-120"/>
               </a:rPr>
-              <a:t>The bag gives you something the vent cannot: direct hands-on feedback.</a:t>
+              <a:t>The bag gives you something the vent cannot: direct hands-on feedback. You feel resistance. You see chest rise. You CONFIRM gas exchange.</a:t>
             </a:r>
             <a:endParaRPr lang="en-US" sz="1550" dirty="0"/>
           </a:p>
@@ -40280,7 +40426,7 @@
                 <a:spcPct val="100000"/>
               </a:lnSpc>
               <a:spcAft>
-                <a:spcPts val="900"/>
+                <a:spcPts val="1000"/>
               </a:spcAft>
               <a:buSzPct val="100000"/>
               <a:buChar char="•"/>
@@ -40294,7 +40440,7 @@
                 <a:ea typeface="Calibri" pitchFamily="34" charset="-122"/>
                 <a:cs typeface="Calibri" pitchFamily="34" charset="-120"/>
               </a:rPr>
-              <a:t>If bagging is easy and sat comes up, the problem is the machine.</a:t>
+              <a:t>If bagging is easy and sat comes up, the problem is the machine. If bagging is hard, the problem is the patient — DOPE. Bagging is rarely the wrong answer.</a:t>
             </a:r>
             <a:endParaRPr lang="en-US" sz="1550" dirty="0"/>
           </a:p>
@@ -40603,7 +40749,7 @@
         <p:spPr>
           <a:xfrm>
             <a:off x="548640" y="2148840"/>
-            <a:ext cx="10058400" cy="4114800"/>
+            <a:ext cx="10058400" cy="4160520"/>
           </a:xfrm>
           <a:prstGeom prst="rect">
             <a:avLst/>
@@ -40620,13 +40766,13 @@
                 <a:spcPct val="100000"/>
               </a:lnSpc>
               <a:spcAft>
-                <a:spcPts val="900"/>
+                <a:spcPts val="800"/>
               </a:spcAft>
               <a:buSzPct val="100000"/>
               <a:buChar char="•"/>
             </a:pPr>
             <a:r>
-              <a:rPr lang="en-US" sz="1550" dirty="0">
+              <a:rPr lang="en-US" sz="1450" dirty="0">
                 <a:solidFill>
                   <a:srgbClr val="1B2433"/>
                 </a:solidFill>
@@ -40634,9 +40780,9 @@
                 <a:ea typeface="Calibri" pitchFamily="34" charset="-122"/>
                 <a:cs typeface="Calibri" pitchFamily="34" charset="-120"/>
               </a:rPr>
-              <a:t>Patient-vent dyssynchrony affects ~25% of vented patients (Blanch, ICM 2015).</a:t>
-            </a:r>
-            <a:endParaRPr lang="en-US" sz="1550" dirty="0"/>
+              <a:t>Patient-vent dyssynchrony affects ~25% of vented patients (Blanch, ICM 2015). Four patterns:</a:t>
+            </a:r>
+            <a:endParaRPr lang="en-US" sz="1450" dirty="0"/>
           </a:p>
           <a:p>
             <a:pPr marL="177800" indent="-177800">
@@ -40644,13 +40790,13 @@
                 <a:spcPct val="100000"/>
               </a:lnSpc>
               <a:spcAft>
-                <a:spcPts val="900"/>
+                <a:spcPts val="800"/>
               </a:spcAft>
               <a:buSzPct val="100000"/>
               <a:buChar char="•"/>
             </a:pPr>
             <a:r>
-              <a:rPr lang="en-US" sz="1550" dirty="0">
+              <a:rPr lang="en-US" sz="1450" dirty="0">
                 <a:solidFill>
                   <a:srgbClr val="1B2433"/>
                 </a:solidFill>
@@ -40658,9 +40804,9 @@
                 <a:ea typeface="Calibri" pitchFamily="34" charset="-122"/>
                 <a:cs typeface="Calibri" pitchFamily="34" charset="-120"/>
               </a:rPr>
-              <a:t>Trigger asynchrony: patient effort doesn't initiate a breath.</a:t>
-            </a:r>
-            <a:endParaRPr lang="en-US" sz="1550" dirty="0"/>
+              <a:t>Trigger asynchrony: patient effort doesn't initiate a breath. Fix: increase trigger sensitivity (flow trigger if available).</a:t>
+            </a:r>
+            <a:endParaRPr lang="en-US" sz="1450" dirty="0"/>
           </a:p>
           <a:p>
             <a:pPr marL="177800" indent="-177800">
@@ -40668,13 +40814,13 @@
                 <a:spcPct val="100000"/>
               </a:lnSpc>
               <a:spcAft>
-                <a:spcPts val="900"/>
+                <a:spcPts val="800"/>
               </a:spcAft>
               <a:buSzPct val="100000"/>
               <a:buChar char="•"/>
             </a:pPr>
             <a:r>
-              <a:rPr lang="en-US" sz="1550" dirty="0">
+              <a:rPr lang="en-US" sz="1450" dirty="0">
                 <a:solidFill>
                   <a:srgbClr val="1B2433"/>
                 </a:solidFill>
@@ -40682,9 +40828,9 @@
                 <a:ea typeface="Calibri" pitchFamily="34" charset="-122"/>
                 <a:cs typeface="Calibri" pitchFamily="34" charset="-120"/>
               </a:rPr>
-              <a:t>Flow asynchrony: vent flow doesn't match patient demand.</a:t>
-            </a:r>
-            <a:endParaRPr lang="en-US" sz="1550" dirty="0"/>
+              <a:t>Flow asynchrony: vent flow doesn't match patient demand. Fix: increase peak flow or shorten inspiratory time.</a:t>
+            </a:r>
+            <a:endParaRPr lang="en-US" sz="1450" dirty="0"/>
           </a:p>
           <a:p>
             <a:pPr marL="177800" indent="-177800">
@@ -40692,13 +40838,13 @@
                 <a:spcPct val="100000"/>
               </a:lnSpc>
               <a:spcAft>
-                <a:spcPts val="900"/>
+                <a:spcPts val="800"/>
               </a:spcAft>
               <a:buSzPct val="100000"/>
               <a:buChar char="•"/>
             </a:pPr>
             <a:r>
-              <a:rPr lang="en-US" sz="1550" dirty="0">
+              <a:rPr lang="en-US" sz="1450" dirty="0">
                 <a:solidFill>
                   <a:srgbClr val="1B2433"/>
                 </a:solidFill>
@@ -40706,9 +40852,9 @@
                 <a:ea typeface="Calibri" pitchFamily="34" charset="-122"/>
                 <a:cs typeface="Calibri" pitchFamily="34" charset="-120"/>
               </a:rPr>
-              <a:t>Double triggering: patient effort outlasts inspiration; second breath stacks immediately.</a:t>
-            </a:r>
-            <a:endParaRPr lang="en-US" sz="1550" dirty="0"/>
+              <a:t>Double triggering: patient effort outlasts inspiration; second breath stacks immediately. Fix: lengthen inspiratory time, deepen sedation, treat air hunger.</a:t>
+            </a:r>
+            <a:endParaRPr lang="en-US" sz="1450" dirty="0"/>
           </a:p>
           <a:p>
             <a:pPr marL="177800" indent="-177800">
@@ -40716,13 +40862,13 @@
                 <a:spcPct val="100000"/>
               </a:lnSpc>
               <a:spcAft>
-                <a:spcPts val="900"/>
+                <a:spcPts val="800"/>
               </a:spcAft>
               <a:buSzPct val="100000"/>
               <a:buChar char="•"/>
             </a:pPr>
             <a:r>
-              <a:rPr lang="en-US" sz="1550" dirty="0">
+              <a:rPr lang="en-US" sz="1450" dirty="0">
                 <a:solidFill>
                   <a:srgbClr val="1B2433"/>
                 </a:solidFill>
@@ -40732,7 +40878,7 @@
               </a:rPr>
               <a:t>EMS bedside fix for most dyssynchrony: deepen sedation, ensure adequate analgesia, check trigger settings.</a:t>
             </a:r>
-            <a:endParaRPr lang="en-US" sz="1550" dirty="0"/>
+            <a:endParaRPr lang="en-US" sz="1450" dirty="0"/>
           </a:p>
         </p:txBody>
       </p:sp>
@@ -41254,7 +41400,9 @@
       </p:sp>
       <p:sp>
         <p:nvSpPr>
-          <p:cNvPr id="14" name="Text 12"/>
+          <p:cNvPr id="14" name="Text 12">
+            <a:hlinkClick r:id="rId1" tooltip="Open this module's simulator mission"/>
+          </p:cNvPr>
           <p:cNvSpPr/>
           <p:nvPr/>
         </p:nvSpPr>
@@ -41277,13 +41425,20 @@
               <a:buNone/>
             </a:pPr>
             <a:r>
-              <a:rPr lang="en-US" sz="1700" b="1" dirty="0">
+              <a:rPr lang="en-US" sz="1700" b="1" u="sng" dirty="0">
                 <a:solidFill>
                   <a:srgbClr val="FFFFFF"/>
                 </a:solidFill>
                 <a:latin typeface="Calibri" pitchFamily="34" charset="0"/>
                 <a:ea typeface="Calibri" pitchFamily="34" charset="-122"/>
                 <a:cs typeface="Calibri" pitchFamily="34" charset="-120"/>
+                <a:hlinkClick r:id="rId1" invalidUrl="" action="" tgtFrame="" tooltip="Open this module's simulator mission" history="1" highlightClick="0" endSnd="0">
+                  <a:extLst>
+                    <a:ext uri="{A12FA001-AC4F-418D-AE19-62706E023703}">
+                      <ahyp:hlinkClr xmlns:ahyp="http://schemas.microsoft.com/office/drawing/2018/hyperlinkcolor" val="tx"/>
+                    </a:ext>
+                  </a:extLst>
+                </a:hlinkClick>
               </a:rPr>
               <a:t>LTV 1200 Simulator</a:t>
             </a:r>
@@ -41316,13 +41471,20 @@
               <a:buNone/>
             </a:pPr>
             <a:r>
-              <a:rPr lang="en-US" sz="1250" dirty="0">
-                <a:solidFill>
-                  <a:srgbClr val="A9C2E0"/>
-                </a:solidFill>
-                <a:latin typeface="Calibri" pitchFamily="34" charset="0"/>
-                <a:ea typeface="Calibri" pitchFamily="34" charset="-122"/>
-                <a:cs typeface="Calibri" pitchFamily="34" charset="-120"/>
+              <a:rPr lang="en-US" sz="1250" u="sng" dirty="0">
+                <a:solidFill>
+                  <a:srgbClr val="7FB0E6"/>
+                </a:solidFill>
+                <a:latin typeface="Calibri" pitchFamily="34" charset="0"/>
+                <a:ea typeface="Calibri" pitchFamily="34" charset="-122"/>
+                <a:cs typeface="Calibri" pitchFamily="34" charset="-120"/>
+                <a:hlinkClick r:id="rId2" invalidUrl="" action="" tgtFrame="" tooltip="" history="1" highlightClick="0" endSnd="0">
+                  <a:extLst>
+                    <a:ext uri="{A12FA001-AC4F-418D-AE19-62706E023703}">
+                      <ahyp:hlinkClr xmlns:ahyp="http://schemas.microsoft.com/office/drawing/2018/hyperlinkcolor" val="tx"/>
+                    </a:ext>
+                  </a:extLst>
+                </a:hlinkClick>
               </a:rPr>
               <a:t>vent-ltv1200.html?level=2  —  Test yourself on the simulator's clinical scenarios — set alarm limits and correct the…</a:t>
             </a:r>
@@ -42116,7 +42278,7 @@
                 <a:ea typeface="Calibri" pitchFamily="34" charset="-122"/>
                 <a:cs typeface="Calibri" pitchFamily="34" charset="-120"/>
               </a:rPr>
-              <a:t>Day 2 · Application</a:t>
+              <a:t>Application</a:t>
             </a:r>
             <a:pPr indent="0" marL="0">
               <a:buNone/>
@@ -42130,7 +42292,7 @@
                 <a:ea typeface="Calibri" pitchFamily="34" charset="-122"/>
                 <a:cs typeface="Calibri" pitchFamily="34" charset="-120"/>
               </a:rPr>
-              <a:t>   ·   ~40 min   ·   5 lessons</a:t>
+              <a:t>   ·   5 lessons</a:t>
             </a:r>
             <a:endParaRPr lang="en-US" sz="1300" dirty="0"/>
           </a:p>
@@ -43118,7 +43280,7 @@
         <p:spPr>
           <a:xfrm>
             <a:off x="548640" y="2148840"/>
-            <a:ext cx="6309360" cy="4114800"/>
+            <a:ext cx="6309360" cy="4160520"/>
           </a:xfrm>
           <a:prstGeom prst="rect">
             <a:avLst/>
@@ -43135,13 +43297,13 @@
                 <a:spcPct val="100000"/>
               </a:lnSpc>
               <a:spcAft>
-                <a:spcPts val="900"/>
+                <a:spcPts val="800"/>
               </a:spcAft>
               <a:buSzPct val="100000"/>
               <a:buChar char="•"/>
             </a:pPr>
             <a:r>
-              <a:rPr lang="en-US" sz="1550" dirty="0">
+              <a:rPr lang="en-US" sz="1450" dirty="0">
                 <a:solidFill>
                   <a:srgbClr val="1B2433"/>
                 </a:solidFill>
@@ -43151,7 +43313,7 @@
               </a:rPr>
               <a:t>Comfort: an ETT is uncomfortable; bucking the vent is exhausting.</a:t>
             </a:r>
-            <a:endParaRPr lang="en-US" sz="1550" dirty="0"/>
+            <a:endParaRPr lang="en-US" sz="1450" dirty="0"/>
           </a:p>
           <a:p>
             <a:pPr marL="177800" indent="-177800">
@@ -43159,13 +43321,13 @@
                 <a:spcPct val="100000"/>
               </a:lnSpc>
               <a:spcAft>
-                <a:spcPts val="900"/>
+                <a:spcPts val="800"/>
               </a:spcAft>
               <a:buSzPct val="100000"/>
               <a:buChar char="•"/>
             </a:pPr>
             <a:r>
-              <a:rPr lang="en-US" sz="1550" dirty="0">
+              <a:rPr lang="en-US" sz="1450" dirty="0">
                 <a:solidFill>
                   <a:srgbClr val="1B2433"/>
                 </a:solidFill>
@@ -43175,7 +43337,7 @@
               </a:rPr>
               <a:t>Synchrony: a patient fighting the vent generates dangerously high airway pressures (barotrauma).</a:t>
             </a:r>
-            <a:endParaRPr lang="en-US" sz="1550" dirty="0"/>
+            <a:endParaRPr lang="en-US" sz="1450" dirty="0"/>
           </a:p>
           <a:p>
             <a:pPr marL="177800" indent="-177800">
@@ -43183,13 +43345,13 @@
                 <a:spcPct val="100000"/>
               </a:lnSpc>
               <a:spcAft>
-                <a:spcPts val="900"/>
+                <a:spcPts val="800"/>
               </a:spcAft>
               <a:buSzPct val="100000"/>
               <a:buChar char="•"/>
             </a:pPr>
             <a:r>
-              <a:rPr lang="en-US" sz="1550" dirty="0">
+              <a:rPr lang="en-US" sz="1450" dirty="0">
                 <a:solidFill>
                   <a:srgbClr val="1B2433"/>
                 </a:solidFill>
@@ -43199,7 +43361,7 @@
               </a:rPr>
               <a:t>Safety: awake fighting patients pull tubes and lines — self-extubation is a sentinel event.</a:t>
             </a:r>
-            <a:endParaRPr lang="en-US" sz="1550" dirty="0"/>
+            <a:endParaRPr lang="en-US" sz="1450" dirty="0"/>
           </a:p>
           <a:p>
             <a:pPr marL="177800" indent="-177800">
@@ -43207,13 +43369,13 @@
                 <a:spcPct val="100000"/>
               </a:lnSpc>
               <a:spcAft>
-                <a:spcPts val="900"/>
+                <a:spcPts val="800"/>
               </a:spcAft>
               <a:buSzPct val="100000"/>
               <a:buChar char="•"/>
             </a:pPr>
             <a:r>
-              <a:rPr lang="en-US" sz="1550" dirty="0">
+              <a:rPr lang="en-US" sz="1450" dirty="0">
                 <a:solidFill>
                   <a:srgbClr val="1B2433"/>
                 </a:solidFill>
@@ -43223,7 +43385,7 @@
               </a:rPr>
               <a:t>Oxygenation: lower work of breathing = lower O₂ demand = easier oxygenation.</a:t>
             </a:r>
-            <a:endParaRPr lang="en-US" sz="1550" dirty="0"/>
+            <a:endParaRPr lang="en-US" sz="1450" dirty="0"/>
           </a:p>
           <a:p>
             <a:pPr marL="177800" indent="-177800">
@@ -43231,13 +43393,13 @@
                 <a:spcPct val="100000"/>
               </a:lnSpc>
               <a:spcAft>
-                <a:spcPts val="900"/>
+                <a:spcPts val="800"/>
               </a:spcAft>
               <a:buSzPct val="100000"/>
               <a:buChar char="•"/>
             </a:pPr>
             <a:r>
-              <a:rPr lang="en-US" sz="1550" dirty="0">
+              <a:rPr lang="en-US" sz="1450" dirty="0">
                 <a:solidFill>
                   <a:srgbClr val="1B2433"/>
                 </a:solidFill>
@@ -43247,7 +43409,7 @@
               </a:rPr>
               <a:t>Hemodynamics: well-sedated patients have less sympathetic drive and more predictable response to vasopressors.</a:t>
             </a:r>
-            <a:endParaRPr lang="en-US" sz="1550" dirty="0"/>
+            <a:endParaRPr lang="en-US" sz="1450" dirty="0"/>
           </a:p>
         </p:txBody>
       </p:sp>
@@ -43554,7 +43716,7 @@
         <p:spPr>
           <a:xfrm>
             <a:off x="548640" y="2148840"/>
-            <a:ext cx="10058400" cy="4114800"/>
+            <a:ext cx="10058400" cy="4160520"/>
           </a:xfrm>
           <a:prstGeom prst="rect">
             <a:avLst/>
@@ -43571,13 +43733,13 @@
                 <a:spcPct val="100000"/>
               </a:lnSpc>
               <a:spcAft>
-                <a:spcPts val="900"/>
+                <a:spcPts val="800"/>
               </a:spcAft>
               <a:buSzPct val="100000"/>
               <a:buChar char="•"/>
             </a:pPr>
             <a:r>
-              <a:rPr lang="en-US" sz="1550" dirty="0">
+              <a:rPr lang="en-US" sz="1450" dirty="0">
                 <a:solidFill>
                   <a:srgbClr val="1B2433"/>
                 </a:solidFill>
@@ -43587,7 +43749,7 @@
               </a:rPr>
               <a:t>Richmond Agitation-Sedation Scale runs +4 (combative) to −5 (unarousable).</a:t>
             </a:r>
-            <a:endParaRPr lang="en-US" sz="1550" dirty="0"/>
+            <a:endParaRPr lang="en-US" sz="1450" dirty="0"/>
           </a:p>
           <a:p>
             <a:pPr marL="177800" indent="-177800">
@@ -43595,13 +43757,13 @@
                 <a:spcPct val="100000"/>
               </a:lnSpc>
               <a:spcAft>
-                <a:spcPts val="900"/>
+                <a:spcPts val="800"/>
               </a:spcAft>
               <a:buSzPct val="100000"/>
               <a:buChar char="•"/>
             </a:pPr>
             <a:r>
-              <a:rPr lang="en-US" sz="1550" dirty="0">
+              <a:rPr lang="en-US" sz="1450" dirty="0">
                 <a:solidFill>
                   <a:srgbClr val="1B2433"/>
                 </a:solidFill>
@@ -43609,9 +43771,9 @@
                 <a:ea typeface="Calibri" pitchFamily="34" charset="-122"/>
                 <a:cs typeface="Calibri" pitchFamily="34" charset="-120"/>
               </a:rPr>
-              <a:t>+4 combative danger to staff.</a:t>
-            </a:r>
-            <a:endParaRPr lang="en-US" sz="1550" dirty="0"/>
+              <a:t>+4 combative danger to staff. +3 very agitated, pulls at tubes. +2 agitated, fights vent. +1 restless but cooperative.</a:t>
+            </a:r>
+            <a:endParaRPr lang="en-US" sz="1450" dirty="0"/>
           </a:p>
           <a:p>
             <a:pPr marL="177800" indent="-177800">
@@ -43619,13 +43781,13 @@
                 <a:spcPct val="100000"/>
               </a:lnSpc>
               <a:spcAft>
-                <a:spcPts val="900"/>
+                <a:spcPts val="800"/>
               </a:spcAft>
               <a:buSzPct val="100000"/>
               <a:buChar char="•"/>
             </a:pPr>
             <a:r>
-              <a:rPr lang="en-US" sz="1550" dirty="0">
+              <a:rPr lang="en-US" sz="1450" dirty="0">
                 <a:solidFill>
                   <a:srgbClr val="1B2433"/>
                 </a:solidFill>
@@ -43635,7 +43797,7 @@
               </a:rPr>
               <a:t>0 alert and calm.</a:t>
             </a:r>
-            <a:endParaRPr lang="en-US" sz="1550" dirty="0"/>
+            <a:endParaRPr lang="en-US" sz="1450" dirty="0"/>
           </a:p>
           <a:p>
             <a:pPr marL="177800" indent="-177800">
@@ -43643,13 +43805,13 @@
                 <a:spcPct val="100000"/>
               </a:lnSpc>
               <a:spcAft>
-                <a:spcPts val="900"/>
+                <a:spcPts val="800"/>
               </a:spcAft>
               <a:buSzPct val="100000"/>
               <a:buChar char="•"/>
             </a:pPr>
             <a:r>
-              <a:rPr lang="en-US" sz="1550" dirty="0">
+              <a:rPr lang="en-US" sz="1450" dirty="0">
                 <a:solidFill>
                   <a:srgbClr val="1B2433"/>
                 </a:solidFill>
@@ -43657,9 +43819,9 @@
                 <a:ea typeface="Calibri" pitchFamily="34" charset="-122"/>
                 <a:cs typeface="Calibri" pitchFamily="34" charset="-120"/>
               </a:rPr>
-              <a:t>−1 drowsy, sustained eye contact &gt; 10 sec to voice.</a:t>
-            </a:r>
-            <a:endParaRPr lang="en-US" sz="1550" dirty="0"/>
+              <a:t>−1 drowsy, sustained eye contact &gt; 10 sec to voice. −2 light sedation, briefly opens eyes to voice. −3 moderate, movement to voice no eye contact. −4 deep, movement to physical stimulus only.</a:t>
+            </a:r>
+            <a:endParaRPr lang="en-US" sz="1450" dirty="0"/>
           </a:p>
           <a:p>
             <a:pPr marL="177800" indent="-177800">
@@ -43667,13 +43829,13 @@
                 <a:spcPct val="100000"/>
               </a:lnSpc>
               <a:spcAft>
-                <a:spcPts val="900"/>
+                <a:spcPts val="800"/>
               </a:spcAft>
               <a:buSzPct val="100000"/>
               <a:buChar char="•"/>
             </a:pPr>
             <a:r>
-              <a:rPr lang="en-US" sz="1550" dirty="0">
+              <a:rPr lang="en-US" sz="1450" dirty="0">
                 <a:solidFill>
                   <a:srgbClr val="1B2433"/>
                 </a:solidFill>
@@ -43681,9 +43843,9 @@
                 <a:ea typeface="Calibri" pitchFamily="34" charset="-122"/>
                 <a:cs typeface="Calibri" pitchFamily="34" charset="-120"/>
               </a:rPr>
-              <a:t>Transport target is RASS −1 to −2.</a:t>
-            </a:r>
-            <a:endParaRPr lang="en-US" sz="1550" dirty="0"/>
+              <a:t>Transport target is RASS −1 to −2. Deeper than −2 makes handoff assessment hard. Lighter than −1 risks self-extubation.</a:t>
+            </a:r>
+            <a:endParaRPr lang="en-US" sz="1450" dirty="0"/>
           </a:p>
         </p:txBody>
       </p:sp>
@@ -43845,7 +44007,7 @@
         <p:spPr>
           <a:xfrm>
             <a:off x="548640" y="2148840"/>
-            <a:ext cx="10058400" cy="4114800"/>
+            <a:ext cx="10058400" cy="4160520"/>
           </a:xfrm>
           <a:prstGeom prst="rect">
             <a:avLst/>
@@ -43862,7 +44024,7 @@
                 <a:spcPct val="100000"/>
               </a:lnSpc>
               <a:spcAft>
-                <a:spcPts val="900"/>
+                <a:spcPts val="1000"/>
               </a:spcAft>
               <a:buSzPct val="100000"/>
               <a:buChar char="•"/>
@@ -43876,7 +44038,7 @@
                 <a:ea typeface="Calibri" pitchFamily="34" charset="-122"/>
                 <a:cs typeface="Calibri" pitchFamily="34" charset="-120"/>
               </a:rPr>
-              <a:t>Every breath is like mailing a package down a long hallway to a room at the far end.</a:t>
+              <a:t>Every breath is like mailing a package down a long hallway to a room at the far end. The hallway holds air but does no gas exchange — anything that never reaches the room is wasted effort.</a:t>
             </a:r>
             <a:endParaRPr lang="en-US" sz="1550" dirty="0"/>
           </a:p>
@@ -43886,7 +44048,7 @@
                 <a:spcPct val="100000"/>
               </a:lnSpc>
               <a:spcAft>
-                <a:spcPts val="900"/>
+                <a:spcPts val="1000"/>
               </a:spcAft>
               <a:buSzPct val="100000"/>
               <a:buChar char="•"/>
@@ -43910,7 +44072,7 @@
                 <a:spcPct val="100000"/>
               </a:lnSpc>
               <a:spcAft>
-                <a:spcPts val="900"/>
+                <a:spcPts val="1000"/>
               </a:spcAft>
               <a:buSzPct val="100000"/>
               <a:buChar char="•"/>
@@ -43924,7 +44086,7 @@
                 <a:ea typeface="Calibri" pitchFamily="34" charset="-122"/>
                 <a:cs typeface="Calibri" pitchFamily="34" charset="-120"/>
               </a:rPr>
-              <a:t>Total physiologic dead space is normally about 30% of tidal volume in a healthy adult.</a:t>
+              <a:t>Total physiologic dead space is normally about 30% of tidal volume in a healthy adult. A study by Nuckton and colleagues (NEJM 2002) showed that VD/VT greater than 0.6 in ARDS strongly predicts mortality.</a:t>
             </a:r>
             <a:endParaRPr lang="en-US" sz="1550" dirty="0"/>
           </a:p>
@@ -43934,7 +44096,7 @@
                 <a:spcPct val="100000"/>
               </a:lnSpc>
               <a:spcAft>
-                <a:spcPts val="900"/>
+                <a:spcPts val="1000"/>
               </a:spcAft>
               <a:buSzPct val="100000"/>
               <a:buChar char="•"/>
@@ -43948,7 +44110,7 @@
                 <a:ea typeface="Calibri" pitchFamily="34" charset="-122"/>
                 <a:cs typeface="Calibri" pitchFamily="34" charset="-120"/>
               </a:rPr>
-              <a:t>The practical bedside implication: tidal volume must be large enough to overcome dead space.</a:t>
+              <a:t>The practical bedside implication: tidal volume must be large enough to overcome dead space. Set Vt too low and the whole breath gets stuck in the hallway — dead space eats it before any reaches the room.</a:t>
             </a:r>
             <a:endParaRPr lang="en-US" sz="1550" dirty="0"/>
           </a:p>
@@ -44112,7 +44274,7 @@
         <p:spPr>
           <a:xfrm>
             <a:off x="548640" y="2148840"/>
-            <a:ext cx="10058400" cy="4114800"/>
+            <a:ext cx="10058400" cy="4160520"/>
           </a:xfrm>
           <a:prstGeom prst="rect">
             <a:avLst/>
@@ -44129,13 +44291,13 @@
                 <a:spcPct val="100000"/>
               </a:lnSpc>
               <a:spcAft>
-                <a:spcPts val="900"/>
+                <a:spcPts val="800"/>
               </a:spcAft>
               <a:buSzPct val="100000"/>
               <a:buChar char="•"/>
             </a:pPr>
             <a:r>
-              <a:rPr lang="en-US" sz="1550" dirty="0">
+              <a:rPr lang="en-US" sz="1450" dirty="0">
                 <a:solidFill>
                   <a:srgbClr val="1B2433"/>
                 </a:solidFill>
@@ -44143,9 +44305,9 @@
                 <a:ea typeface="Calibri" pitchFamily="34" charset="-122"/>
                 <a:cs typeface="Calibri" pitchFamily="34" charset="-120"/>
               </a:rPr>
-              <a:t>Fentanyl 1–2 mcg/kg IV, redose 0.5–1 mcg/kg q15–20 min.</a:t>
-            </a:r>
-            <a:endParaRPr lang="en-US" sz="1550" dirty="0"/>
+              <a:t>Fentanyl 1–2 mcg/kg IV, redose 0.5–1 mcg/kg q15–20 min. Analgesia first. Watch chest wall rigidity at high doses pushed rapidly.</a:t>
+            </a:r>
+            <a:endParaRPr lang="en-US" sz="1450" dirty="0"/>
           </a:p>
           <a:p>
             <a:pPr marL="177800" indent="-177800">
@@ -44153,13 +44315,13 @@
                 <a:spcPct val="100000"/>
               </a:lnSpc>
               <a:spcAft>
-                <a:spcPts val="900"/>
+                <a:spcPts val="800"/>
               </a:spcAft>
               <a:buSzPct val="100000"/>
               <a:buChar char="•"/>
             </a:pPr>
             <a:r>
-              <a:rPr lang="en-US" sz="1550" dirty="0">
+              <a:rPr lang="en-US" sz="1450" dirty="0">
                 <a:solidFill>
                   <a:srgbClr val="1B2433"/>
                 </a:solidFill>
@@ -44167,9 +44329,9 @@
                 <a:ea typeface="Calibri" pitchFamily="34" charset="-122"/>
                 <a:cs typeface="Calibri" pitchFamily="34" charset="-120"/>
               </a:rPr>
-              <a:t>Ketamine 1–2 mg/kg IV induction; 0.5–1 mg/kg redose.</a:t>
-            </a:r>
-            <a:endParaRPr lang="en-US" sz="1550" dirty="0"/>
+              <a:t>Ketamine 1–2 mg/kg IV induction; 0.5–1 mg/kg redose. PREFERRED in shock — sympathetic effect supports BP. KETASED (Jabre 2009): equivalent to etomidate, safer in shock. Modern evidence: acceptable in TBI.</a:t>
+            </a:r>
+            <a:endParaRPr lang="en-US" sz="1450" dirty="0"/>
           </a:p>
           <a:p>
             <a:pPr marL="177800" indent="-177800">
@@ -44177,13 +44339,13 @@
                 <a:spcPct val="100000"/>
               </a:lnSpc>
               <a:spcAft>
-                <a:spcPts val="900"/>
+                <a:spcPts val="800"/>
               </a:spcAft>
               <a:buSzPct val="100000"/>
               <a:buChar char="•"/>
             </a:pPr>
             <a:r>
-              <a:rPr lang="en-US" sz="1550" dirty="0">
+              <a:rPr lang="en-US" sz="1450" dirty="0">
                 <a:solidFill>
                   <a:srgbClr val="1B2433"/>
                 </a:solidFill>
@@ -44191,9 +44353,9 @@
                 <a:ea typeface="Calibri" pitchFamily="34" charset="-122"/>
                 <a:cs typeface="Calibri" pitchFamily="34" charset="-120"/>
               </a:rPr>
-              <a:t>Midazolam 0.05–0.1 mg/kg IV q5–10 min.</a:t>
-            </a:r>
-            <a:endParaRPr lang="en-US" sz="1550" dirty="0"/>
+              <a:t>Midazolam 0.05–0.1 mg/kg IV q5–10 min. Sedation + amnesia. Synergistic respiratory depression with opioids. Reversible with flumazenil.</a:t>
+            </a:r>
+            <a:endParaRPr lang="en-US" sz="1450" dirty="0"/>
           </a:p>
           <a:p>
             <a:pPr marL="177800" indent="-177800">
@@ -44201,13 +44363,13 @@
                 <a:spcPct val="100000"/>
               </a:lnSpc>
               <a:spcAft>
-                <a:spcPts val="900"/>
+                <a:spcPts val="800"/>
               </a:spcAft>
               <a:buSzPct val="100000"/>
               <a:buChar char="•"/>
             </a:pPr>
             <a:r>
-              <a:rPr lang="en-US" sz="1550" dirty="0">
+              <a:rPr lang="en-US" sz="1450" dirty="0">
                 <a:solidFill>
                   <a:srgbClr val="1B2433"/>
                 </a:solidFill>
@@ -44215,9 +44377,9 @@
                 <a:ea typeface="Calibri" pitchFamily="34" charset="-122"/>
                 <a:cs typeface="Calibri" pitchFamily="34" charset="-120"/>
               </a:rPr>
-              <a:t>Propofol 5–50 mcg/kg/min infusion (per service formulary).</a:t>
-            </a:r>
-            <a:endParaRPr lang="en-US" sz="1550" dirty="0"/>
+              <a:t>Propofol 5–50 mcg/kg/min infusion (per service formulary). Drops BP. PRIS (propofol-related infusion syndrome): metabolic acidosis, rhabdomyolysis, cardiac arrhythmia at &gt; 4 mg/kg/hr or &gt; 48 hr infusions.</a:t>
+            </a:r>
+            <a:endParaRPr lang="en-US" sz="1450" dirty="0"/>
           </a:p>
           <a:p>
             <a:pPr marL="177800" indent="-177800">
@@ -44225,13 +44387,13 @@
                 <a:spcPct val="100000"/>
               </a:lnSpc>
               <a:spcAft>
-                <a:spcPts val="900"/>
+                <a:spcPts val="800"/>
               </a:spcAft>
               <a:buSzPct val="100000"/>
               <a:buChar char="•"/>
             </a:pPr>
             <a:r>
-              <a:rPr lang="en-US" sz="1550" dirty="0">
+              <a:rPr lang="en-US" sz="1450" dirty="0">
                 <a:solidFill>
                   <a:srgbClr val="1B2433"/>
                 </a:solidFill>
@@ -44239,9 +44401,9 @@
                 <a:ea typeface="Calibri" pitchFamily="34" charset="-122"/>
                 <a:cs typeface="Calibri" pitchFamily="34" charset="-120"/>
               </a:rPr>
-              <a:t>Etomidate 0.3 mg/kg IV induction.</a:t>
-            </a:r>
-            <a:endParaRPr lang="en-US" sz="1550" dirty="0"/>
+              <a:t>Etomidate 0.3 mg/kg IV induction. Clean hemodynamics but causes adrenal suppression — many EMS prefer ketamine in shock RSI. Not carried by many EMS services.</a:t>
+            </a:r>
+            <a:endParaRPr lang="en-US" sz="1450" dirty="0"/>
           </a:p>
         </p:txBody>
       </p:sp>
@@ -44403,7 +44565,7 @@
         <p:spPr>
           <a:xfrm>
             <a:off x="548640" y="2148840"/>
-            <a:ext cx="6309360" cy="4114800"/>
+            <a:ext cx="6309360" cy="4160520"/>
           </a:xfrm>
           <a:prstGeom prst="rect">
             <a:avLst/>
@@ -44420,7 +44582,7 @@
                 <a:spcPct val="100000"/>
               </a:lnSpc>
               <a:spcAft>
-                <a:spcPts val="900"/>
+                <a:spcPts val="1000"/>
               </a:spcAft>
               <a:buSzPct val="100000"/>
               <a:buChar char="•"/>
@@ -44434,7 +44596,7 @@
                 <a:ea typeface="Calibri" pitchFamily="34" charset="-122"/>
                 <a:cs typeface="Calibri" pitchFamily="34" charset="-120"/>
               </a:rPr>
-              <a:t>Post-intubation hypotension affects ~25% of EMS RSI (Heffner 2012).</a:t>
+              <a:t>Post-intubation hypotension is common after emergency intubation — about 25% in Heffner's 2012 emergency-department cohort (an ED, not prehospital, study; anticipate it in the field too).</a:t>
             </a:r>
             <a:endParaRPr lang="en-US" sz="1550" dirty="0"/>
           </a:p>
@@ -44444,7 +44606,7 @@
                 <a:spcPct val="100000"/>
               </a:lnSpc>
               <a:spcAft>
-                <a:spcPts val="900"/>
+                <a:spcPts val="1000"/>
               </a:spcAft>
               <a:buSzPct val="100000"/>
               <a:buChar char="•"/>
@@ -44458,7 +44620,7 @@
                 <a:ea typeface="Calibri" pitchFamily="34" charset="-122"/>
                 <a:cs typeface="Calibri" pitchFamily="34" charset="-120"/>
               </a:rPr>
-              <a:t>Push-dose epinephrine — first-line for most EMS shock states.</a:t>
+              <a:t>Push-dose epinephrine — a rapid bridge for peri-intubation hypotension. Mix 1 mg (1:10,000) into 100 mL NS = 10 mcg/mL. Dose 5–20 mcg IV (typically 10 mcg) every 1–5 min.</a:t>
             </a:r>
             <a:endParaRPr lang="en-US" sz="1550" dirty="0"/>
           </a:p>
@@ -44468,7 +44630,7 @@
                 <a:spcPct val="100000"/>
               </a:lnSpc>
               <a:spcAft>
-                <a:spcPts val="900"/>
+                <a:spcPts val="1000"/>
               </a:spcAft>
               <a:buSzPct val="100000"/>
               <a:buChar char="•"/>
@@ -44482,7 +44644,7 @@
                 <a:ea typeface="Calibri" pitchFamily="34" charset="-122"/>
                 <a:cs typeface="Calibri" pitchFamily="34" charset="-120"/>
               </a:rPr>
-              <a:t>Push-dose phenylephrine — alternative when avoiding tachycardia.</a:t>
+              <a:t>Push-dose phenylephrine — alternative when avoiding tachycardia. Mix 10 mg into 100 mL NS = 100 mcg/mL. Dose 50–200 mcg IV q1–5 min. Pure α-agonist; reflex bradycardia possible.</a:t>
             </a:r>
             <a:endParaRPr lang="en-US" sz="1550" dirty="0"/>
           </a:p>
@@ -44492,7 +44654,7 @@
                 <a:spcPct val="100000"/>
               </a:lnSpc>
               <a:spcAft>
-                <a:spcPts val="900"/>
+                <a:spcPts val="1000"/>
               </a:spcAft>
               <a:buSzPct val="100000"/>
               <a:buChar char="•"/>
@@ -44506,7 +44668,7 @@
                 <a:ea typeface="Calibri" pitchFamily="34" charset="-122"/>
                 <a:cs typeface="Calibri" pitchFamily="34" charset="-120"/>
               </a:rPr>
-              <a:t>Label every syringe clearly.</a:t>
+              <a:t>Label every syringe clearly. Document every push.</a:t>
             </a:r>
             <a:endParaRPr lang="en-US" sz="1550" dirty="0"/>
           </a:p>
@@ -44651,7 +44813,7 @@
                 <a:ea typeface="Calibri" pitchFamily="34" charset="-122"/>
                 <a:cs typeface="Calibri" pitchFamily="34" charset="-120"/>
               </a:rPr>
-              <a:t>Heffner 2012: incidence ~25% in EMS RSI. Higher in shock states. Always have push-dose pressors prepared before pushing the induction agent.</a:t>
+              <a:t>Heffner 2012: ~25% incidence in an emergency-department intubation cohort (not a prehospital study). Higher in shock states. Always have push-dose pressors prepared before pushing the induction agent.</a:t>
             </a:r>
             <a:endParaRPr lang="en-US" sz="1350" dirty="0"/>
           </a:p>
@@ -44815,7 +44977,7 @@
         <p:spPr>
           <a:xfrm>
             <a:off x="548640" y="2148840"/>
-            <a:ext cx="10058400" cy="4114800"/>
+            <a:ext cx="10058400" cy="4160520"/>
           </a:xfrm>
           <a:prstGeom prst="rect">
             <a:avLst/>
@@ -44832,13 +44994,13 @@
                 <a:spcPct val="100000"/>
               </a:lnSpc>
               <a:spcAft>
-                <a:spcPts val="900"/>
+                <a:spcPts val="800"/>
               </a:spcAft>
               <a:buSzPct val="100000"/>
               <a:buChar char="•"/>
             </a:pPr>
             <a:r>
-              <a:rPr lang="en-US" sz="1550" dirty="0">
+              <a:rPr lang="en-US" sz="1450" dirty="0">
                 <a:solidFill>
                   <a:srgbClr val="1B2433"/>
                 </a:solidFill>
@@ -44846,9 +45008,9 @@
                 <a:ea typeface="Calibri" pitchFamily="34" charset="-122"/>
                 <a:cs typeface="Calibri" pitchFamily="34" charset="-120"/>
               </a:rPr>
-              <a:t>Under-sedation in the first 10 minutes after intubation.</a:t>
-            </a:r>
-            <a:endParaRPr lang="en-US" sz="1550" dirty="0"/>
+              <a:t>Under-sedation in the first 10 minutes after intubation. Long-acting paralytics outlast a single induction dose. Bolt → sedate → redose sedation BEFORE paralysis wears off.</a:t>
+            </a:r>
+            <a:endParaRPr lang="en-US" sz="1450" dirty="0"/>
           </a:p>
           <a:p>
             <a:pPr marL="177800" indent="-177800">
@@ -44856,13 +45018,13 @@
                 <a:spcPct val="100000"/>
               </a:lnSpc>
               <a:spcAft>
-                <a:spcPts val="900"/>
+                <a:spcPts val="800"/>
               </a:spcAft>
               <a:buSzPct val="100000"/>
               <a:buChar char="•"/>
             </a:pPr>
             <a:r>
-              <a:rPr lang="en-US" sz="1550" dirty="0">
+              <a:rPr lang="en-US" sz="1450" dirty="0">
                 <a:solidFill>
                   <a:srgbClr val="1B2433"/>
                 </a:solidFill>
@@ -44870,9 +45032,9 @@
                 <a:ea typeface="Calibri" pitchFamily="34" charset="-122"/>
                 <a:cs typeface="Calibri" pitchFamily="34" charset="-120"/>
               </a:rPr>
-              <a:t>Over-sedation pre-arrival.</a:t>
-            </a:r>
-            <a:endParaRPr lang="en-US" sz="1550" dirty="0"/>
+              <a:t>Over-sedation pre-arrival. RASS −5 patients can't help with hand-off and are at higher risk of hemodynamic instability. Target RASS −1 to −2 by handoff.</a:t>
+            </a:r>
+            <a:endParaRPr lang="en-US" sz="1450" dirty="0"/>
           </a:p>
           <a:p>
             <a:pPr marL="177800" indent="-177800">
@@ -44880,13 +45042,13 @@
                 <a:spcPct val="100000"/>
               </a:lnSpc>
               <a:spcAft>
-                <a:spcPts val="900"/>
+                <a:spcPts val="800"/>
               </a:spcAft>
               <a:buSzPct val="100000"/>
               <a:buChar char="•"/>
             </a:pPr>
             <a:r>
-              <a:rPr lang="en-US" sz="1550" dirty="0">
+              <a:rPr lang="en-US" sz="1450" dirty="0">
                 <a:solidFill>
                   <a:srgbClr val="1B2433"/>
                 </a:solidFill>
@@ -44894,9 +45056,9 @@
                 <a:ea typeface="Calibri" pitchFamily="34" charset="-122"/>
                 <a:cs typeface="Calibri" pitchFamily="34" charset="-120"/>
               </a:rPr>
-              <a:t>Paralytic without analgesia/sedation.</a:t>
-            </a:r>
-            <a:endParaRPr lang="en-US" sz="1550" dirty="0"/>
+              <a:t>Paralytic without analgesia/sedation. Awareness with paralysis — sentinel safety event. Always pair long-acting paralytics with BOTH.</a:t>
+            </a:r>
+            <a:endParaRPr lang="en-US" sz="1450" dirty="0"/>
           </a:p>
           <a:p>
             <a:pPr marL="177800" indent="-177800">
@@ -44904,13 +45066,13 @@
                 <a:spcPct val="100000"/>
               </a:lnSpc>
               <a:spcAft>
-                <a:spcPts val="900"/>
+                <a:spcPts val="800"/>
               </a:spcAft>
               <a:buSzPct val="100000"/>
               <a:buChar char="•"/>
             </a:pPr>
             <a:r>
-              <a:rPr lang="en-US" sz="1550" dirty="0">
+              <a:rPr lang="en-US" sz="1450" dirty="0">
                 <a:solidFill>
                   <a:srgbClr val="1B2433"/>
                 </a:solidFill>
@@ -44918,9 +45080,9 @@
                 <a:ea typeface="Calibri" pitchFamily="34" charset="-122"/>
                 <a:cs typeface="Calibri" pitchFamily="34" charset="-120"/>
               </a:rPr>
-              <a:t>Post-intubation hypotension.</a:t>
-            </a:r>
-            <a:endParaRPr lang="en-US" sz="1550" dirty="0"/>
+              <a:t>Post-intubation hypotension. ~25% incidence. Push-dose pressors should be in your hand before induction.</a:t>
+            </a:r>
+            <a:endParaRPr lang="en-US" sz="1450" dirty="0"/>
           </a:p>
           <a:p>
             <a:pPr marL="177800" indent="-177800">
@@ -44928,13 +45090,13 @@
                 <a:spcPct val="100000"/>
               </a:lnSpc>
               <a:spcAft>
-                <a:spcPts val="900"/>
+                <a:spcPts val="800"/>
               </a:spcAft>
               <a:buSzPct val="100000"/>
               <a:buChar char="•"/>
             </a:pPr>
             <a:r>
-              <a:rPr lang="en-US" sz="1550" dirty="0">
+              <a:rPr lang="en-US" sz="1450" dirty="0">
                 <a:solidFill>
                   <a:srgbClr val="1B2433"/>
                 </a:solidFill>
@@ -44942,9 +45104,9 @@
                 <a:ea typeface="Calibri" pitchFamily="34" charset="-122"/>
                 <a:cs typeface="Calibri" pitchFamily="34" charset="-120"/>
               </a:rPr>
-              <a:t>Mixing too many agents.</a:t>
-            </a:r>
-            <a:endParaRPr lang="en-US" sz="1550" dirty="0"/>
+              <a:t>Mixing too many agents. Stick with one analgesic + one sedative for transport.</a:t>
+            </a:r>
+            <a:endParaRPr lang="en-US" sz="1450" dirty="0"/>
           </a:p>
         </p:txBody>
       </p:sp>
@@ -45466,7 +45628,9 @@
       </p:sp>
       <p:sp>
         <p:nvSpPr>
-          <p:cNvPr id="14" name="Text 12"/>
+          <p:cNvPr id="14" name="Text 12">
+            <a:hlinkClick r:id="rId1" tooltip="Open this module's simulator mission"/>
+          </p:cNvPr>
           <p:cNvSpPr/>
           <p:nvPr/>
         </p:nvSpPr>
@@ -45489,13 +45653,20 @@
               <a:buNone/>
             </a:pPr>
             <a:r>
-              <a:rPr lang="en-US" sz="1700" b="1" dirty="0">
+              <a:rPr lang="en-US" sz="1700" b="1" u="sng" dirty="0">
                 <a:solidFill>
                   <a:srgbClr val="FFFFFF"/>
                 </a:solidFill>
                 <a:latin typeface="Calibri" pitchFamily="34" charset="0"/>
                 <a:ea typeface="Calibri" pitchFamily="34" charset="-122"/>
                 <a:cs typeface="Calibri" pitchFamily="34" charset="-120"/>
+                <a:hlinkClick r:id="rId1" invalidUrl="" action="" tgtFrame="" tooltip="Open this module's simulator mission" history="1" highlightClick="0" endSnd="0">
+                  <a:extLst>
+                    <a:ext uri="{A12FA001-AC4F-418D-AE19-62706E023703}">
+                      <ahyp:hlinkClr xmlns:ahyp="http://schemas.microsoft.com/office/drawing/2018/hyperlinkcolor" val="tx"/>
+                    </a:ext>
+                  </a:extLst>
+                </a:hlinkClick>
               </a:rPr>
               <a:t>LTV 1200 Simulator</a:t>
             </a:r>
@@ -45528,13 +45699,20 @@
               <a:buNone/>
             </a:pPr>
             <a:r>
-              <a:rPr lang="en-US" sz="1250" dirty="0">
-                <a:solidFill>
-                  <a:srgbClr val="A9C2E0"/>
-                </a:solidFill>
-                <a:latin typeface="Calibri" pitchFamily="34" charset="0"/>
-                <a:ea typeface="Calibri" pitchFamily="34" charset="-122"/>
-                <a:cs typeface="Calibri" pitchFamily="34" charset="-120"/>
+              <a:rPr lang="en-US" sz="1250" u="sng" dirty="0">
+                <a:solidFill>
+                  <a:srgbClr val="7FB0E6"/>
+                </a:solidFill>
+                <a:latin typeface="Calibri" pitchFamily="34" charset="0"/>
+                <a:ea typeface="Calibri" pitchFamily="34" charset="-122"/>
+                <a:cs typeface="Calibri" pitchFamily="34" charset="-120"/>
+                <a:hlinkClick r:id="rId2" invalidUrl="" action="" tgtFrame="" tooltip="" history="1" highlightClick="0" endSnd="0">
+                  <a:extLst>
+                    <a:ext uri="{A12FA001-AC4F-418D-AE19-62706E023703}">
+                      <ahyp:hlinkClr xmlns:ahyp="http://schemas.microsoft.com/office/drawing/2018/hyperlinkcolor" val="tx"/>
+                    </a:ext>
+                  </a:extLst>
+                </a:hlinkClick>
               </a:rPr>
               <a:t>vent-ltv1200.html?scenario=agitation  —  A patient fighting the vent with normal mechanics — recognize when the fix is a drug,…</a:t>
             </a:r>
@@ -46328,7 +46506,7 @@
                 <a:ea typeface="Calibri" pitchFamily="34" charset="-122"/>
                 <a:cs typeface="Calibri" pitchFamily="34" charset="-120"/>
               </a:rPr>
-              <a:t>Day 2 · Application</a:t>
+              <a:t>Application</a:t>
             </a:r>
             <a:pPr indent="0" marL="0">
               <a:buNone/>
@@ -46342,7 +46520,7 @@
                 <a:ea typeface="Calibri" pitchFamily="34" charset="-122"/>
                 <a:cs typeface="Calibri" pitchFamily="34" charset="-120"/>
               </a:rPr>
-              <a:t>   ·   ~60 min   ·   6 lessons</a:t>
+              <a:t>   ·   6 lessons</a:t>
             </a:r>
             <a:endParaRPr lang="en-US" sz="1300" dirty="0"/>
           </a:p>
@@ -47432,7 +47610,7 @@
         <p:spPr>
           <a:xfrm>
             <a:off x="548640" y="2148840"/>
-            <a:ext cx="10058400" cy="4114800"/>
+            <a:ext cx="10058400" cy="4160520"/>
           </a:xfrm>
           <a:prstGeom prst="rect">
             <a:avLst/>
@@ -47449,7 +47627,7 @@
                 <a:spcPct val="100000"/>
               </a:lnSpc>
               <a:spcAft>
-                <a:spcPts val="900"/>
+                <a:spcPts val="1000"/>
               </a:spcAft>
               <a:buSzPct val="100000"/>
               <a:buChar char="•"/>
@@ -47463,7 +47641,7 @@
                 <a:ea typeface="Calibri" pitchFamily="34" charset="-122"/>
                 <a:cs typeface="Calibri" pitchFamily="34" charset="-120"/>
               </a:rPr>
-              <a:t>Obstructive disease is fundamentally an EXHALATION problem.</a:t>
+              <a:t>Obstructive disease is fundamentally an EXHALATION problem. Air goes in easily; getting it out takes time.</a:t>
             </a:r>
             <a:endParaRPr lang="en-US" sz="1550" dirty="0"/>
           </a:p>
@@ -47473,7 +47651,7 @@
                 <a:spcPct val="100000"/>
               </a:lnSpc>
               <a:spcAft>
-                <a:spcPts val="900"/>
+                <a:spcPts val="1000"/>
               </a:spcAft>
               <a:buSzPct val="100000"/>
               <a:buChar char="•"/>
@@ -47487,7 +47665,7 @@
                 <a:ea typeface="Calibri" pitchFamily="34" charset="-122"/>
                 <a:cs typeface="Calibri" pitchFamily="34" charset="-120"/>
               </a:rPr>
-              <a:t>Strategy: low rate (RR 8–10), long expiratory time (I:E 1:4 or 1:5), Vt 6–8 mL/kg IBW, FiO₂ to SpO₂ ≥ 88% (COPD) or ≥ 92% (asthma), PEEP 0–5 cmH₂O.</a:t>
+              <a:t>Strategy: low rate (RR 8–10), long expiratory time (I:E 1:4 or 1:5), Vt 6–8 mL/kg IBW, FiO₂ to SpO₂ ≥ 88% (COPD) or ≥ 92% (asthma), PEEP 0–5 cmH₂O. Permissive hypercapnia is acceptable; pH ≥ 7.20 typical floor.</a:t>
             </a:r>
             <a:endParaRPr lang="en-US" sz="1550" dirty="0"/>
           </a:p>
@@ -47497,7 +47675,7 @@
                 <a:spcPct val="100000"/>
               </a:lnSpc>
               <a:spcAft>
-                <a:spcPts val="900"/>
+                <a:spcPts val="1000"/>
               </a:spcAft>
               <a:buSzPct val="100000"/>
               <a:buChar char="•"/>
@@ -47511,7 +47689,7 @@
                 <a:ea typeface="Calibri" pitchFamily="34" charset="-122"/>
                 <a:cs typeface="Calibri" pitchFamily="34" charset="-120"/>
               </a:rPr>
-              <a:t>Don't chase a normal CO₂ at the cost of barotrauma.</a:t>
+              <a:t>Don't chase a normal CO₂ at the cost of barotrauma. Forcing the rate up stacks breaths and drops BP via auto-PEEP.</a:t>
             </a:r>
             <a:endParaRPr lang="en-US" sz="1550" dirty="0"/>
           </a:p>
@@ -47675,7 +47853,7 @@
         <p:spPr>
           <a:xfrm>
             <a:off x="548640" y="2148840"/>
-            <a:ext cx="6309360" cy="4114800"/>
+            <a:ext cx="6309360" cy="4160520"/>
           </a:xfrm>
           <a:prstGeom prst="rect">
             <a:avLst/>
@@ -47692,7 +47870,7 @@
                 <a:spcPct val="100000"/>
               </a:lnSpc>
               <a:spcAft>
-                <a:spcPts val="900"/>
+                <a:spcPts val="1000"/>
               </a:spcAft>
               <a:buSzPct val="100000"/>
               <a:buChar char="•"/>
@@ -47716,7 +47894,7 @@
                 <a:spcPct val="100000"/>
               </a:lnSpc>
               <a:spcAft>
-                <a:spcPts val="900"/>
+                <a:spcPts val="1000"/>
               </a:spcAft>
               <a:buSzPct val="100000"/>
               <a:buChar char="•"/>
@@ -47740,7 +47918,7 @@
                 <a:spcPct val="100000"/>
               </a:lnSpc>
               <a:spcAft>
-                <a:spcPts val="900"/>
+                <a:spcPts val="1000"/>
               </a:spcAft>
               <a:buSzPct val="100000"/>
               <a:buChar char="•"/>
@@ -47754,7 +47932,7 @@
                 <a:ea typeface="Calibri" pitchFamily="34" charset="-122"/>
                 <a:cs typeface="Calibri" pitchFamily="34" charset="-120"/>
               </a:rPr>
-              <a:t>Management: slow RR (often dramatically — to 8 or even 6).</a:t>
+              <a:t>Management: slow RR (often dramatically — to 8 or even 6). Lengthen exp time (I:E 1:4 or 1:5).</a:t>
             </a:r>
             <a:endParaRPr lang="en-US" sz="1550" dirty="0"/>
           </a:p>
@@ -47764,7 +47942,7 @@
                 <a:spcPct val="100000"/>
               </a:lnSpc>
               <a:spcAft>
-                <a:spcPts val="900"/>
+                <a:spcPts val="1000"/>
               </a:spcAft>
               <a:buSzPct val="100000"/>
               <a:buChar char="•"/>
@@ -47778,7 +47956,7 @@
                 <a:ea typeface="Calibri" pitchFamily="34" charset="-122"/>
                 <a:cs typeface="Calibri" pitchFamily="34" charset="-120"/>
               </a:rPr>
-              <a:t>If hemodynamically compromised: BRIEFLY DISCONNECT FROM THE VENT for 5–10 seconds.</a:t>
+              <a:t>If hemodynamically compromised: BRIEFLY DISCONNECT FROM THE VENT for 5–10 seconds. Trapped gas releases. BP often improves immediately. Reconnect on slower settings.</a:t>
             </a:r>
             <a:endParaRPr lang="en-US" sz="1550" dirty="0"/>
           </a:p>
@@ -48087,7 +48265,7 @@
         <p:spPr>
           <a:xfrm>
             <a:off x="548640" y="2148840"/>
-            <a:ext cx="6309360" cy="4114800"/>
+            <a:ext cx="6309360" cy="4160520"/>
           </a:xfrm>
           <a:prstGeom prst="rect">
             <a:avLst/>
@@ -48104,7 +48282,7 @@
                 <a:spcPct val="100000"/>
               </a:lnSpc>
               <a:spcAft>
-                <a:spcPts val="900"/>
+                <a:spcPts val="1000"/>
               </a:spcAft>
               <a:buSzPct val="100000"/>
               <a:buChar char="•"/>
@@ -48118,7 +48296,7 @@
                 <a:ea typeface="Calibri" pitchFamily="34" charset="-122"/>
                 <a:cs typeface="Calibri" pitchFamily="34" charset="-120"/>
               </a:rPr>
-              <a:t>Acute Respiratory Distress Syndrome: diffuse alveolar damage, refractory hypoxia.</a:t>
+              <a:t>Acute Respiratory Distress Syndrome: diffuse alveolar damage, refractory hypoxia. Berlin definition (2012): bilateral infiltrates, not cardiac, within 1 week.</a:t>
             </a:r>
             <a:endParaRPr lang="en-US" sz="1550" dirty="0"/>
           </a:p>
@@ -48128,7 +48306,7 @@
                 <a:spcPct val="100000"/>
               </a:lnSpc>
               <a:spcAft>
-                <a:spcPts val="900"/>
+                <a:spcPts val="1000"/>
               </a:spcAft>
               <a:buSzPct val="100000"/>
               <a:buChar char="•"/>
@@ -48142,7 +48320,7 @@
                 <a:ea typeface="Calibri" pitchFamily="34" charset="-122"/>
                 <a:cs typeface="Calibri" pitchFamily="34" charset="-120"/>
               </a:rPr>
-              <a:t>Goal: protect the alveoli you have left.</a:t>
+              <a:t>Goal: protect the alveoli you have left. The mental model is the 'baby lung' — in ARDS so much lung is flooded or collapsed that only a small, child-sized portion is still open to ventilate.</a:t>
             </a:r>
             <a:endParaRPr lang="en-US" sz="1550" dirty="0"/>
           </a:p>
@@ -48152,7 +48330,7 @@
                 <a:spcPct val="100000"/>
               </a:lnSpc>
               <a:spcAft>
-                <a:spcPts val="900"/>
+                <a:spcPts val="1000"/>
               </a:spcAft>
               <a:buSzPct val="100000"/>
               <a:buChar char="•"/>
@@ -48166,7 +48344,7 @@
                 <a:ea typeface="Calibri" pitchFamily="34" charset="-122"/>
                 <a:cs typeface="Calibri" pitchFamily="34" charset="-120"/>
               </a:rPr>
-              <a:t>Settings: AC/VC or AC/PC; Vt 4–6 mL/kg IBW (LOWER than usual); RR 18–22 to maintain MV; PEEP 10–15 per ARDSNet table; Pplat &lt; 30; driving pressure (Pplat…</a:t>
+              <a:t>Settings: AC/VC or AC/PC; Vt 4–6 mL/kg IBW (LOWER than usual); RR 18–22 to maintain MV; PEEP 10–15 per ARDSNet table; Pplat &lt; 30; driving pressure (Pplat − PEEP) &lt; 14 cmH₂O.</a:t>
             </a:r>
             <a:endParaRPr lang="en-US" sz="1550" dirty="0"/>
           </a:p>
@@ -48176,7 +48354,7 @@
                 <a:spcPct val="100000"/>
               </a:lnSpc>
               <a:spcAft>
-                <a:spcPts val="900"/>
+                <a:spcPts val="1000"/>
               </a:spcAft>
               <a:buSzPct val="100000"/>
               <a:buChar char="•"/>
@@ -48190,7 +48368,7 @@
                 <a:ea typeface="Calibri" pitchFamily="34" charset="-122"/>
                 <a:cs typeface="Calibri" pitchFamily="34" charset="-120"/>
               </a:rPr>
-              <a:t>ARDSNet ARMA (NEJM 2000): mortality 31% vs 40% comparing 6 vs 12 mL/kg IBW.</a:t>
+              <a:t>ARDSNet ARMA (NEJM 2000): mortality 31% vs 40% comparing 6 vs 12 mL/kg IBW. NNT 11. The most evidence-based ARDS intervention.</a:t>
             </a:r>
             <a:endParaRPr lang="en-US" sz="1550" dirty="0"/>
           </a:p>
@@ -48499,7 +48677,7 @@
         <p:spPr>
           <a:xfrm>
             <a:off x="548640" y="2148840"/>
-            <a:ext cx="6309360" cy="4114800"/>
+            <a:ext cx="6309360" cy="4160520"/>
           </a:xfrm>
           <a:prstGeom prst="rect">
             <a:avLst/>
@@ -48516,7 +48694,7 @@
                 <a:spcPct val="100000"/>
               </a:lnSpc>
               <a:spcAft>
-                <a:spcPts val="900"/>
+                <a:spcPts val="1000"/>
               </a:spcAft>
               <a:buSzPct val="100000"/>
               <a:buChar char="•"/>
@@ -48530,7 +48708,7 @@
                 <a:ea typeface="Calibri" pitchFamily="34" charset="-122"/>
                 <a:cs typeface="Calibri" pitchFamily="34" charset="-120"/>
               </a:rPr>
-              <a:t>Picture a bus line where the buses are air and the passengers are blood.</a:t>
+              <a:t>Picture a bus line where the buses are air and the passengers are blood. Gas exchange only happens where a bus and its passengers actually meet.</a:t>
             </a:r>
             <a:endParaRPr lang="en-US" sz="1550" dirty="0"/>
           </a:p>
@@ -48540,7 +48718,7 @@
                 <a:spcPct val="100000"/>
               </a:lnSpc>
               <a:spcAft>
-                <a:spcPts val="900"/>
+                <a:spcPts val="1000"/>
               </a:spcAft>
               <a:buSzPct val="100000"/>
               <a:buChar char="•"/>
@@ -48554,7 +48732,7 @@
                 <a:ea typeface="Calibri" pitchFamily="34" charset="-122"/>
                 <a:cs typeface="Calibri" pitchFamily="34" charset="-120"/>
               </a:rPr>
-              <a:t>Shunt is passengers crowding a stop the bus skips entirely — perfusion with no ventilation, V/Q approaching zero.</a:t>
+              <a:t>Shunt is passengers crowding a stop the bus skips entirely — perfusion with no ventilation, V/Q approaching zero. Pneumonia, pulmonary edema, ARDS, and atelectasis all produce shunt.</a:t>
             </a:r>
             <a:endParaRPr lang="en-US" sz="1550" dirty="0"/>
           </a:p>
@@ -48564,7 +48742,7 @@
                 <a:spcPct val="100000"/>
               </a:lnSpc>
               <a:spcAft>
-                <a:spcPts val="900"/>
+                <a:spcPts val="1000"/>
               </a:spcAft>
               <a:buSzPct val="100000"/>
               <a:buChar char="•"/>
@@ -48578,7 +48756,7 @@
                 <a:ea typeface="Calibri" pitchFamily="34" charset="-122"/>
                 <a:cs typeface="Calibri" pitchFamily="34" charset="-120"/>
               </a:rPr>
-              <a:t>Dead space is the mirror image: a bus running its full route past empty stops — ventilation with no perfusion.</a:t>
+              <a:t>Dead space is the mirror image: a bus running its full route past empty stops — ventilation with no perfusion. Pulmonary embolism, low cardiac output, and severe hypovolemia produce dead-space physiology.</a:t>
             </a:r>
             <a:endParaRPr lang="en-US" sz="1550" dirty="0"/>
           </a:p>
@@ -48588,7 +48766,7 @@
                 <a:spcPct val="100000"/>
               </a:lnSpc>
               <a:spcAft>
-                <a:spcPts val="900"/>
+                <a:spcPts val="1000"/>
               </a:spcAft>
               <a:buSzPct val="100000"/>
               <a:buChar char="•"/>
@@ -48602,7 +48780,7 @@
                 <a:ea typeface="Calibri" pitchFamily="34" charset="-122"/>
                 <a:cs typeface="Calibri" pitchFamily="34" charset="-120"/>
               </a:rPr>
-              <a:t>Hypoxic Pulmonary Vasoconstriction (HPV) is a partial auto-correction: the lung constricts arterioles in poorly ventilated regions, diverting blood toward…</a:t>
+              <a:t>Hypoxic Pulmonary Vasoconstriction (HPV) is a partial auto-correction: the lung constricts arterioles in poorly ventilated regions, diverting blood toward better-ventilated alveoli.</a:t>
             </a:r>
             <a:endParaRPr lang="en-US" sz="1550" dirty="0"/>
           </a:p>
@@ -48911,7 +49089,7 @@
         <p:spPr>
           <a:xfrm>
             <a:off x="548640" y="2148840"/>
-            <a:ext cx="10058400" cy="4114800"/>
+            <a:ext cx="10058400" cy="4160520"/>
           </a:xfrm>
           <a:prstGeom prst="rect">
             <a:avLst/>
@@ -48928,13 +49106,13 @@
                 <a:spcPct val="100000"/>
               </a:lnSpc>
               <a:spcAft>
-                <a:spcPts val="900"/>
+                <a:spcPts val="800"/>
               </a:spcAft>
               <a:buSzPct val="100000"/>
               <a:buChar char="•"/>
             </a:pPr>
             <a:r>
-              <a:rPr lang="en-US" sz="1550" dirty="0">
+              <a:rPr lang="en-US" sz="1450" dirty="0">
                 <a:solidFill>
                   <a:srgbClr val="1B2433"/>
                 </a:solidFill>
@@ -48944,7 +49122,7 @@
               </a:rPr>
               <a:t>When lung-protective settings (6 mL/kg, Pplat &lt; 30, ΔP &lt; 14) aren't enough, these are the rescue options — roughly in order of evidence:</a:t>
             </a:r>
-            <a:endParaRPr lang="en-US" sz="1550" dirty="0"/>
+            <a:endParaRPr lang="en-US" sz="1450" dirty="0"/>
           </a:p>
           <a:p>
             <a:pPr marL="177800" indent="-177800">
@@ -48952,13 +49130,13 @@
                 <a:spcPct val="100000"/>
               </a:lnSpc>
               <a:spcAft>
-                <a:spcPts val="900"/>
+                <a:spcPts val="800"/>
               </a:spcAft>
               <a:buSzPct val="100000"/>
               <a:buChar char="•"/>
             </a:pPr>
             <a:r>
-              <a:rPr lang="en-US" sz="1550" dirty="0">
+              <a:rPr lang="en-US" sz="1450" dirty="0">
                 <a:solidFill>
                   <a:srgbClr val="1B2433"/>
                 </a:solidFill>
@@ -48966,9 +49144,9 @@
                 <a:ea typeface="Calibri" pitchFamily="34" charset="-122"/>
                 <a:cs typeface="Calibri" pitchFamily="34" charset="-120"/>
               </a:rPr>
-              <a:t>Prone positioning — PROSEVA (Guérin, NEJM 2013): 16 hr/day in severe ARDS (P/F &lt; 150). Mortality 33% → 16%, NNT 6.…</a:t>
-            </a:r>
-            <a:endParaRPr lang="en-US" sz="1550" dirty="0"/>
+              <a:t>Prone positioning — PROSEVA (Guérin, NEJM 2013): 16 hr/day in severe ARDS (P/F &lt; 150). Mortality 33% → 16%, NNT 6. The strongest single rescue.</a:t>
+            </a:r>
+            <a:endParaRPr lang="en-US" sz="1450" dirty="0"/>
           </a:p>
           <a:p>
             <a:pPr marL="177800" indent="-177800">
@@ -48976,13 +49154,13 @@
                 <a:spcPct val="100000"/>
               </a:lnSpc>
               <a:spcAft>
-                <a:spcPts val="900"/>
+                <a:spcPts val="800"/>
               </a:spcAft>
               <a:buSzPct val="100000"/>
               <a:buChar char="•"/>
             </a:pPr>
             <a:r>
-              <a:rPr lang="en-US" sz="1550" dirty="0">
+              <a:rPr lang="en-US" sz="1450" dirty="0">
                 <a:solidFill>
                   <a:srgbClr val="1B2433"/>
                 </a:solidFill>
@@ -48990,9 +49168,9 @@
                 <a:ea typeface="Calibri" pitchFamily="34" charset="-122"/>
                 <a:cs typeface="Calibri" pitchFamily="34" charset="-120"/>
               </a:rPr>
-              <a:t>Neuromuscular blockade — ACURASYS (NEJM 2010) showed a mortality benefit with 48-hr cisatracurium; ROSE (NEJM 2019)…</a:t>
-            </a:r>
-            <a:endParaRPr lang="en-US" sz="1550" dirty="0"/>
+              <a:t>Neuromuscular blockade — ACURASYS (NEJM 2010) showed a mortality benefit with 48-hr cisatracurium; ROSE (NEJM 2019) didn't replicate it. Now…</a:t>
+            </a:r>
+            <a:endParaRPr lang="en-US" sz="1450" dirty="0"/>
           </a:p>
           <a:p>
             <a:pPr marL="177800" indent="-177800">
@@ -49000,13 +49178,13 @@
                 <a:spcPct val="100000"/>
               </a:lnSpc>
               <a:spcAft>
-                <a:spcPts val="900"/>
+                <a:spcPts val="800"/>
               </a:spcAft>
               <a:buSzPct val="100000"/>
               <a:buChar char="•"/>
             </a:pPr>
             <a:r>
-              <a:rPr lang="en-US" sz="1550" dirty="0">
+              <a:rPr lang="en-US" sz="1450" dirty="0">
                 <a:solidFill>
                   <a:srgbClr val="1B2433"/>
                 </a:solidFill>
@@ -49016,7 +49194,7 @@
               </a:rPr>
               <a:t>HFOV — OSCILLATE / OSCAR (NEJM 2013): no benefit; OSCILLATE was stopped for harm. Not first-line.</a:t>
             </a:r>
-            <a:endParaRPr lang="en-US" sz="1550" dirty="0"/>
+            <a:endParaRPr lang="en-US" sz="1450" dirty="0"/>
           </a:p>
           <a:p>
             <a:pPr marL="177800" indent="-177800">
@@ -49024,13 +49202,13 @@
                 <a:spcPct val="100000"/>
               </a:lnSpc>
               <a:spcAft>
-                <a:spcPts val="900"/>
+                <a:spcPts val="800"/>
               </a:spcAft>
               <a:buSzPct val="100000"/>
               <a:buChar char="•"/>
             </a:pPr>
             <a:r>
-              <a:rPr lang="en-US" sz="1550" dirty="0">
+              <a:rPr lang="en-US" sz="1450" dirty="0">
                 <a:solidFill>
                   <a:srgbClr val="1B2433"/>
                 </a:solidFill>
@@ -49038,9 +49216,9 @@
                 <a:ea typeface="Calibri" pitchFamily="34" charset="-122"/>
                 <a:cs typeface="Calibri" pitchFamily="34" charset="-120"/>
               </a:rPr>
-              <a:t>ECMO — ICU-level. Transport teams may move ECMO patients but don't initiate. Notify the receiving facility early…</a:t>
-            </a:r>
-            <a:endParaRPr lang="en-US" sz="1550" dirty="0"/>
+              <a:t>ECMO — ICU-level. Transport teams may move ECMO patients but don't initiate. Notify the receiving facility early when standard care is failing.</a:t>
+            </a:r>
+            <a:endParaRPr lang="en-US" sz="1450" dirty="0"/>
           </a:p>
         </p:txBody>
       </p:sp>
@@ -49202,7 +49380,7 @@
         <p:spPr>
           <a:xfrm>
             <a:off x="548640" y="2148840"/>
-            <a:ext cx="6309360" cy="4114800"/>
+            <a:ext cx="6309360" cy="4160520"/>
           </a:xfrm>
           <a:prstGeom prst="rect">
             <a:avLst/>
@@ -49219,7 +49397,7 @@
                 <a:spcPct val="100000"/>
               </a:lnSpc>
               <a:spcAft>
-                <a:spcPts val="900"/>
+                <a:spcPts val="1000"/>
               </a:spcAft>
               <a:buSzPct val="100000"/>
               <a:buChar char="•"/>
@@ -49233,7 +49411,7 @@
                 <a:ea typeface="Calibri" pitchFamily="34" charset="-122"/>
                 <a:cs typeface="Calibri" pitchFamily="34" charset="-120"/>
               </a:rPr>
-              <a:t>Two enemies of the injured brain: hypoxia and hypotension.</a:t>
+              <a:t>Two enemies of the injured brain: hypoxia and hypotension. A single SpO₂ &lt; 90 or SBP &lt; 90 doubles mortality in moderate-severe TBI (Brain Trauma Foundation 4th ed., 2017).</a:t>
             </a:r>
             <a:endParaRPr lang="en-US" sz="1550" dirty="0"/>
           </a:p>
@@ -49243,7 +49421,7 @@
                 <a:spcPct val="100000"/>
               </a:lnSpc>
               <a:spcAft>
-                <a:spcPts val="900"/>
+                <a:spcPts val="1000"/>
               </a:spcAft>
               <a:buSzPct val="100000"/>
               <a:buChar char="•"/>
@@ -49257,7 +49435,7 @@
                 <a:ea typeface="Calibri" pitchFamily="34" charset="-122"/>
                 <a:cs typeface="Calibri" pitchFamily="34" charset="-120"/>
               </a:rPr>
-              <a:t>Strict normocapnia: target EtCO₂ 35–40 mmHg.</a:t>
+              <a:t>Strict normocapnia: target EtCO₂ 35–40 mmHg. Avoid prophylactic hyperventilation (BTF Level IIB recommendation) — drops cerebral blood flow and worsens secondary injury.</a:t>
             </a:r>
             <a:endParaRPr lang="en-US" sz="1550" dirty="0"/>
           </a:p>
@@ -49267,7 +49445,7 @@
                 <a:spcPct val="100000"/>
               </a:lnSpc>
               <a:spcAft>
-                <a:spcPts val="900"/>
+                <a:spcPts val="1000"/>
               </a:spcAft>
               <a:buSzPct val="100000"/>
               <a:buChar char="•"/>
@@ -49291,7 +49469,7 @@
                 <a:spcPct val="100000"/>
               </a:lnSpc>
               <a:spcAft>
-                <a:spcPts val="900"/>
+                <a:spcPts val="1000"/>
               </a:spcAft>
               <a:buSzPct val="100000"/>
               <a:buChar char="•"/>
@@ -49305,7 +49483,7 @@
                 <a:ea typeface="Calibri" pitchFamily="34" charset="-122"/>
                 <a:cs typeface="Calibri" pitchFamily="34" charset="-120"/>
               </a:rPr>
-              <a:t>Hyperventilation rescue (transient, for impending herniation only): increase RR to target EtCO₂ 30–35 mmHg (NEVER below 30).</a:t>
+              <a:t>Hyperventilation rescue (transient, for impending herniation only): increase RR to target EtCO₂ 30–35 mmHg (NEVER below 30). Return to normocapnia once the exam improves (typically 2–5 min).</a:t>
             </a:r>
             <a:endParaRPr lang="en-US" sz="1550" dirty="0"/>
           </a:p>
@@ -49614,7 +49792,7 @@
         <p:spPr>
           <a:xfrm>
             <a:off x="548640" y="2148840"/>
-            <a:ext cx="10058400" cy="4114800"/>
+            <a:ext cx="10058400" cy="4160520"/>
           </a:xfrm>
           <a:prstGeom prst="rect">
             <a:avLst/>
@@ -49631,7 +49809,7 @@
                 <a:spcPct val="100000"/>
               </a:lnSpc>
               <a:spcAft>
-                <a:spcPts val="900"/>
+                <a:spcPts val="1000"/>
               </a:spcAft>
               <a:buSzPct val="100000"/>
               <a:buChar char="•"/>
@@ -49645,7 +49823,7 @@
                 <a:ea typeface="Calibri" pitchFamily="34" charset="-122"/>
                 <a:cs typeface="Calibri" pitchFamily="34" charset="-120"/>
               </a:rPr>
-              <a:t>Use length-based weight (Broselow / Handtevy) — don't guess.</a:t>
+              <a:t>Use length-based weight (Broselow / Handtevy) — don't guess. Vt 6–8 mL/kg of ACTUAL body weight in peds (different from adults).</a:t>
             </a:r>
             <a:endParaRPr lang="en-US" sz="1550" dirty="0"/>
           </a:p>
@@ -49655,7 +49833,7 @@
                 <a:spcPct val="100000"/>
               </a:lnSpc>
               <a:spcAft>
-                <a:spcPts val="900"/>
+                <a:spcPts val="1000"/>
               </a:spcAft>
               <a:buSzPct val="100000"/>
               <a:buChar char="•"/>
@@ -49669,7 +49847,7 @@
                 <a:ea typeface="Calibri" pitchFamily="34" charset="-122"/>
                 <a:cs typeface="Calibri" pitchFamily="34" charset="-120"/>
               </a:rPr>
-              <a:t>Age-based RR: infant 25–30, child 15–20, adolescent 12–16.</a:t>
+              <a:t>Age-based RR: infant 25–30, child 15–20, adolescent 12–16. PEEP starts 5; can go higher in severe parenchymal disease.</a:t>
             </a:r>
             <a:endParaRPr lang="en-US" sz="1550" dirty="0"/>
           </a:p>
@@ -49679,7 +49857,7 @@
                 <a:spcPct val="100000"/>
               </a:lnSpc>
               <a:spcAft>
-                <a:spcPts val="900"/>
+                <a:spcPts val="1000"/>
               </a:spcAft>
               <a:buSzPct val="100000"/>
               <a:buChar char="•"/>
@@ -49693,7 +49871,7 @@
                 <a:ea typeface="Calibri" pitchFamily="34" charset="-122"/>
                 <a:cs typeface="Calibri" pitchFamily="34" charset="-120"/>
               </a:rPr>
-              <a:t>PALS 2020: cuffed endotracheal tubes are preferred in most pediatric patients, including infants.</a:t>
+              <a:t>PALS 2020: cuffed endotracheal tubes are preferred in most pediatric patients, including infants. Pay attention to cuff pressure to avoid tracheal injury.</a:t>
             </a:r>
             <a:endParaRPr lang="en-US" sz="1550" dirty="0"/>
           </a:p>
@@ -49703,7 +49881,7 @@
                 <a:spcPct val="100000"/>
               </a:lnSpc>
               <a:spcAft>
-                <a:spcPts val="900"/>
+                <a:spcPts val="1000"/>
               </a:spcAft>
               <a:buSzPct val="100000"/>
               <a:buChar char="•"/>
@@ -49717,7 +49895,7 @@
                 <a:ea typeface="Calibri" pitchFamily="34" charset="-122"/>
                 <a:cs typeface="Calibri" pitchFamily="34" charset="-120"/>
               </a:rPr>
-              <a:t>Most common pediatric error: adult circuit on a pediatric patient.</a:t>
+              <a:t>Most common pediatric error: adult circuit on a pediatric patient. Adult circuit dead space can exceed pediatric Vt — you're ventilating the circuit, not the lungs. Use the pediatric circuit.</a:t>
             </a:r>
             <a:endParaRPr lang="en-US" sz="1550" dirty="0"/>
           </a:p>
@@ -50241,7 +50419,9 @@
       </p:sp>
       <p:sp>
         <p:nvSpPr>
-          <p:cNvPr id="14" name="Text 12"/>
+          <p:cNvPr id="14" name="Text 12">
+            <a:hlinkClick r:id="rId1" tooltip="Open this module's simulator mission"/>
+          </p:cNvPr>
           <p:cNvSpPr/>
           <p:nvPr/>
         </p:nvSpPr>
@@ -50264,13 +50444,20 @@
               <a:buNone/>
             </a:pPr>
             <a:r>
-              <a:rPr lang="en-US" sz="1700" b="1" dirty="0">
+              <a:rPr lang="en-US" sz="1700" b="1" u="sng" dirty="0">
                 <a:solidFill>
                   <a:srgbClr val="FFFFFF"/>
                 </a:solidFill>
                 <a:latin typeface="Calibri" pitchFamily="34" charset="0"/>
                 <a:ea typeface="Calibri" pitchFamily="34" charset="-122"/>
                 <a:cs typeface="Calibri" pitchFamily="34" charset="-120"/>
+                <a:hlinkClick r:id="rId1" invalidUrl="" action="" tgtFrame="" tooltip="Open this module's simulator mission" history="1" highlightClick="0" endSnd="0">
+                  <a:extLst>
+                    <a:ext uri="{A12FA001-AC4F-418D-AE19-62706E023703}">
+                      <ahyp:hlinkClr xmlns:ahyp="http://schemas.microsoft.com/office/drawing/2018/hyperlinkcolor" val="tx"/>
+                    </a:ext>
+                  </a:extLst>
+                </a:hlinkClick>
               </a:rPr>
               <a:t>LTV 1200 Simulator</a:t>
             </a:r>
@@ -50303,13 +50490,20 @@
               <a:buNone/>
             </a:pPr>
             <a:r>
-              <a:rPr lang="en-US" sz="1250" dirty="0">
-                <a:solidFill>
-                  <a:srgbClr val="A9C2E0"/>
-                </a:solidFill>
-                <a:latin typeface="Calibri" pitchFamily="34" charset="0"/>
-                <a:ea typeface="Calibri" pitchFamily="34" charset="-122"/>
-                <a:cs typeface="Calibri" pitchFamily="34" charset="-120"/>
+              <a:rPr lang="en-US" sz="1250" u="sng" dirty="0">
+                <a:solidFill>
+                  <a:srgbClr val="7FB0E6"/>
+                </a:solidFill>
+                <a:latin typeface="Calibri" pitchFamily="34" charset="0"/>
+                <a:ea typeface="Calibri" pitchFamily="34" charset="-122"/>
+                <a:cs typeface="Calibri" pitchFamily="34" charset="-120"/>
+                <a:hlinkClick r:id="rId2" invalidUrl="" action="" tgtFrame="" tooltip="" history="1" highlightClick="0" endSnd="0">
+                  <a:extLst>
+                    <a:ext uri="{A12FA001-AC4F-418D-AE19-62706E023703}">
+                      <ahyp:hlinkClr xmlns:ahyp="http://schemas.microsoft.com/office/drawing/2018/hyperlinkcolor" val="tx"/>
+                    </a:ext>
+                  </a:extLst>
+                </a:hlinkClick>
               </a:rPr>
               <a:t>vent-ltv1200.html?level=3  —  Take on the simulator's advanced cases — ARDS, COPD, TBI and more, no hand-holding.</a:t>
             </a:r>

--- a/vta/slides/Ventilator_Academy_Full_Course.pptx
+++ b/vta/slides/Ventilator_Academy_Full_Course.pptx
@@ -5547,7 +5547,7 @@
               <a:t>The pulmonary system has two zones. The conducting zone is everything from the mouth to the terminal bronchioles. It moves air. No gas exchange occurs here. The volume that fills it on each breath is anatomic dead space — approximately 2 mL per kilogram of body weight, or about 150 mL in a 70 kg adult.
 The respiratory zone is where gas exchange happens. Type I pneumocytes form the thin alveolar wall (0.2–0.5 µm thick — about 1/100 the diameter of a red blood cell). Type II pneumocytes produce surfactant.
 Picture two soap bubbles tied to the ends of a straw, one small and one large. By Laplace's law the small bubble has the higher pressure, so it empties itself into the big one and collapses. Alveoli would do the same to each other on every exhale — except for surfactant, the dish soap Type II cells make to lower that surface tension so the smallest alveoli survive instead of caving into their neighbors. ARDS, smoke inhalation, drowning, and gastric aspiration all damage Type II cells or wash the soap out.
-When the soap is gone, PEEP is your bedside replacement: it is the doorstop you wedge under each alveolus, splinting it open mechanically until surfactant function returns.
+When the soap is gone, PEEP is NOT a substitute for surfactant — but it buys time: it is the doorstop you wedge under each alveolus, mechanically splinting it open until surfactant function returns.
 EVIDENCE — Surfactant and PEEP: Conditions that damage Type II pneumocytes produce a stiff lung with refractory hypoxia. The bedside fix is PEEP — not more FiO₂.</a:t>
             </a:r>
             <a:endParaRPr lang="en-US" dirty="0"/>
@@ -6635,7 +6635,7 @@
               <a:rPr lang="en-US" dirty="0"/>
               <a:t>Sudden rise in PIP, often with falling SpO₂ and BP. Decreased or absent breath sounds on the affected side. Tracheal deviation away from the affected side (LATE).
 Hyperresonance to percussion of the affected side. JVD + hemodynamic compromise = TENSION pneumothorax. Clinical diagnosis at the bedside, not waiting for imaging.
-Decompress per protocol: needle thoracostomy at the 2nd ICS midclavicular OR 4th–5th ICS midaxillary. Then chest seal / tube as appropriate.
+Decompress per protocol: needle thoracostomy at the 2nd ICS midclavicular OR 4th–5th ICS midaxillary. Then secure and monitor the catheter/device per protocol, reassess for re-tensioning, and arrange definitive thoracostomy at the receiving facility. (A chest seal treats an OPEN chest wound — it does not stop an internal air leak.)
 High-risk populations: asthma/COPD on positive pressure, trauma, recent central line placement. Suspect early.</a:t>
             </a:r>
             <a:endParaRPr lang="en-US" dirty="0"/>
@@ -7449,7 +7449,8 @@
 +4 combative danger to staff. +3 very agitated, pulls at tubes. +2 agitated, fights vent. +1 restless but cooperative.
 0 alert and calm.
 −1 drowsy, sustained eye contact &gt; 10 sec to voice. −2 light sedation, briefly opens eyes to voice. −3 moderate, movement to voice no eye contact. −4 deep, movement to physical stimulus only. −5 unarousable.
-Transport target is RASS −1 to −2. Deeper than −2 makes handoff assessment hard. Lighter than −1 risks self-extubation.</a:t>
+Transport target is RASS −1 to −2. Deeper than −2 makes handoff assessment hard. Lighter than −1 risks self-extubation.
+Critical caveat: RASS CANNOT be scored during neuromuscular blockade — a paralyzed patient always looks calm regardless of awareness. Until paralysis resolves, judge adequacy of analgesia/sedation by autonomic signs (heart rate, blood pressure, lacrimation, diaphoresis), not by RASS.</a:t>
             </a:r>
             <a:endParaRPr lang="en-US" dirty="0"/>
           </a:p>
@@ -34698,7 +34699,7 @@
                 <a:ea typeface="Calibri" pitchFamily="34" charset="-122"/>
                 <a:cs typeface="Calibri" pitchFamily="34" charset="-120"/>
               </a:rPr>
-              <a:t>When the soap is gone, PEEP is your bedside replacement: it is the doorstop you wedge under each alveolus, splinting it open mechanically until surfactant function returns.</a:t>
+              <a:t>When the soap is gone, PEEP is NOT a substitute for surfactant — but it buys time: it is the doorstop you wedge under each alveolus, mechanically splinting it open until surfactant function returns.</a:t>
             </a:r>
             <a:endParaRPr lang="en-US" sz="1550" dirty="0"/>
           </a:p>
@@ -39882,7 +39883,7 @@
                 <a:ea typeface="Calibri" pitchFamily="34" charset="-122"/>
                 <a:cs typeface="Calibri" pitchFamily="34" charset="-120"/>
               </a:rPr>
-              <a:t>Decompress per protocol: needle thoracostomy at the 2nd ICS midclavicular OR 4th–5th ICS midaxillary. Then chest seal / tube as appropriate.</a:t>
+              <a:t>Decompress per protocol: needle thoracostomy at the 2nd ICS midclavicular OR 4th–5th ICS midaxillary.</a:t>
             </a:r>
             <a:endParaRPr lang="en-US" sz="1550" dirty="0"/>
           </a:p>
@@ -43733,13 +43734,13 @@
                 <a:spcPct val="100000"/>
               </a:lnSpc>
               <a:spcAft>
-                <a:spcPts val="800"/>
+                <a:spcPts val="600"/>
               </a:spcAft>
               <a:buSzPct val="100000"/>
               <a:buChar char="•"/>
             </a:pPr>
             <a:r>
-              <a:rPr lang="en-US" sz="1450" dirty="0">
+              <a:rPr lang="en-US" sz="1350" dirty="0">
                 <a:solidFill>
                   <a:srgbClr val="1B2433"/>
                 </a:solidFill>
@@ -43749,7 +43750,7 @@
               </a:rPr>
               <a:t>Richmond Agitation-Sedation Scale runs +4 (combative) to −5 (unarousable).</a:t>
             </a:r>
-            <a:endParaRPr lang="en-US" sz="1450" dirty="0"/>
+            <a:endParaRPr lang="en-US" sz="1350" dirty="0"/>
           </a:p>
           <a:p>
             <a:pPr marL="177800" indent="-177800">
@@ -43757,13 +43758,13 @@
                 <a:spcPct val="100000"/>
               </a:lnSpc>
               <a:spcAft>
-                <a:spcPts val="800"/>
+                <a:spcPts val="600"/>
               </a:spcAft>
               <a:buSzPct val="100000"/>
               <a:buChar char="•"/>
             </a:pPr>
             <a:r>
-              <a:rPr lang="en-US" sz="1450" dirty="0">
+              <a:rPr lang="en-US" sz="1350" dirty="0">
                 <a:solidFill>
                   <a:srgbClr val="1B2433"/>
                 </a:solidFill>
@@ -43773,7 +43774,7 @@
               </a:rPr>
               <a:t>+4 combative danger to staff. +3 very agitated, pulls at tubes. +2 agitated, fights vent. +1 restless but cooperative.</a:t>
             </a:r>
-            <a:endParaRPr lang="en-US" sz="1450" dirty="0"/>
+            <a:endParaRPr lang="en-US" sz="1350" dirty="0"/>
           </a:p>
           <a:p>
             <a:pPr marL="177800" indent="-177800">
@@ -43781,13 +43782,13 @@
                 <a:spcPct val="100000"/>
               </a:lnSpc>
               <a:spcAft>
-                <a:spcPts val="800"/>
+                <a:spcPts val="600"/>
               </a:spcAft>
               <a:buSzPct val="100000"/>
               <a:buChar char="•"/>
             </a:pPr>
             <a:r>
-              <a:rPr lang="en-US" sz="1450" dirty="0">
+              <a:rPr lang="en-US" sz="1350" dirty="0">
                 <a:solidFill>
                   <a:srgbClr val="1B2433"/>
                 </a:solidFill>
@@ -43797,7 +43798,7 @@
               </a:rPr>
               <a:t>0 alert and calm.</a:t>
             </a:r>
-            <a:endParaRPr lang="en-US" sz="1450" dirty="0"/>
+            <a:endParaRPr lang="en-US" sz="1350" dirty="0"/>
           </a:p>
           <a:p>
             <a:pPr marL="177800" indent="-177800">
@@ -43805,13 +43806,13 @@
                 <a:spcPct val="100000"/>
               </a:lnSpc>
               <a:spcAft>
-                <a:spcPts val="800"/>
+                <a:spcPts val="600"/>
               </a:spcAft>
               <a:buSzPct val="100000"/>
               <a:buChar char="•"/>
             </a:pPr>
             <a:r>
-              <a:rPr lang="en-US" sz="1450" dirty="0">
+              <a:rPr lang="en-US" sz="1350" dirty="0">
                 <a:solidFill>
                   <a:srgbClr val="1B2433"/>
                 </a:solidFill>
@@ -43821,7 +43822,7 @@
               </a:rPr>
               <a:t>−1 drowsy, sustained eye contact &gt; 10 sec to voice. −2 light sedation, briefly opens eyes to voice. −3 moderate, movement to voice no eye contact. −4 deep, movement to physical stimulus only.</a:t>
             </a:r>
-            <a:endParaRPr lang="en-US" sz="1450" dirty="0"/>
+            <a:endParaRPr lang="en-US" sz="1350" dirty="0"/>
           </a:p>
           <a:p>
             <a:pPr marL="177800" indent="-177800">
@@ -43829,13 +43830,13 @@
                 <a:spcPct val="100000"/>
               </a:lnSpc>
               <a:spcAft>
-                <a:spcPts val="800"/>
+                <a:spcPts val="600"/>
               </a:spcAft>
               <a:buSzPct val="100000"/>
               <a:buChar char="•"/>
             </a:pPr>
             <a:r>
-              <a:rPr lang="en-US" sz="1450" dirty="0">
+              <a:rPr lang="en-US" sz="1350" dirty="0">
                 <a:solidFill>
                   <a:srgbClr val="1B2433"/>
                 </a:solidFill>
@@ -43845,7 +43846,31 @@
               </a:rPr>
               <a:t>Transport target is RASS −1 to −2. Deeper than −2 makes handoff assessment hard. Lighter than −1 risks self-extubation.</a:t>
             </a:r>
-            <a:endParaRPr lang="en-US" sz="1450" dirty="0"/>
+            <a:endParaRPr lang="en-US" sz="1350" dirty="0"/>
+          </a:p>
+          <a:p>
+            <a:pPr marL="177800" indent="-177800">
+              <a:lnSpc>
+                <a:spcPct val="100000"/>
+              </a:lnSpc>
+              <a:spcAft>
+                <a:spcPts val="600"/>
+              </a:spcAft>
+              <a:buSzPct val="100000"/>
+              <a:buChar char="•"/>
+            </a:pPr>
+            <a:r>
+              <a:rPr lang="en-US" sz="1350" dirty="0">
+                <a:solidFill>
+                  <a:srgbClr val="1B2433"/>
+                </a:solidFill>
+                <a:latin typeface="Calibri" pitchFamily="34" charset="0"/>
+                <a:ea typeface="Calibri" pitchFamily="34" charset="-122"/>
+                <a:cs typeface="Calibri" pitchFamily="34" charset="-120"/>
+              </a:rPr>
+              <a:t>Critical caveat: RASS CANNOT be scored during neuromuscular blockade — a paralyzed patient always looks calm regardless of awareness.</a:t>
+            </a:r>
+            <a:endParaRPr lang="en-US" sz="1350" dirty="0"/>
           </a:p>
         </p:txBody>
       </p:sp>

--- a/vta/slides/Ventilator_Academy_Full_Course.pptx
+++ b/vta/slides/Ventilator_Academy_Full_Course.pptx
@@ -5093,7 +5093,7 @@
           <a:p>
             <a:r>
               <a:rPr lang="en-US" dirty="0"/>
-              <a:t>Module 6: LTV 1200 — The Platform Tour. Every knob, every screen, every alarm — without a patient on it. POST every shift, every patient.</a:t>
+              <a:t>Module 6: LTV 1200 — The Platform Tour. Every control, every screen, every alarm — without a patient on it. Check it every shift, every patient.</a:t>
             </a:r>
             <a:endParaRPr lang="en-US" dirty="0"/>
           </a:p>
@@ -5269,8 +5269,8 @@
           <a:p>
             <a:r>
               <a:rPr lang="en-US" dirty="0"/>
-              <a:t>Front panel essentials: Power button (top corner, momentary press). Display (settings on left, monitored on right). Control knob (right of display — scrolls values). Select button (moves cursor between parameters). Manual breath, Alarm Silence (60-sec mute), Alarm Reset.
-Side panel: O₂ inlet at 50 PSI (DISS or quick-connect). Patient circuit ports including the easily-missed exhalation valve drive line. Battery compartment, AC/DC power, bacterial/viral filter, USB (service only).
+              <a:t>Front panel essentials: On/Standby power. A bank of INDIVIDUAL control windows — one per setting (Breath Rate, Tidal Volume, Pressure Control, Inspiratory Time, Pressure Support, O₂ %, Sensitivity, PEEP) plus the alarm-limit windows. Two Select buttons (Mode and Breath Type). The Set Value knob. Manual Breath, Alarm Silence/Reset, Control Lock, and the display window.
+Side/rear connections: O₂ inlet — high-pressure DISS or a low-pressure fitting depending on configuration. Patient circuit ports including the easily-missed exhalation valve drive line. Battery compartment, external power input, bacterial/viral filter, and a Comm Port for service and data (it is NOT a USB port). Confirm the exact connections on YOUR unit — configurations vary.
 Practice on the unit until you can find every control by feel. In a noisy ambulance bay or moving aircraft, you can't read labels.
 The exhalation valve drive line is the most-missed connection. Without it, the patient cannot exhale. Verify every POST.
 PEARL — Memorize by feel: Spend ten minutes with eyes closed, locating each control by touch. Pays off the first time you have to silence an alarm at 3 a.m. in a moving truck.</a:t>
@@ -5452,10 +5452,12 @@
           <a:p>
             <a:r>
               <a:rPr lang="en-US" dirty="0"/>
-              <a:t>Display is organized left-to-right. SETTINGS on the left — what you programmed. MONITORED VALUES on the right — what the patient is actually receiving.
-Settings half: Mode (top), Vt, RR, FiO₂, PEEP, I:E, trigger sensitivity. Scan top to bottom on every check.
-Monitored half: PIP, exhaled Vt, total RR (set + spontaneous), exhaled MV, Pplat (when inspiratory hold is pressed), calculated I:E, FiO₂ delivered (if sensor present).
-Divergence between SET Vt and EXHALED Vt is the earliest sign of a leak or compliance change. Don't silence — investigate.
+              <a:t>The LTV does NOT split the screen into a settings half and a monitored half. Each setting lives in its OWN window and you work one at a time: press that control to select it (it brightens, the rest dim), turn the Set Value knob, then confirm.
+Monitored data appears in ONE display window that SCANS — cycling through the measured values one at a time: PIP, MAP, PEEP, f (total rate), Vte (exhaled tidal volume), VE (exhaled minute volume), and I:E. Alarm messages appear in this same window.
+Press Monitor Select once to halt the scan on a value, again to step to the next, or twice quickly to resume scanning.
+Know which numbers you SET and which the vent CALCULATES. You set Inspiratory Time; the vent derives and displays I:E from that and the rate. Trying to dial I:E directly is a common novice error — change Inspiratory Time or the rate instead.
+There is NO continuously monitored plateau pressure on this display. Pplat is obtained with an inspiratory hold maneuver where your unit and configuration support it — confirm the procedure in your operator manual.
+Divergence between SET Vt and EXHALED Vt (Vte) is the earliest sign of a leak or compliance change. Don't silence — investigate.
 PEARL — Set vs Exhaled: Exhaled Vt consistently &lt; set Vt by &gt; 10%? Check ETT cuff, walk the circuit, look at the exhalation valve drive line. Persistent leak = lost PEEP = lost oxygenation.</a:t>
             </a:r>
             <a:endParaRPr lang="en-US" dirty="0"/>
@@ -5731,13 +5733,14 @@
           <a:p>
             <a:r>
               <a:rPr lang="en-US" dirty="0"/>
-              <a:t>Every shift change, every patient. Five steps.
-1. Connect circuit + test lung BEFORE powering on. POST without a circuit is meaningless.
-2. Power on. Watch screen for any RED indicator. POST runs automatically — let it complete.
-3. Verify alarms by triggering them: occlude circuit (high pressure should fire). Disconnect lung (low pressure should fire).
-4. Verify Pplat: press inspiratory hold; confirm reading on display.
-5. Document POST in service equipment log. Pull from service if POST fails.
-EVIDENCE — Why POST: Most field LTV failures are caught during POST. The worst time to find one is mid-transport.</a:t>
+              <a:t>Follow the startup and operational-verification procedure in your operator manual PLUS your agency's documented equipment check. What follows is the SHAPE of that check — it replaces neither document.
+Connect a complete circuit and test lung BEFORE powering on — including the exhalation valve drive line. A checkout without a circuit tests nothing that matters.
+Power on and let the unit finish its self test. Any failure indication means the unit comes out of service — tag it, document it, replace it.
+Answer the patient setup prompt, then load and verify settings appropriate to your patient before connecting them.
+Set alarm limits for THIS patient — especially Low Minute Volume, which commonly sits at a value that will never alarm.
+Verify the gas source at the required pressure, the battery state of charge, and that the display indicates external power when docked.
+Document the check per agency policy.
+EVIDENCE — Why the pre-use check: Most field LTV failures are caught during pre-use checkout — the worst time to find one is mid-transport. The manufacturer's instructions and your agency policy control the exact steps and their order.</a:t>
             </a:r>
             <a:endParaRPr lang="en-US" dirty="0"/>
           </a:p>
@@ -5825,7 +5828,7 @@
           <a:p>
             <a:r>
               <a:rPr lang="en-US" dirty="0"/>
-              <a:t>Safe-change workflow: 1) Verbalize the change BEFORE you turn the dial. 2) Press SELECT to navigate. 3) Rotate CONTROL knob. 4) Press SELECT (or wait 5 sec) to commit. 5) Reassess in 30 sec. 6) Document with vitals before AND after.
+              <a:t>Safe-change workflow: 1) Verbalize the change BEFORE you touch the panel. 2) Press that control's window to SELECT it — it brightens, the rest dim. 3) Turn the Set Value knob. 4) Confirm — press the control again, select another, press Control Lock, or let it time out. 5) Reassess in 30 sec. 6) Document with vitals before AND after.
 Common pitfalls from incident reviews: forgetting to set LOW MV alarm; setting PEEP at the dial but forgetting to attach the PEEP valve; pediatric patient on the adult circuit (dead space &gt; Vt); missing the POWER LOST alarm when the AC plug bumps loose and the unit transfers to internal battery; POST skipped because "the next shift will do it."</a:t>
             </a:r>
             <a:endParaRPr lang="en-US" dirty="0"/>
@@ -32362,7 +32365,7 @@
                 <a:ea typeface="Calibri" pitchFamily="34" charset="-122"/>
                 <a:cs typeface="Calibri" pitchFamily="34" charset="-120"/>
               </a:rPr>
-              <a:t>Every knob, every screen, every alarm — without a patient on it. POST every shift, every patient.</a:t>
+              <a:t>Every control, every screen, every alarm — without a patient on it. Check it every shift, every patient.</a:t>
             </a:r>
             <a:endParaRPr lang="en-US" sz="1600" dirty="0"/>
           </a:p>
@@ -33011,7 +33014,7 @@
                 <a:ea typeface="Calibri" pitchFamily="34" charset="-122"/>
                 <a:cs typeface="Calibri" pitchFamily="34" charset="-120"/>
               </a:rPr>
-              <a:t>POST  </a:t>
+              <a:t>Checkout  </a:t>
             </a:r>
             <a:pPr indent="0" marL="0">
               <a:lnSpc>
@@ -33028,7 +33031,7 @@
                 <a:ea typeface="Calibri" pitchFamily="34" charset="-122"/>
                 <a:cs typeface="Calibri" pitchFamily="34" charset="-120"/>
               </a:rPr>
-              <a:t>Power-On Self-Test</a:t>
+              <a:t>Startup and Pre-Use Checkout</a:t>
             </a:r>
             <a:endParaRPr lang="en-US" sz="1100" dirty="0"/>
           </a:p>
@@ -33536,7 +33539,7 @@
                 <a:ea typeface="Calibri" pitchFamily="34" charset="-122"/>
                 <a:cs typeface="Calibri" pitchFamily="34" charset="-120"/>
               </a:rPr>
-              <a:t>Front panel essentials: Power button (top corner, momentary press). Display (settings on left, monitored on right). Control knob (right of display — scrolls values).</a:t>
+              <a:t>Front panel essentials: On/Standby power.</a:t>
             </a:r>
             <a:endParaRPr lang="en-US" sz="1550" dirty="0"/>
           </a:p>
@@ -33560,7 +33563,7 @@
                 <a:ea typeface="Calibri" pitchFamily="34" charset="-122"/>
                 <a:cs typeface="Calibri" pitchFamily="34" charset="-120"/>
               </a:rPr>
-              <a:t>Side panel: O₂ inlet at 50 PSI (DISS or quick-connect). Patient circuit ports including the easily-missed exhalation valve drive line.</a:t>
+              <a:t>Side/rear connections: O₂ inlet — high-pressure DISS or a low-pressure fitting depending on configuration. Patient circuit ports including the easily-missed exhalation valve drive line.</a:t>
             </a:r>
             <a:endParaRPr lang="en-US" sz="1550" dirty="0"/>
           </a:p>
@@ -34201,13 +34204,13 @@
                 <a:spcPct val="100000"/>
               </a:lnSpc>
               <a:spcAft>
-                <a:spcPts val="1000"/>
+                <a:spcPts val="800"/>
               </a:spcAft>
               <a:buSzPct val="100000"/>
               <a:buChar char="•"/>
             </a:pPr>
             <a:r>
-              <a:rPr lang="en-US" sz="1550" dirty="0">
+              <a:rPr lang="en-US" sz="1450" dirty="0">
                 <a:solidFill>
                   <a:srgbClr val="1B2433"/>
                 </a:solidFill>
@@ -34215,9 +34218,9 @@
                 <a:ea typeface="Calibri" pitchFamily="34" charset="-122"/>
                 <a:cs typeface="Calibri" pitchFamily="34" charset="-120"/>
               </a:rPr>
-              <a:t>Display is organized left-to-right. SETTINGS on the left — what you programmed. MONITORED VALUES on the right — what the patient is actually receiving.</a:t>
-            </a:r>
-            <a:endParaRPr lang="en-US" sz="1550" dirty="0"/>
+              <a:t>The LTV does NOT split the screen into a settings half and a monitored half.</a:t>
+            </a:r>
+            <a:endParaRPr lang="en-US" sz="1450" dirty="0"/>
           </a:p>
           <a:p>
             <a:pPr marL="177800" indent="-177800">
@@ -34225,13 +34228,13 @@
                 <a:spcPct val="100000"/>
               </a:lnSpc>
               <a:spcAft>
-                <a:spcPts val="1000"/>
+                <a:spcPts val="800"/>
               </a:spcAft>
               <a:buSzPct val="100000"/>
               <a:buChar char="•"/>
             </a:pPr>
             <a:r>
-              <a:rPr lang="en-US" sz="1550" dirty="0">
+              <a:rPr lang="en-US" sz="1450" dirty="0">
                 <a:solidFill>
                   <a:srgbClr val="1B2433"/>
                 </a:solidFill>
@@ -34239,9 +34242,9 @@
                 <a:ea typeface="Calibri" pitchFamily="34" charset="-122"/>
                 <a:cs typeface="Calibri" pitchFamily="34" charset="-120"/>
               </a:rPr>
-              <a:t>Settings half: Mode (top), Vt, RR, FiO₂, PEEP, I:E, trigger sensitivity. Scan top to bottom on every check.</a:t>
-            </a:r>
-            <a:endParaRPr lang="en-US" sz="1550" dirty="0"/>
+              <a:t>Monitored data appears in ONE display window that SCANS — cycling through the measured values one at a time: PIP, MAP, PEEP, f (total rate), Vte (exhaled tidal volume), VE (exhaled minute volume), and I:E.</a:t>
+            </a:r>
+            <a:endParaRPr lang="en-US" sz="1450" dirty="0"/>
           </a:p>
           <a:p>
             <a:pPr marL="177800" indent="-177800">
@@ -34249,13 +34252,13 @@
                 <a:spcPct val="100000"/>
               </a:lnSpc>
               <a:spcAft>
-                <a:spcPts val="1000"/>
+                <a:spcPts val="800"/>
               </a:spcAft>
               <a:buSzPct val="100000"/>
               <a:buChar char="•"/>
             </a:pPr>
             <a:r>
-              <a:rPr lang="en-US" sz="1550" dirty="0">
+              <a:rPr lang="en-US" sz="1450" dirty="0">
                 <a:solidFill>
                   <a:srgbClr val="1B2433"/>
                 </a:solidFill>
@@ -34263,9 +34266,9 @@
                 <a:ea typeface="Calibri" pitchFamily="34" charset="-122"/>
                 <a:cs typeface="Calibri" pitchFamily="34" charset="-120"/>
               </a:rPr>
-              <a:t>Monitored half: PIP, exhaled Vt, total RR (set + spontaneous), exhaled MV, Pplat (when inspiratory hold is pressed), calculated I:E, FiO₂ delivered (if sensor present).</a:t>
-            </a:r>
-            <a:endParaRPr lang="en-US" sz="1550" dirty="0"/>
+              <a:t>Press Monitor Select once to halt the scan on a value, again to step to the next, or twice quickly to resume scanning.</a:t>
+            </a:r>
+            <a:endParaRPr lang="en-US" sz="1450" dirty="0"/>
           </a:p>
           <a:p>
             <a:pPr marL="177800" indent="-177800">
@@ -34273,13 +34276,13 @@
                 <a:spcPct val="100000"/>
               </a:lnSpc>
               <a:spcAft>
-                <a:spcPts val="1000"/>
+                <a:spcPts val="800"/>
               </a:spcAft>
               <a:buSzPct val="100000"/>
               <a:buChar char="•"/>
             </a:pPr>
             <a:r>
-              <a:rPr lang="en-US" sz="1550" dirty="0">
+              <a:rPr lang="en-US" sz="1450" dirty="0">
                 <a:solidFill>
                   <a:srgbClr val="1B2433"/>
                 </a:solidFill>
@@ -34287,9 +34290,33 @@
                 <a:ea typeface="Calibri" pitchFamily="34" charset="-122"/>
                 <a:cs typeface="Calibri" pitchFamily="34" charset="-120"/>
               </a:rPr>
-              <a:t>Divergence between SET Vt and EXHALED Vt is the earliest sign of a leak or compliance change. Don't silence — investigate.</a:t>
-            </a:r>
-            <a:endParaRPr lang="en-US" sz="1550" dirty="0"/>
+              <a:t>Know which numbers you SET and which the vent CALCULATES. You set Inspiratory Time; the vent derives and displays I:E from that and the rate.</a:t>
+            </a:r>
+            <a:endParaRPr lang="en-US" sz="1450" dirty="0"/>
+          </a:p>
+          <a:p>
+            <a:pPr marL="177800" indent="-177800">
+              <a:lnSpc>
+                <a:spcPct val="100000"/>
+              </a:lnSpc>
+              <a:spcAft>
+                <a:spcPts val="800"/>
+              </a:spcAft>
+              <a:buSzPct val="100000"/>
+              <a:buChar char="•"/>
+            </a:pPr>
+            <a:r>
+              <a:rPr lang="en-US" sz="1450" dirty="0">
+                <a:solidFill>
+                  <a:srgbClr val="1B2433"/>
+                </a:solidFill>
+                <a:latin typeface="Calibri" pitchFamily="34" charset="0"/>
+                <a:ea typeface="Calibri" pitchFamily="34" charset="-122"/>
+                <a:cs typeface="Calibri" pitchFamily="34" charset="-120"/>
+              </a:rPr>
+              <a:t>There is NO continuously monitored plateau pressure on this display.</a:t>
+            </a:r>
+            <a:endParaRPr lang="en-US" sz="1450" dirty="0"/>
           </a:p>
         </p:txBody>
       </p:sp>
@@ -35223,7 +35250,7 @@
                 <a:ea typeface="Calibri" pitchFamily="34" charset="-122"/>
                 <a:cs typeface="Calibri" pitchFamily="34" charset="-120"/>
               </a:rPr>
-              <a:t>6.5 · POST</a:t>
+              <a:t>6.5 · Checkout</a:t>
             </a:r>
             <a:endParaRPr lang="en-US" sz="1250" dirty="0"/>
           </a:p>
@@ -35265,7 +35292,7 @@
                 <a:ea typeface="Cambria" pitchFamily="34" charset="-122"/>
                 <a:cs typeface="Cambria" pitchFamily="34" charset="-120"/>
               </a:rPr>
-              <a:t>Power-On Self-Test</a:t>
+              <a:t>Startup and Pre-Use Checkout</a:t>
             </a:r>
             <a:endParaRPr lang="en-US" sz="2900" dirty="0"/>
           </a:p>
@@ -35354,7 +35381,7 @@
                 <a:ea typeface="Calibri" pitchFamily="34" charset="-122"/>
                 <a:cs typeface="Calibri" pitchFamily="34" charset="-120"/>
               </a:rPr>
-              <a:t>Every shift change, every patient. Five steps.</a:t>
+              <a:t>Follow the startup and operational-verification procedure in your operator manual PLUS your agency's documented equipment check. What follows is the SHAPE of that check — it replaces neither document.</a:t>
             </a:r>
             <a:endParaRPr lang="en-US" sz="1450" dirty="0"/>
           </a:p>
@@ -35378,7 +35405,7 @@
                 <a:ea typeface="Calibri" pitchFamily="34" charset="-122"/>
                 <a:cs typeface="Calibri" pitchFamily="34" charset="-120"/>
               </a:rPr>
-              <a:t>Connect circuit + test lung BEFORE powering on. POST without a circuit is meaningless.</a:t>
+              <a:t>Connect a complete circuit and test lung BEFORE powering on — including the exhalation valve drive line. A checkout without a circuit tests nothing that matters.</a:t>
             </a:r>
             <a:endParaRPr lang="en-US" sz="1450" dirty="0"/>
           </a:p>
@@ -35402,7 +35429,7 @@
                 <a:ea typeface="Calibri" pitchFamily="34" charset="-122"/>
                 <a:cs typeface="Calibri" pitchFamily="34" charset="-120"/>
               </a:rPr>
-              <a:t>Power on. Watch screen for any RED indicator. POST runs automatically — let it complete.</a:t>
+              <a:t>Power on and let the unit finish its self test. Any failure indication means the unit comes out of service — tag it, document it, replace it.</a:t>
             </a:r>
             <a:endParaRPr lang="en-US" sz="1450" dirty="0"/>
           </a:p>
@@ -35426,7 +35453,7 @@
                 <a:ea typeface="Calibri" pitchFamily="34" charset="-122"/>
                 <a:cs typeface="Calibri" pitchFamily="34" charset="-120"/>
               </a:rPr>
-              <a:t>Verify alarms by triggering them: occlude circuit (high pressure should fire). Disconnect lung (low pressure should fire).</a:t>
+              <a:t>Answer the patient setup prompt, then load and verify settings appropriate to your patient before connecting them.</a:t>
             </a:r>
             <a:endParaRPr lang="en-US" sz="1450" dirty="0"/>
           </a:p>
@@ -35450,7 +35477,7 @@
                 <a:ea typeface="Calibri" pitchFamily="34" charset="-122"/>
                 <a:cs typeface="Calibri" pitchFamily="34" charset="-120"/>
               </a:rPr>
-              <a:t>Verify Pplat: press inspiratory hold; confirm reading on display.</a:t>
+              <a:t>Set alarm limits for THIS patient — especially Low Minute Volume, which commonly sits at a value that will never alarm.</a:t>
             </a:r>
             <a:endParaRPr lang="en-US" sz="1450" dirty="0"/>
           </a:p>
@@ -35553,7 +35580,7 @@
                 <a:ea typeface="Cambria" pitchFamily="34" charset="-122"/>
                 <a:cs typeface="Cambria" pitchFamily="34" charset="-120"/>
               </a:rPr>
-              <a:t>Why POST</a:t>
+              <a:t>Why the pre-use check</a:t>
             </a:r>
             <a:endParaRPr lang="en-US" sz="1700" dirty="0"/>
           </a:p>
@@ -35595,7 +35622,7 @@
                 <a:ea typeface="Calibri" pitchFamily="34" charset="-122"/>
                 <a:cs typeface="Calibri" pitchFamily="34" charset="-120"/>
               </a:rPr>
-              <a:t>Most field LTV failures are caught during POST. The worst time to find one is mid-transport.</a:t>
+              <a:t>Most field LTV failures are caught during pre-use checkout — the worst time to find one is mid-transport. The manufacturer's instructions and your agency policy control the exact steps and their order.</a:t>
             </a:r>
             <a:endParaRPr lang="en-US" sz="1350" dirty="0"/>
           </a:p>
@@ -35790,7 +35817,7 @@
                 <a:ea typeface="Calibri" pitchFamily="34" charset="-122"/>
                 <a:cs typeface="Calibri" pitchFamily="34" charset="-120"/>
               </a:rPr>
-              <a:t>Safe-change workflow: 1) Verbalize the change BEFORE you turn the dial. 2) Press SELECT to navigate. 3) Rotate CONTROL knob. 4) Press SELECT (or wait 5 sec) to commit. 5) Reassess in 30 sec.</a:t>
+              <a:t>Safe-change workflow: 1) Verbalize the change BEFORE you touch the panel. 2) Press that control's window to SELECT it — it brightens, the rest dim. 3) Turn the Set Value knob.</a:t>
             </a:r>
             <a:endParaRPr lang="en-US" sz="1550" dirty="0"/>
           </a:p>

--- a/vta/slides/Ventilator_Academy_Full_Course.pptx
+++ b/vta/slides/Ventilator_Academy_Full_Course.pptx
@@ -10140,151 +10140,30 @@
           </a:p>
         </p:txBody>
       </p:sp>
-      <p:sp>
-        <p:nvSpPr>
-          <p:cNvPr id="6" name="Shape 4"/>
-          <p:cNvSpPr/>
-          <p:nvPr/>
-        </p:nvSpPr>
-        <p:spPr>
-          <a:xfrm>
-            <a:off x="7315200" y="2148840"/>
-            <a:ext cx="4325112" cy="3840480"/>
-          </a:xfrm>
-          <a:prstGeom prst="roundRect">
-            <a:avLst>
-              <a:gd name="adj" fmla="val 2381"/>
-            </a:avLst>
-          </a:prstGeom>
-          <a:solidFill>
-            <a:srgbClr val="FBEFDD"/>
-          </a:solidFill>
-          <a:ln/>
-        </p:spPr>
-      </p:sp>
-      <p:sp>
-        <p:nvSpPr>
-          <p:cNvPr id="7" name="Text 5"/>
-          <p:cNvSpPr/>
-          <p:nvPr/>
-        </p:nvSpPr>
-        <p:spPr>
-          <a:xfrm>
-            <a:off x="7589520" y="2377440"/>
-            <a:ext cx="3776472" cy="320040"/>
-          </a:xfrm>
-          <a:prstGeom prst="rect">
-            <a:avLst/>
-          </a:prstGeom>
-          <a:noFill/>
-          <a:ln/>
-        </p:spPr>
-        <p:txBody>
-          <a:bodyPr wrap="square" rtlCol="0" anchor="ctr"/>
-          <a:lstStyle/>
-          <a:p>
-            <a:pPr indent="0" marL="0">
-              <a:buNone/>
-            </a:pPr>
-            <a:r>
-              <a:rPr lang="en-US" sz="1200" b="1" spc="200" kern="0" dirty="0">
-                <a:solidFill>
-                  <a:srgbClr val="9C540B"/>
-                </a:solidFill>
-                <a:latin typeface="Calibri" pitchFamily="34" charset="0"/>
-                <a:ea typeface="Calibri" pitchFamily="34" charset="-122"/>
-                <a:cs typeface="Calibri" pitchFamily="34" charset="-120"/>
-              </a:rPr>
-              <a:t>CLINICAL PEARL</a:t>
-            </a:r>
-            <a:endParaRPr lang="en-US" sz="1200" dirty="0"/>
-          </a:p>
-        </p:txBody>
-      </p:sp>
-      <p:sp>
-        <p:nvSpPr>
-          <p:cNvPr id="8" name="Text 6"/>
-          <p:cNvSpPr/>
-          <p:nvPr/>
-        </p:nvSpPr>
-        <p:spPr>
-          <a:xfrm>
-            <a:off x="7589520" y="2715768"/>
-            <a:ext cx="3776472" cy="640080"/>
-          </a:xfrm>
-          <a:prstGeom prst="rect">
-            <a:avLst/>
-          </a:prstGeom>
-          <a:noFill/>
-          <a:ln/>
-        </p:spPr>
-        <p:txBody>
-          <a:bodyPr wrap="square" rtlCol="0" anchor="t"/>
-          <a:lstStyle/>
-          <a:p>
-            <a:pPr indent="0" marL="0">
-              <a:lnSpc>
-                <a:spcPct val="95000"/>
-              </a:lnSpc>
-              <a:buNone/>
-            </a:pPr>
-            <a:r>
-              <a:rPr lang="en-US" sz="1700" b="1" dirty="0">
-                <a:solidFill>
-                  <a:srgbClr val="173A68"/>
-                </a:solidFill>
-                <a:latin typeface="Cambria" pitchFamily="34" charset="0"/>
-                <a:ea typeface="Cambria" pitchFamily="34" charset="-122"/>
-                <a:cs typeface="Cambria" pitchFamily="34" charset="-120"/>
-              </a:rPr>
-              <a:t>PIP up, Pplat up?</a:t>
-            </a:r>
-            <a:endParaRPr lang="en-US" sz="1700" dirty="0"/>
-          </a:p>
-        </p:txBody>
-      </p:sp>
-      <p:sp>
-        <p:nvSpPr>
-          <p:cNvPr id="9" name="Text 7"/>
-          <p:cNvSpPr/>
-          <p:nvPr/>
-        </p:nvSpPr>
-        <p:spPr>
-          <a:xfrm>
-            <a:off x="7589520" y="3474720"/>
-            <a:ext cx="3776472" cy="2286000"/>
-          </a:xfrm>
-          <a:prstGeom prst="rect">
-            <a:avLst/>
-          </a:prstGeom>
-          <a:noFill/>
-          <a:ln/>
-        </p:spPr>
-        <p:txBody>
-          <a:bodyPr wrap="square" rtlCol="0" anchor="t"/>
-          <a:lstStyle/>
-          <a:p>
-            <a:pPr indent="0" marL="0">
-              <a:lnSpc>
-                <a:spcPct val="103000"/>
-              </a:lnSpc>
-              <a:buNone/>
-            </a:pPr>
-            <a:r>
-              <a:rPr lang="en-US" sz="1350" dirty="0">
-                <a:solidFill>
-                  <a:srgbClr val="1B2433"/>
-                </a:solidFill>
-                <a:latin typeface="Calibri" pitchFamily="34" charset="0"/>
-                <a:ea typeface="Calibri" pitchFamily="34" charset="-122"/>
-                <a:cs typeface="Calibri" pitchFamily="34" charset="-120"/>
-              </a:rPr>
-              <a:t>Both up = lung problem. PIP up but Pplat normal = airway problem. The bedside test takes 3 seconds — press the inspiratory hold button.</a:t>
-            </a:r>
-            <a:endParaRPr lang="en-US" sz="1350" dirty="0"/>
-          </a:p>
-        </p:txBody>
-      </p:sp>
+      <p:pic>
+        <p:nvPicPr>
+          <p:cNvPr id="6" name="Image 0" descr="/tmp/claude-0/-home-user-amr-kc-protocols/883711fe-5eaa-500f-ae13-4d63d2ddcc7e/scratchpad/pngs/pip_pplat.png">    </p:cNvPr>
+          <p:cNvPicPr>
+            <a:picLocks noChangeAspect="1"/>
+          </p:cNvPicPr>
+          <p:nvPr/>
+        </p:nvPicPr>
+        <p:blipFill>
+          <a:blip r:embed="rId1"/>
+          <a:stretch>
+            <a:fillRect/>
+          </a:stretch>
+        </p:blipFill>
+        <p:spPr>
+          <a:xfrm>
+            <a:off x="7040880" y="2634454"/>
+            <a:ext cx="4709160" cy="2320612"/>
+          </a:xfrm>
+          <a:prstGeom prst="rect">
+            <a:avLst/>
+          </a:prstGeom>
+        </p:spPr>
+      </p:pic>
     </p:spTree>
   </p:cSld>
   <p:clrMapOvr>
@@ -13408,151 +13287,30 @@
           </a:p>
         </p:txBody>
       </p:sp>
-      <p:sp>
-        <p:nvSpPr>
-          <p:cNvPr id="6" name="Shape 4"/>
-          <p:cNvSpPr/>
-          <p:nvPr/>
-        </p:nvSpPr>
-        <p:spPr>
-          <a:xfrm>
-            <a:off x="7315200" y="2148840"/>
-            <a:ext cx="4325112" cy="3840480"/>
-          </a:xfrm>
-          <a:prstGeom prst="roundRect">
-            <a:avLst>
-              <a:gd name="adj" fmla="val 2381"/>
-            </a:avLst>
-          </a:prstGeom>
-          <a:solidFill>
-            <a:srgbClr val="E7F0FD"/>
-          </a:solidFill>
-          <a:ln/>
-        </p:spPr>
-      </p:sp>
-      <p:sp>
-        <p:nvSpPr>
-          <p:cNvPr id="7" name="Text 5"/>
-          <p:cNvSpPr/>
-          <p:nvPr/>
-        </p:nvSpPr>
-        <p:spPr>
-          <a:xfrm>
-            <a:off x="7589520" y="2377440"/>
-            <a:ext cx="3776472" cy="320040"/>
-          </a:xfrm>
-          <a:prstGeom prst="rect">
-            <a:avLst/>
-          </a:prstGeom>
-          <a:noFill/>
-          <a:ln/>
-        </p:spPr>
-        <p:txBody>
-          <a:bodyPr wrap="square" rtlCol="0" anchor="ctr"/>
-          <a:lstStyle/>
-          <a:p>
-            <a:pPr indent="0" marL="0">
-              <a:buNone/>
-            </a:pPr>
-            <a:r>
-              <a:rPr lang="en-US" sz="1200" b="1" spc="200" kern="0" dirty="0">
-                <a:solidFill>
-                  <a:srgbClr val="1B63C4"/>
-                </a:solidFill>
-                <a:latin typeface="Calibri" pitchFamily="34" charset="0"/>
-                <a:ea typeface="Calibri" pitchFamily="34" charset="-122"/>
-                <a:cs typeface="Calibri" pitchFamily="34" charset="-120"/>
-              </a:rPr>
-              <a:t>EVIDENCE</a:t>
-            </a:r>
-            <a:endParaRPr lang="en-US" sz="1200" dirty="0"/>
-          </a:p>
-        </p:txBody>
-      </p:sp>
-      <p:sp>
-        <p:nvSpPr>
-          <p:cNvPr id="8" name="Text 6"/>
-          <p:cNvSpPr/>
-          <p:nvPr/>
-        </p:nvSpPr>
-        <p:spPr>
-          <a:xfrm>
-            <a:off x="7589520" y="2715768"/>
-            <a:ext cx="3776472" cy="640080"/>
-          </a:xfrm>
-          <a:prstGeom prst="rect">
-            <a:avLst/>
-          </a:prstGeom>
-          <a:noFill/>
-          <a:ln/>
-        </p:spPr>
-        <p:txBody>
-          <a:bodyPr wrap="square" rtlCol="0" anchor="t"/>
-          <a:lstStyle/>
-          <a:p>
-            <a:pPr indent="0" marL="0">
-              <a:lnSpc>
-                <a:spcPct val="95000"/>
-              </a:lnSpc>
-              <a:buNone/>
-            </a:pPr>
-            <a:r>
-              <a:rPr lang="en-US" sz="1700" b="1" dirty="0">
-                <a:solidFill>
-                  <a:srgbClr val="173A68"/>
-                </a:solidFill>
-                <a:latin typeface="Cambria" pitchFamily="34" charset="0"/>
-                <a:ea typeface="Cambria" pitchFamily="34" charset="-122"/>
-                <a:cs typeface="Cambria" pitchFamily="34" charset="-120"/>
-              </a:rPr>
-              <a:t>Hyperoxia after ROSC</a:t>
-            </a:r>
-            <a:endParaRPr lang="en-US" sz="1700" dirty="0"/>
-          </a:p>
-        </p:txBody>
-      </p:sp>
-      <p:sp>
-        <p:nvSpPr>
-          <p:cNvPr id="9" name="Text 7"/>
-          <p:cNvSpPr/>
-          <p:nvPr/>
-        </p:nvSpPr>
-        <p:spPr>
-          <a:xfrm>
-            <a:off x="7589520" y="3474720"/>
-            <a:ext cx="3776472" cy="2286000"/>
-          </a:xfrm>
-          <a:prstGeom prst="rect">
-            <a:avLst/>
-          </a:prstGeom>
-          <a:noFill/>
-          <a:ln/>
-        </p:spPr>
-        <p:txBody>
-          <a:bodyPr wrap="square" rtlCol="0" anchor="t"/>
-          <a:lstStyle/>
-          <a:p>
-            <a:pPr indent="0" marL="0">
-              <a:lnSpc>
-                <a:spcPct val="103000"/>
-              </a:lnSpc>
-              <a:buNone/>
-            </a:pPr>
-            <a:r>
-              <a:rPr lang="en-US" sz="1350" dirty="0">
-                <a:solidFill>
-                  <a:srgbClr val="1B2433"/>
-                </a:solidFill>
-                <a:latin typeface="Calibri" pitchFamily="34" charset="0"/>
-                <a:ea typeface="Calibri" pitchFamily="34" charset="-122"/>
-                <a:cs typeface="Calibri" pitchFamily="34" charset="-120"/>
-              </a:rPr>
-              <a:t>Multiple observational studies show worse neurologic outcomes in cardiac arrest survivors maintained at PaO₂ &gt; 300 mmHg post-arrest. AHA recommends titrating FiO₂ to SpO₂ 90–98% post-ROSC (2025 AHA update; the prior target was 92–98%).</a:t>
-            </a:r>
-            <a:endParaRPr lang="en-US" sz="1350" dirty="0"/>
-          </a:p>
-        </p:txBody>
-      </p:sp>
+      <p:pic>
+        <p:nvPicPr>
+          <p:cNvPr id="6" name="Image 0" descr="/tmp/claude-0/-home-user-amr-kc-protocols/883711fe-5eaa-500f-ae13-4d63d2ddcc7e/scratchpad/pngs/oxyhb.png">    </p:cNvPr>
+          <p:cNvPicPr>
+            <a:picLocks noChangeAspect="1"/>
+          </p:cNvPicPr>
+          <p:nvPr/>
+        </p:nvPicPr>
+        <p:blipFill>
+          <a:blip r:embed="rId1"/>
+          <a:stretch>
+            <a:fillRect/>
+          </a:stretch>
+        </p:blipFill>
+        <p:spPr>
+          <a:xfrm>
+            <a:off x="7040880" y="2559570"/>
+            <a:ext cx="4709160" cy="2470379"/>
+          </a:xfrm>
+          <a:prstGeom prst="rect">
+            <a:avLst/>
+          </a:prstGeom>
+        </p:spPr>
+      </p:pic>
     </p:spTree>
   </p:cSld>
   <p:clrMapOvr>
@@ -16081,151 +15839,30 @@
           </a:p>
         </p:txBody>
       </p:sp>
-      <p:sp>
-        <p:nvSpPr>
-          <p:cNvPr id="6" name="Shape 4"/>
-          <p:cNvSpPr/>
-          <p:nvPr/>
-        </p:nvSpPr>
-        <p:spPr>
-          <a:xfrm>
-            <a:off x="7315200" y="2148840"/>
-            <a:ext cx="4325112" cy="3840480"/>
-          </a:xfrm>
-          <a:prstGeom prst="roundRect">
-            <a:avLst>
-              <a:gd name="adj" fmla="val 2381"/>
-            </a:avLst>
-          </a:prstGeom>
-          <a:solidFill>
-            <a:srgbClr val="FBEFDD"/>
-          </a:solidFill>
-          <a:ln/>
-        </p:spPr>
-      </p:sp>
-      <p:sp>
-        <p:nvSpPr>
-          <p:cNvPr id="7" name="Text 5"/>
-          <p:cNvSpPr/>
-          <p:nvPr/>
-        </p:nvSpPr>
-        <p:spPr>
-          <a:xfrm>
-            <a:off x="7589520" y="2377440"/>
-            <a:ext cx="3776472" cy="320040"/>
-          </a:xfrm>
-          <a:prstGeom prst="rect">
-            <a:avLst/>
-          </a:prstGeom>
-          <a:noFill/>
-          <a:ln/>
-        </p:spPr>
-        <p:txBody>
-          <a:bodyPr wrap="square" rtlCol="0" anchor="ctr"/>
-          <a:lstStyle/>
-          <a:p>
-            <a:pPr indent="0" marL="0">
-              <a:buNone/>
-            </a:pPr>
-            <a:r>
-              <a:rPr lang="en-US" sz="1200" b="1" spc="200" kern="0" dirty="0">
-                <a:solidFill>
-                  <a:srgbClr val="9C540B"/>
-                </a:solidFill>
-                <a:latin typeface="Calibri" pitchFamily="34" charset="0"/>
-                <a:ea typeface="Calibri" pitchFamily="34" charset="-122"/>
-                <a:cs typeface="Calibri" pitchFamily="34" charset="-120"/>
-              </a:rPr>
-              <a:t>CLINICAL PEARL</a:t>
-            </a:r>
-            <a:endParaRPr lang="en-US" sz="1200" dirty="0"/>
-          </a:p>
-        </p:txBody>
-      </p:sp>
-      <p:sp>
-        <p:nvSpPr>
-          <p:cNvPr id="8" name="Text 6"/>
-          <p:cNvSpPr/>
-          <p:nvPr/>
-        </p:nvSpPr>
-        <p:spPr>
-          <a:xfrm>
-            <a:off x="7589520" y="2715768"/>
-            <a:ext cx="3776472" cy="640080"/>
-          </a:xfrm>
-          <a:prstGeom prst="rect">
-            <a:avLst/>
-          </a:prstGeom>
-          <a:noFill/>
-          <a:ln/>
-        </p:spPr>
-        <p:txBody>
-          <a:bodyPr wrap="square" rtlCol="0" anchor="t"/>
-          <a:lstStyle/>
-          <a:p>
-            <a:pPr indent="0" marL="0">
-              <a:lnSpc>
-                <a:spcPct val="95000"/>
-              </a:lnSpc>
-              <a:buNone/>
-            </a:pPr>
-            <a:r>
-              <a:rPr lang="en-US" sz="1700" b="1" dirty="0">
-                <a:solidFill>
-                  <a:srgbClr val="173A68"/>
-                </a:solidFill>
-                <a:latin typeface="Cambria" pitchFamily="34" charset="0"/>
-                <a:ea typeface="Cambria" pitchFamily="34" charset="-122"/>
-                <a:cs typeface="Cambria" pitchFamily="34" charset="-120"/>
-              </a:rPr>
-              <a:t>Shark fin = bronchospasm</a:t>
-            </a:r>
-            <a:endParaRPr lang="en-US" sz="1700" dirty="0"/>
-          </a:p>
-        </p:txBody>
-      </p:sp>
-      <p:sp>
-        <p:nvSpPr>
-          <p:cNvPr id="9" name="Text 7"/>
-          <p:cNvSpPr/>
-          <p:nvPr/>
-        </p:nvSpPr>
-        <p:spPr>
-          <a:xfrm>
-            <a:off x="7589520" y="3474720"/>
-            <a:ext cx="3776472" cy="2286000"/>
-          </a:xfrm>
-          <a:prstGeom prst="rect">
-            <a:avLst/>
-          </a:prstGeom>
-          <a:noFill/>
-          <a:ln/>
-        </p:spPr>
-        <p:txBody>
-          <a:bodyPr wrap="square" rtlCol="0" anchor="t"/>
-          <a:lstStyle/>
-          <a:p>
-            <a:pPr indent="0" marL="0">
-              <a:lnSpc>
-                <a:spcPct val="103000"/>
-              </a:lnSpc>
-              <a:buNone/>
-            </a:pPr>
-            <a:r>
-              <a:rPr lang="en-US" sz="1350" dirty="0">
-                <a:solidFill>
-                  <a:srgbClr val="1B2433"/>
-                </a:solidFill>
-                <a:latin typeface="Calibri" pitchFamily="34" charset="0"/>
-                <a:ea typeface="Calibri" pitchFamily="34" charset="-122"/>
-                <a:cs typeface="Calibri" pitchFamily="34" charset="-120"/>
-              </a:rPr>
-              <a:t>If a vented patient's waveform turns shark-fin, treat the obstruction (bronchodilator, extended exhalation time). Don't chase the EtCO₂ number.</a:t>
-            </a:r>
-            <a:endParaRPr lang="en-US" sz="1350" dirty="0"/>
-          </a:p>
-        </p:txBody>
-      </p:sp>
+      <p:pic>
+        <p:nvPicPr>
+          <p:cNvPr id="6" name="Image 0" descr="/tmp/claude-0/-home-user-amr-kc-protocols/883711fe-5eaa-500f-ae13-4d63d2ddcc7e/scratchpad/pngs/capno.png">    </p:cNvPr>
+          <p:cNvPicPr>
+            <a:picLocks noChangeAspect="1"/>
+          </p:cNvPicPr>
+          <p:nvPr/>
+        </p:nvPicPr>
+        <p:blipFill>
+          <a:blip r:embed="rId1"/>
+          <a:stretch>
+            <a:fillRect/>
+          </a:stretch>
+        </p:blipFill>
+        <p:spPr>
+          <a:xfrm>
+            <a:off x="7040880" y="2814328"/>
+            <a:ext cx="4709160" cy="1960863"/>
+          </a:xfrm>
+          <a:prstGeom prst="rect">
+            <a:avLst/>
+          </a:prstGeom>
+        </p:spPr>
+      </p:pic>
     </p:spTree>
   </p:cSld>
   <p:clrMapOvr>
@@ -25805,151 +25442,30 @@
           </a:p>
         </p:txBody>
       </p:sp>
-      <p:sp>
-        <p:nvSpPr>
-          <p:cNvPr id="6" name="Shape 4"/>
-          <p:cNvSpPr/>
-          <p:nvPr/>
-        </p:nvSpPr>
-        <p:spPr>
-          <a:xfrm>
-            <a:off x="7315200" y="2148840"/>
-            <a:ext cx="4325112" cy="3840480"/>
-          </a:xfrm>
-          <a:prstGeom prst="roundRect">
-            <a:avLst>
-              <a:gd name="adj" fmla="val 2381"/>
-            </a:avLst>
-          </a:prstGeom>
-          <a:solidFill>
-            <a:srgbClr val="E7F0FD"/>
-          </a:solidFill>
-          <a:ln/>
-        </p:spPr>
-      </p:sp>
-      <p:sp>
-        <p:nvSpPr>
-          <p:cNvPr id="7" name="Text 5"/>
-          <p:cNvSpPr/>
-          <p:nvPr/>
-        </p:nvSpPr>
-        <p:spPr>
-          <a:xfrm>
-            <a:off x="7589520" y="2377440"/>
-            <a:ext cx="3776472" cy="320040"/>
-          </a:xfrm>
-          <a:prstGeom prst="rect">
-            <a:avLst/>
-          </a:prstGeom>
-          <a:noFill/>
-          <a:ln/>
-        </p:spPr>
-        <p:txBody>
-          <a:bodyPr wrap="square" rtlCol="0" anchor="ctr"/>
-          <a:lstStyle/>
-          <a:p>
-            <a:pPr indent="0" marL="0">
-              <a:buNone/>
-            </a:pPr>
-            <a:r>
-              <a:rPr lang="en-US" sz="1200" b="1" spc="200" kern="0" dirty="0">
-                <a:solidFill>
-                  <a:srgbClr val="1B63C4"/>
-                </a:solidFill>
-                <a:latin typeface="Calibri" pitchFamily="34" charset="0"/>
-                <a:ea typeface="Calibri" pitchFamily="34" charset="-122"/>
-                <a:cs typeface="Calibri" pitchFamily="34" charset="-120"/>
-              </a:rPr>
-              <a:t>EVIDENCE</a:t>
-            </a:r>
-            <a:endParaRPr lang="en-US" sz="1200" dirty="0"/>
-          </a:p>
-        </p:txBody>
-      </p:sp>
-      <p:sp>
-        <p:nvSpPr>
-          <p:cNvPr id="8" name="Text 6"/>
-          <p:cNvSpPr/>
-          <p:nvPr/>
-        </p:nvSpPr>
-        <p:spPr>
-          <a:xfrm>
-            <a:off x="7589520" y="2715768"/>
-            <a:ext cx="3776472" cy="640080"/>
-          </a:xfrm>
-          <a:prstGeom prst="rect">
-            <a:avLst/>
-          </a:prstGeom>
-          <a:noFill/>
-          <a:ln/>
-        </p:spPr>
-        <p:txBody>
-          <a:bodyPr wrap="square" rtlCol="0" anchor="t"/>
-          <a:lstStyle/>
-          <a:p>
-            <a:pPr indent="0" marL="0">
-              <a:lnSpc>
-                <a:spcPct val="95000"/>
-              </a:lnSpc>
-              <a:buNone/>
-            </a:pPr>
-            <a:r>
-              <a:rPr lang="en-US" sz="1700" b="1" dirty="0">
-                <a:solidFill>
-                  <a:srgbClr val="173A68"/>
-                </a:solidFill>
-                <a:latin typeface="Cambria" pitchFamily="34" charset="0"/>
-                <a:ea typeface="Cambria" pitchFamily="34" charset="-122"/>
-                <a:cs typeface="Cambria" pitchFamily="34" charset="-120"/>
-              </a:rPr>
-              <a:t>Amato 2015 driving pressure</a:t>
-            </a:r>
-            <a:endParaRPr lang="en-US" sz="1700" dirty="0"/>
-          </a:p>
-        </p:txBody>
-      </p:sp>
-      <p:sp>
-        <p:nvSpPr>
-          <p:cNvPr id="9" name="Text 7"/>
-          <p:cNvSpPr/>
-          <p:nvPr/>
-        </p:nvSpPr>
-        <p:spPr>
-          <a:xfrm>
-            <a:off x="7589520" y="3474720"/>
-            <a:ext cx="3776472" cy="2286000"/>
-          </a:xfrm>
-          <a:prstGeom prst="rect">
-            <a:avLst/>
-          </a:prstGeom>
-          <a:noFill/>
-          <a:ln/>
-        </p:spPr>
-        <p:txBody>
-          <a:bodyPr wrap="square" rtlCol="0" anchor="t"/>
-          <a:lstStyle/>
-          <a:p>
-            <a:pPr indent="0" marL="0">
-              <a:lnSpc>
-                <a:spcPct val="103000"/>
-              </a:lnSpc>
-              <a:buNone/>
-            </a:pPr>
-            <a:r>
-              <a:rPr lang="en-US" sz="1350" dirty="0">
-                <a:solidFill>
-                  <a:srgbClr val="1B2433"/>
-                </a:solidFill>
-                <a:latin typeface="Calibri" pitchFamily="34" charset="0"/>
-                <a:ea typeface="Calibri" pitchFamily="34" charset="-122"/>
-                <a:cs typeface="Calibri" pitchFamily="34" charset="-120"/>
-              </a:rPr>
-              <a:t>Pplat − PEEP &lt; 14 cmH₂O is the modern ARDS target. Stronger mortality predictor than Vt, Pplat, or PEEP individually.</a:t>
-            </a:r>
-            <a:endParaRPr lang="en-US" sz="1350" dirty="0"/>
-          </a:p>
-        </p:txBody>
-      </p:sp>
+      <p:pic>
+        <p:nvPicPr>
+          <p:cNvPr id="6" name="Image 0" descr="/tmp/claude-0/-home-user-amr-kc-protocols/883711fe-5eaa-500f-ae13-4d63d2ddcc7e/scratchpad/pngs/pip_pplat.png">    </p:cNvPr>
+          <p:cNvPicPr>
+            <a:picLocks noChangeAspect="1"/>
+          </p:cNvPicPr>
+          <p:nvPr/>
+        </p:nvPicPr>
+        <p:blipFill>
+          <a:blip r:embed="rId1"/>
+          <a:stretch>
+            <a:fillRect/>
+          </a:stretch>
+        </p:blipFill>
+        <p:spPr>
+          <a:xfrm>
+            <a:off x="7040880" y="2634454"/>
+            <a:ext cx="4709160" cy="2320612"/>
+          </a:xfrm>
+          <a:prstGeom prst="rect">
+            <a:avLst/>
+          </a:prstGeom>
+        </p:spPr>
+      </p:pic>
     </p:spTree>
   </p:cSld>
   <p:clrMapOvr>
@@ -28862,7 +28378,7 @@
         <p:spPr>
           <a:xfrm>
             <a:off x="548640" y="2148840"/>
-            <a:ext cx="10058400" cy="4160520"/>
+            <a:ext cx="6309360" cy="4160520"/>
           </a:xfrm>
           <a:prstGeom prst="rect">
             <a:avLst/>
@@ -28971,6 +28487,30 @@
           </a:p>
         </p:txBody>
       </p:sp>
+      <p:pic>
+        <p:nvPicPr>
+          <p:cNvPr id="6" name="Image 0" descr="/tmp/claude-0/-home-user-amr-kc-protocols/883711fe-5eaa-500f-ae13-4d63d2ddcc7e/scratchpad/pngs/volpress.png">    </p:cNvPr>
+          <p:cNvPicPr>
+            <a:picLocks noChangeAspect="1"/>
+          </p:cNvPicPr>
+          <p:nvPr/>
+        </p:nvPicPr>
+        <p:blipFill>
+          <a:blip r:embed="rId1"/>
+          <a:stretch>
+            <a:fillRect/>
+          </a:stretch>
+        </p:blipFill>
+        <p:spPr>
+          <a:xfrm>
+            <a:off x="7040880" y="2822048"/>
+            <a:ext cx="4709160" cy="1945423"/>
+          </a:xfrm>
+          <a:prstGeom prst="rect">
+            <a:avLst/>
+          </a:prstGeom>
+        </p:spPr>
+      </p:pic>
     </p:spTree>
   </p:cSld>
   <p:clrMapOvr>
@@ -33617,151 +33157,30 @@
           </a:p>
         </p:txBody>
       </p:sp>
-      <p:sp>
-        <p:nvSpPr>
-          <p:cNvPr id="6" name="Shape 4"/>
-          <p:cNvSpPr/>
-          <p:nvPr/>
-        </p:nvSpPr>
-        <p:spPr>
-          <a:xfrm>
-            <a:off x="7315200" y="2148840"/>
-            <a:ext cx="4325112" cy="3840480"/>
-          </a:xfrm>
-          <a:prstGeom prst="roundRect">
-            <a:avLst>
-              <a:gd name="adj" fmla="val 2381"/>
-            </a:avLst>
-          </a:prstGeom>
-          <a:solidFill>
-            <a:srgbClr val="FBEFDD"/>
-          </a:solidFill>
-          <a:ln/>
-        </p:spPr>
-      </p:sp>
-      <p:sp>
-        <p:nvSpPr>
-          <p:cNvPr id="7" name="Text 5"/>
-          <p:cNvSpPr/>
-          <p:nvPr/>
-        </p:nvSpPr>
-        <p:spPr>
-          <a:xfrm>
-            <a:off x="7589520" y="2377440"/>
-            <a:ext cx="3776472" cy="320040"/>
-          </a:xfrm>
-          <a:prstGeom prst="rect">
-            <a:avLst/>
-          </a:prstGeom>
-          <a:noFill/>
-          <a:ln/>
-        </p:spPr>
-        <p:txBody>
-          <a:bodyPr wrap="square" rtlCol="0" anchor="ctr"/>
-          <a:lstStyle/>
-          <a:p>
-            <a:pPr indent="0" marL="0">
-              <a:buNone/>
-            </a:pPr>
-            <a:r>
-              <a:rPr lang="en-US" sz="1200" b="1" spc="200" kern="0" dirty="0">
-                <a:solidFill>
-                  <a:srgbClr val="9C540B"/>
-                </a:solidFill>
-                <a:latin typeface="Calibri" pitchFamily="34" charset="0"/>
-                <a:ea typeface="Calibri" pitchFamily="34" charset="-122"/>
-                <a:cs typeface="Calibri" pitchFamily="34" charset="-120"/>
-              </a:rPr>
-              <a:t>CLINICAL PEARL</a:t>
-            </a:r>
-            <a:endParaRPr lang="en-US" sz="1200" dirty="0"/>
-          </a:p>
-        </p:txBody>
-      </p:sp>
-      <p:sp>
-        <p:nvSpPr>
-          <p:cNvPr id="8" name="Text 6"/>
-          <p:cNvSpPr/>
-          <p:nvPr/>
-        </p:nvSpPr>
-        <p:spPr>
-          <a:xfrm>
-            <a:off x="7589520" y="2715768"/>
-            <a:ext cx="3776472" cy="640080"/>
-          </a:xfrm>
-          <a:prstGeom prst="rect">
-            <a:avLst/>
-          </a:prstGeom>
-          <a:noFill/>
-          <a:ln/>
-        </p:spPr>
-        <p:txBody>
-          <a:bodyPr wrap="square" rtlCol="0" anchor="t"/>
-          <a:lstStyle/>
-          <a:p>
-            <a:pPr indent="0" marL="0">
-              <a:lnSpc>
-                <a:spcPct val="95000"/>
-              </a:lnSpc>
-              <a:buNone/>
-            </a:pPr>
-            <a:r>
-              <a:rPr lang="en-US" sz="1700" b="1" dirty="0">
-                <a:solidFill>
-                  <a:srgbClr val="173A68"/>
-                </a:solidFill>
-                <a:latin typeface="Cambria" pitchFamily="34" charset="0"/>
-                <a:ea typeface="Cambria" pitchFamily="34" charset="-122"/>
-                <a:cs typeface="Cambria" pitchFamily="34" charset="-120"/>
-              </a:rPr>
-              <a:t>Memorize by feel</a:t>
-            </a:r>
-            <a:endParaRPr lang="en-US" sz="1700" dirty="0"/>
-          </a:p>
-        </p:txBody>
-      </p:sp>
-      <p:sp>
-        <p:nvSpPr>
-          <p:cNvPr id="9" name="Text 7"/>
-          <p:cNvSpPr/>
-          <p:nvPr/>
-        </p:nvSpPr>
-        <p:spPr>
-          <a:xfrm>
-            <a:off x="7589520" y="3474720"/>
-            <a:ext cx="3776472" cy="2286000"/>
-          </a:xfrm>
-          <a:prstGeom prst="rect">
-            <a:avLst/>
-          </a:prstGeom>
-          <a:noFill/>
-          <a:ln/>
-        </p:spPr>
-        <p:txBody>
-          <a:bodyPr wrap="square" rtlCol="0" anchor="t"/>
-          <a:lstStyle/>
-          <a:p>
-            <a:pPr indent="0" marL="0">
-              <a:lnSpc>
-                <a:spcPct val="103000"/>
-              </a:lnSpc>
-              <a:buNone/>
-            </a:pPr>
-            <a:r>
-              <a:rPr lang="en-US" sz="1350" dirty="0">
-                <a:solidFill>
-                  <a:srgbClr val="1B2433"/>
-                </a:solidFill>
-                <a:latin typeface="Calibri" pitchFamily="34" charset="0"/>
-                <a:ea typeface="Calibri" pitchFamily="34" charset="-122"/>
-                <a:cs typeface="Calibri" pitchFamily="34" charset="-120"/>
-              </a:rPr>
-              <a:t>Spend ten minutes with eyes closed, locating each control by touch. Pays off the first time you have to silence an alarm at 3 a.m. in a moving truck.</a:t>
-            </a:r>
-            <a:endParaRPr lang="en-US" sz="1350" dirty="0"/>
-          </a:p>
-        </p:txBody>
-      </p:sp>
+      <p:pic>
+        <p:nvPicPr>
+          <p:cNvPr id="6" name="Image 0" descr="/tmp/claude-0/-home-user-amr-kc-protocols/883711fe-5eaa-500f-ae13-4d63d2ddcc7e/scratchpad/pngs/ltv_panel.jpg">    </p:cNvPr>
+          <p:cNvPicPr>
+            <a:picLocks noChangeAspect="1"/>
+          </p:cNvPicPr>
+          <p:nvPr/>
+        </p:nvPicPr>
+        <p:blipFill>
+          <a:blip r:embed="rId1"/>
+          <a:stretch>
+            <a:fillRect/>
+          </a:stretch>
+        </p:blipFill>
+        <p:spPr>
+          <a:xfrm>
+            <a:off x="8446494" y="1965960"/>
+            <a:ext cx="2217972" cy="4389120"/>
+          </a:xfrm>
+          <a:prstGeom prst="rect">
+            <a:avLst/>
+          </a:prstGeom>
+        </p:spPr>
+      </p:pic>
     </p:spTree>
   </p:cSld>
   <p:clrMapOvr>
@@ -38558,151 +37977,30 @@
           </a:p>
         </p:txBody>
       </p:sp>
-      <p:sp>
-        <p:nvSpPr>
-          <p:cNvPr id="6" name="Shape 4"/>
-          <p:cNvSpPr/>
-          <p:nvPr/>
-        </p:nvSpPr>
-        <p:spPr>
-          <a:xfrm>
-            <a:off x="7315200" y="2148840"/>
-            <a:ext cx="4325112" cy="3840480"/>
-          </a:xfrm>
-          <a:prstGeom prst="roundRect">
-            <a:avLst>
-              <a:gd name="adj" fmla="val 2381"/>
-            </a:avLst>
-          </a:prstGeom>
-          <a:solidFill>
-            <a:srgbClr val="FBEFDD"/>
-          </a:solidFill>
-          <a:ln/>
-        </p:spPr>
-      </p:sp>
-      <p:sp>
-        <p:nvSpPr>
-          <p:cNvPr id="7" name="Text 5"/>
-          <p:cNvSpPr/>
-          <p:nvPr/>
-        </p:nvSpPr>
-        <p:spPr>
-          <a:xfrm>
-            <a:off x="7589520" y="2377440"/>
-            <a:ext cx="3776472" cy="320040"/>
-          </a:xfrm>
-          <a:prstGeom prst="rect">
-            <a:avLst/>
-          </a:prstGeom>
-          <a:noFill/>
-          <a:ln/>
-        </p:spPr>
-        <p:txBody>
-          <a:bodyPr wrap="square" rtlCol="0" anchor="ctr"/>
-          <a:lstStyle/>
-          <a:p>
-            <a:pPr indent="0" marL="0">
-              <a:buNone/>
-            </a:pPr>
-            <a:r>
-              <a:rPr lang="en-US" sz="1200" b="1" spc="200" kern="0" dirty="0">
-                <a:solidFill>
-                  <a:srgbClr val="9C540B"/>
-                </a:solidFill>
-                <a:latin typeface="Calibri" pitchFamily="34" charset="0"/>
-                <a:ea typeface="Calibri" pitchFamily="34" charset="-122"/>
-                <a:cs typeface="Calibri" pitchFamily="34" charset="-120"/>
-              </a:rPr>
-              <a:t>CLINICAL PEARL</a:t>
-            </a:r>
-            <a:endParaRPr lang="en-US" sz="1200" dirty="0"/>
-          </a:p>
-        </p:txBody>
-      </p:sp>
-      <p:sp>
-        <p:nvSpPr>
-          <p:cNvPr id="8" name="Text 6"/>
-          <p:cNvSpPr/>
-          <p:nvPr/>
-        </p:nvSpPr>
-        <p:spPr>
-          <a:xfrm>
-            <a:off x="7589520" y="2715768"/>
-            <a:ext cx="3776472" cy="640080"/>
-          </a:xfrm>
-          <a:prstGeom prst="rect">
-            <a:avLst/>
-          </a:prstGeom>
-          <a:noFill/>
-          <a:ln/>
-        </p:spPr>
-        <p:txBody>
-          <a:bodyPr wrap="square" rtlCol="0" anchor="t"/>
-          <a:lstStyle/>
-          <a:p>
-            <a:pPr indent="0" marL="0">
-              <a:lnSpc>
-                <a:spcPct val="95000"/>
-              </a:lnSpc>
-              <a:buNone/>
-            </a:pPr>
-            <a:r>
-              <a:rPr lang="en-US" sz="1700" b="1" dirty="0">
-                <a:solidFill>
-                  <a:srgbClr val="173A68"/>
-                </a:solidFill>
-                <a:latin typeface="Cambria" pitchFamily="34" charset="0"/>
-                <a:ea typeface="Cambria" pitchFamily="34" charset="-122"/>
-                <a:cs typeface="Cambria" pitchFamily="34" charset="-120"/>
-              </a:rPr>
-              <a:t>Sentinel error</a:t>
-            </a:r>
-            <a:endParaRPr lang="en-US" sz="1700" dirty="0"/>
-          </a:p>
-        </p:txBody>
-      </p:sp>
-      <p:sp>
-        <p:nvSpPr>
-          <p:cNvPr id="9" name="Text 7"/>
-          <p:cNvSpPr/>
-          <p:nvPr/>
-        </p:nvSpPr>
-        <p:spPr>
-          <a:xfrm>
-            <a:off x="7589520" y="3474720"/>
-            <a:ext cx="3776472" cy="2286000"/>
-          </a:xfrm>
-          <a:prstGeom prst="rect">
-            <a:avLst/>
-          </a:prstGeom>
-          <a:noFill/>
-          <a:ln/>
-        </p:spPr>
-        <p:txBody>
-          <a:bodyPr wrap="square" rtlCol="0" anchor="t"/>
-          <a:lstStyle/>
-          <a:p>
-            <a:pPr indent="0" marL="0">
-              <a:lnSpc>
-                <a:spcPct val="103000"/>
-              </a:lnSpc>
-              <a:buNone/>
-            </a:pPr>
-            <a:r>
-              <a:rPr lang="en-US" sz="1350" dirty="0">
-                <a:solidFill>
-                  <a:srgbClr val="1B2433"/>
-                </a:solidFill>
-                <a:latin typeface="Calibri" pitchFamily="34" charset="0"/>
-                <a:ea typeface="Calibri" pitchFamily="34" charset="-122"/>
-                <a:cs typeface="Calibri" pitchFamily="34" charset="-120"/>
-              </a:rPr>
-              <a:t>Silencing without investigating is the #1 contributor to adverse vent events in transport. Don't let muscle memory take over.</a:t>
-            </a:r>
-            <a:endParaRPr lang="en-US" sz="1350" dirty="0"/>
-          </a:p>
-        </p:txBody>
-      </p:sp>
+      <p:pic>
+        <p:nvPicPr>
+          <p:cNvPr id="6" name="Image 0" descr="/tmp/claude-0/-home-user-amr-kc-protocols/883711fe-5eaa-500f-ae13-4d63d2ddcc7e/scratchpad/pngs/dope.png">    </p:cNvPr>
+          <p:cNvPicPr>
+            <a:picLocks noChangeAspect="1"/>
+          </p:cNvPicPr>
+          <p:nvPr/>
+        </p:nvPicPr>
+        <p:blipFill>
+          <a:blip r:embed="rId1"/>
+          <a:stretch>
+            <a:fillRect/>
+          </a:stretch>
+        </p:blipFill>
+        <p:spPr>
+          <a:xfrm>
+            <a:off x="7040880" y="2822048"/>
+            <a:ext cx="4709160" cy="1945423"/>
+          </a:xfrm>
+          <a:prstGeom prst="rect">
+            <a:avLst/>
+          </a:prstGeom>
+        </p:spPr>
+      </p:pic>
     </p:spTree>
   </p:cSld>
   <p:clrMapOvr>
@@ -39528,151 +38826,30 @@
           </a:p>
         </p:txBody>
       </p:sp>
-      <p:sp>
-        <p:nvSpPr>
-          <p:cNvPr id="6" name="Shape 4"/>
-          <p:cNvSpPr/>
-          <p:nvPr/>
-        </p:nvSpPr>
-        <p:spPr>
-          <a:xfrm>
-            <a:off x="7315200" y="2148840"/>
-            <a:ext cx="4325112" cy="3840480"/>
-          </a:xfrm>
-          <a:prstGeom prst="roundRect">
-            <a:avLst>
-              <a:gd name="adj" fmla="val 2381"/>
-            </a:avLst>
-          </a:prstGeom>
-          <a:solidFill>
-            <a:srgbClr val="FBEFDD"/>
-          </a:solidFill>
-          <a:ln/>
-        </p:spPr>
-      </p:sp>
-      <p:sp>
-        <p:nvSpPr>
-          <p:cNvPr id="7" name="Text 5"/>
-          <p:cNvSpPr/>
-          <p:nvPr/>
-        </p:nvSpPr>
-        <p:spPr>
-          <a:xfrm>
-            <a:off x="7589520" y="2377440"/>
-            <a:ext cx="3776472" cy="320040"/>
-          </a:xfrm>
-          <a:prstGeom prst="rect">
-            <a:avLst/>
-          </a:prstGeom>
-          <a:noFill/>
-          <a:ln/>
-        </p:spPr>
-        <p:txBody>
-          <a:bodyPr wrap="square" rtlCol="0" anchor="ctr"/>
-          <a:lstStyle/>
-          <a:p>
-            <a:pPr indent="0" marL="0">
-              <a:buNone/>
-            </a:pPr>
-            <a:r>
-              <a:rPr lang="en-US" sz="1200" b="1" spc="200" kern="0" dirty="0">
-                <a:solidFill>
-                  <a:srgbClr val="9C540B"/>
-                </a:solidFill>
-                <a:latin typeface="Calibri" pitchFamily="34" charset="0"/>
-                <a:ea typeface="Calibri" pitchFamily="34" charset="-122"/>
-                <a:cs typeface="Calibri" pitchFamily="34" charset="-120"/>
-              </a:rPr>
-              <a:t>CLINICAL PEARL</a:t>
-            </a:r>
-            <a:endParaRPr lang="en-US" sz="1200" dirty="0"/>
-          </a:p>
-        </p:txBody>
-      </p:sp>
-      <p:sp>
-        <p:nvSpPr>
-          <p:cNvPr id="8" name="Text 6"/>
-          <p:cNvSpPr/>
-          <p:nvPr/>
-        </p:nvSpPr>
-        <p:spPr>
-          <a:xfrm>
-            <a:off x="7589520" y="2715768"/>
-            <a:ext cx="3776472" cy="640080"/>
-          </a:xfrm>
-          <a:prstGeom prst="rect">
-            <a:avLst/>
-          </a:prstGeom>
-          <a:noFill/>
-          <a:ln/>
-        </p:spPr>
-        <p:txBody>
-          <a:bodyPr wrap="square" rtlCol="0" anchor="t"/>
-          <a:lstStyle/>
-          <a:p>
-            <a:pPr indent="0" marL="0">
-              <a:lnSpc>
-                <a:spcPct val="95000"/>
-              </a:lnSpc>
-              <a:buNone/>
-            </a:pPr>
-            <a:r>
-              <a:rPr lang="en-US" sz="1700" b="1" dirty="0">
-                <a:solidFill>
-                  <a:srgbClr val="173A68"/>
-                </a:solidFill>
-                <a:latin typeface="Cambria" pitchFamily="34" charset="0"/>
-                <a:ea typeface="Cambria" pitchFamily="34" charset="-122"/>
-                <a:cs typeface="Cambria" pitchFamily="34" charset="-120"/>
-              </a:rPr>
-              <a:t>Two knobs each</a:t>
-            </a:r>
-            <a:endParaRPr lang="en-US" sz="1700" dirty="0"/>
-          </a:p>
-        </p:txBody>
-      </p:sp>
-      <p:sp>
-        <p:nvSpPr>
-          <p:cNvPr id="9" name="Text 7"/>
-          <p:cNvSpPr/>
-          <p:nvPr/>
-        </p:nvSpPr>
-        <p:spPr>
-          <a:xfrm>
-            <a:off x="7589520" y="3474720"/>
-            <a:ext cx="3776472" cy="2286000"/>
-          </a:xfrm>
-          <a:prstGeom prst="rect">
-            <a:avLst/>
-          </a:prstGeom>
-          <a:noFill/>
-          <a:ln/>
-        </p:spPr>
-        <p:txBody>
-          <a:bodyPr wrap="square" rtlCol="0" anchor="t"/>
-          <a:lstStyle/>
-          <a:p>
-            <a:pPr indent="0" marL="0">
-              <a:lnSpc>
-                <a:spcPct val="103000"/>
-              </a:lnSpc>
-              <a:buNone/>
-            </a:pPr>
-            <a:r>
-              <a:rPr lang="en-US" sz="1350" dirty="0">
-                <a:solidFill>
-                  <a:srgbClr val="1B2433"/>
-                </a:solidFill>
-                <a:latin typeface="Calibri" pitchFamily="34" charset="0"/>
-                <a:ea typeface="Calibri" pitchFamily="34" charset="-122"/>
-                <a:cs typeface="Calibri" pitchFamily="34" charset="-120"/>
-              </a:rPr>
-              <a:t>Ventilation = RR + Vt. Oxygenation = FiO₂ + PEEP. On the final exam. At every bedside for the rest of your career.</a:t>
-            </a:r>
-            <a:endParaRPr lang="en-US" sz="1350" dirty="0"/>
-          </a:p>
-        </p:txBody>
-      </p:sp>
+      <p:pic>
+        <p:nvPicPr>
+          <p:cNvPr id="6" name="Image 0" descr="/tmp/claude-0/-home-user-amr-kc-protocols/883711fe-5eaa-500f-ae13-4d63d2ddcc7e/scratchpad/pngs/twoknobs.png">    </p:cNvPr>
+          <p:cNvPicPr>
+            <a:picLocks noChangeAspect="1"/>
+          </p:cNvPicPr>
+          <p:nvPr/>
+        </p:nvPicPr>
+        <p:blipFill>
+          <a:blip r:embed="rId1"/>
+          <a:stretch>
+            <a:fillRect/>
+          </a:stretch>
+        </p:blipFill>
+        <p:spPr>
+          <a:xfrm>
+            <a:off x="7040880" y="2822048"/>
+            <a:ext cx="4709160" cy="1945423"/>
+          </a:xfrm>
+          <a:prstGeom prst="rect">
+            <a:avLst/>
+          </a:prstGeom>
+        </p:spPr>
+      </p:pic>
     </p:spTree>
   </p:cSld>
   <p:clrMapOvr>
@@ -48014,151 +47191,30 @@
           </a:p>
         </p:txBody>
       </p:sp>
-      <p:sp>
-        <p:nvSpPr>
-          <p:cNvPr id="6" name="Shape 4"/>
-          <p:cNvSpPr/>
-          <p:nvPr/>
-        </p:nvSpPr>
-        <p:spPr>
-          <a:xfrm>
-            <a:off x="7315200" y="2148840"/>
-            <a:ext cx="4325112" cy="3840480"/>
-          </a:xfrm>
-          <a:prstGeom prst="roundRect">
-            <a:avLst>
-              <a:gd name="adj" fmla="val 2381"/>
-            </a:avLst>
-          </a:prstGeom>
-          <a:solidFill>
-            <a:srgbClr val="FBEFDD"/>
-          </a:solidFill>
-          <a:ln/>
-        </p:spPr>
-      </p:sp>
-      <p:sp>
-        <p:nvSpPr>
-          <p:cNvPr id="7" name="Text 5"/>
-          <p:cNvSpPr/>
-          <p:nvPr/>
-        </p:nvSpPr>
-        <p:spPr>
-          <a:xfrm>
-            <a:off x="7589520" y="2377440"/>
-            <a:ext cx="3776472" cy="320040"/>
-          </a:xfrm>
-          <a:prstGeom prst="rect">
-            <a:avLst/>
-          </a:prstGeom>
-          <a:noFill/>
-          <a:ln/>
-        </p:spPr>
-        <p:txBody>
-          <a:bodyPr wrap="square" rtlCol="0" anchor="ctr"/>
-          <a:lstStyle/>
-          <a:p>
-            <a:pPr indent="0" marL="0">
-              <a:buNone/>
-            </a:pPr>
-            <a:r>
-              <a:rPr lang="en-US" sz="1200" b="1" spc="200" kern="0" dirty="0">
-                <a:solidFill>
-                  <a:srgbClr val="9C540B"/>
-                </a:solidFill>
-                <a:latin typeface="Calibri" pitchFamily="34" charset="0"/>
-                <a:ea typeface="Calibri" pitchFamily="34" charset="-122"/>
-                <a:cs typeface="Calibri" pitchFamily="34" charset="-120"/>
-              </a:rPr>
-              <a:t>CLINICAL PEARL</a:t>
-            </a:r>
-            <a:endParaRPr lang="en-US" sz="1200" dirty="0"/>
-          </a:p>
-        </p:txBody>
-      </p:sp>
-      <p:sp>
-        <p:nvSpPr>
-          <p:cNvPr id="8" name="Text 6"/>
-          <p:cNvSpPr/>
-          <p:nvPr/>
-        </p:nvSpPr>
-        <p:spPr>
-          <a:xfrm>
-            <a:off x="7589520" y="2715768"/>
-            <a:ext cx="3776472" cy="640080"/>
-          </a:xfrm>
-          <a:prstGeom prst="rect">
-            <a:avLst/>
-          </a:prstGeom>
-          <a:noFill/>
-          <a:ln/>
-        </p:spPr>
-        <p:txBody>
-          <a:bodyPr wrap="square" rtlCol="0" anchor="t"/>
-          <a:lstStyle/>
-          <a:p>
-            <a:pPr indent="0" marL="0">
-              <a:lnSpc>
-                <a:spcPct val="95000"/>
-              </a:lnSpc>
-              <a:buNone/>
-            </a:pPr>
-            <a:r>
-              <a:rPr lang="en-US" sz="1700" b="1" dirty="0">
-                <a:solidFill>
-                  <a:srgbClr val="173A68"/>
-                </a:solidFill>
-                <a:latin typeface="Cambria" pitchFamily="34" charset="0"/>
-                <a:ea typeface="Cambria" pitchFamily="34" charset="-122"/>
-                <a:cs typeface="Cambria" pitchFamily="34" charset="-120"/>
-              </a:rPr>
-              <a:t>Brief disconnect</a:t>
-            </a:r>
-            <a:endParaRPr lang="en-US" sz="1700" dirty="0"/>
-          </a:p>
-        </p:txBody>
-      </p:sp>
-      <p:sp>
-        <p:nvSpPr>
-          <p:cNvPr id="9" name="Text 7"/>
-          <p:cNvSpPr/>
-          <p:nvPr/>
-        </p:nvSpPr>
-        <p:spPr>
-          <a:xfrm>
-            <a:off x="7589520" y="3474720"/>
-            <a:ext cx="3776472" cy="2286000"/>
-          </a:xfrm>
-          <a:prstGeom prst="rect">
-            <a:avLst/>
-          </a:prstGeom>
-          <a:noFill/>
-          <a:ln/>
-        </p:spPr>
-        <p:txBody>
-          <a:bodyPr wrap="square" rtlCol="0" anchor="t"/>
-          <a:lstStyle/>
-          <a:p>
-            <a:pPr indent="0" marL="0">
-              <a:lnSpc>
-                <a:spcPct val="103000"/>
-              </a:lnSpc>
-              <a:buNone/>
-            </a:pPr>
-            <a:r>
-              <a:rPr lang="en-US" sz="1350" dirty="0">
-                <a:solidFill>
-                  <a:srgbClr val="1B2433"/>
-                </a:solidFill>
-                <a:latin typeface="Calibri" pitchFamily="34" charset="0"/>
-                <a:ea typeface="Calibri" pitchFamily="34" charset="-122"/>
-                <a:cs typeface="Calibri" pitchFamily="34" charset="-120"/>
-              </a:rPr>
-              <a:t>Hypotensive asthmatic on the vent? Disconnect from the circuit for 5–10 sec. Release the trapped gas. BP often recovers in under a minute. Reconnect on slower settings.</a:t>
-            </a:r>
-            <a:endParaRPr lang="en-US" sz="1350" dirty="0"/>
-          </a:p>
-        </p:txBody>
-      </p:sp>
+      <p:pic>
+        <p:nvPicPr>
+          <p:cNvPr id="6" name="Image 0" descr="/tmp/claude-0/-home-user-amr-kc-protocols/883711fe-5eaa-500f-ae13-4d63d2ddcc7e/scratchpad/pngs/autopeep.png">    </p:cNvPr>
+          <p:cNvPicPr>
+            <a:picLocks noChangeAspect="1"/>
+          </p:cNvPicPr>
+          <p:nvPr/>
+        </p:nvPicPr>
+        <p:blipFill>
+          <a:blip r:embed="rId1"/>
+          <a:stretch>
+            <a:fillRect/>
+          </a:stretch>
+        </p:blipFill>
+        <p:spPr>
+          <a:xfrm>
+            <a:off x="7040880" y="2671510"/>
+            <a:ext cx="4709160" cy="2246501"/>
+          </a:xfrm>
+          <a:prstGeom prst="rect">
+            <a:avLst/>
+          </a:prstGeom>
+        </p:spPr>
+      </p:pic>
     </p:spTree>
   </p:cSld>
   <p:clrMapOvr>
@@ -48838,151 +47894,30 @@
           </a:p>
         </p:txBody>
       </p:sp>
-      <p:sp>
-        <p:nvSpPr>
-          <p:cNvPr id="6" name="Shape 4"/>
-          <p:cNvSpPr/>
-          <p:nvPr/>
-        </p:nvSpPr>
-        <p:spPr>
-          <a:xfrm>
-            <a:off x="7315200" y="2148840"/>
-            <a:ext cx="4325112" cy="3840480"/>
-          </a:xfrm>
-          <a:prstGeom prst="roundRect">
-            <a:avLst>
-              <a:gd name="adj" fmla="val 2381"/>
-            </a:avLst>
-          </a:prstGeom>
-          <a:solidFill>
-            <a:srgbClr val="FBEFDD"/>
-          </a:solidFill>
-          <a:ln/>
-        </p:spPr>
-      </p:sp>
-      <p:sp>
-        <p:nvSpPr>
-          <p:cNvPr id="7" name="Text 5"/>
-          <p:cNvSpPr/>
-          <p:nvPr/>
-        </p:nvSpPr>
-        <p:spPr>
-          <a:xfrm>
-            <a:off x="7589520" y="2377440"/>
-            <a:ext cx="3776472" cy="320040"/>
-          </a:xfrm>
-          <a:prstGeom prst="rect">
-            <a:avLst/>
-          </a:prstGeom>
-          <a:noFill/>
-          <a:ln/>
-        </p:spPr>
-        <p:txBody>
-          <a:bodyPr wrap="square" rtlCol="0" anchor="ctr"/>
-          <a:lstStyle/>
-          <a:p>
-            <a:pPr indent="0" marL="0">
-              <a:buNone/>
-            </a:pPr>
-            <a:r>
-              <a:rPr lang="en-US" sz="1200" b="1" spc="200" kern="0" dirty="0">
-                <a:solidFill>
-                  <a:srgbClr val="9C540B"/>
-                </a:solidFill>
-                <a:latin typeface="Calibri" pitchFamily="34" charset="0"/>
-                <a:ea typeface="Calibri" pitchFamily="34" charset="-122"/>
-                <a:cs typeface="Calibri" pitchFamily="34" charset="-120"/>
-              </a:rPr>
-              <a:t>CLINICAL PEARL</a:t>
-            </a:r>
-            <a:endParaRPr lang="en-US" sz="1200" dirty="0"/>
-          </a:p>
-        </p:txBody>
-      </p:sp>
-      <p:sp>
-        <p:nvSpPr>
-          <p:cNvPr id="8" name="Text 6"/>
-          <p:cNvSpPr/>
-          <p:nvPr/>
-        </p:nvSpPr>
-        <p:spPr>
-          <a:xfrm>
-            <a:off x="7589520" y="2715768"/>
-            <a:ext cx="3776472" cy="640080"/>
-          </a:xfrm>
-          <a:prstGeom prst="rect">
-            <a:avLst/>
-          </a:prstGeom>
-          <a:noFill/>
-          <a:ln/>
-        </p:spPr>
-        <p:txBody>
-          <a:bodyPr wrap="square" rtlCol="0" anchor="t"/>
-          <a:lstStyle/>
-          <a:p>
-            <a:pPr indent="0" marL="0">
-              <a:lnSpc>
-                <a:spcPct val="95000"/>
-              </a:lnSpc>
-              <a:buNone/>
-            </a:pPr>
-            <a:r>
-              <a:rPr lang="en-US" sz="1700" b="1" dirty="0">
-                <a:solidFill>
-                  <a:srgbClr val="173A68"/>
-                </a:solidFill>
-                <a:latin typeface="Cambria" pitchFamily="34" charset="0"/>
-                <a:ea typeface="Cambria" pitchFamily="34" charset="-122"/>
-                <a:cs typeface="Cambria" pitchFamily="34" charset="-120"/>
-              </a:rPr>
-              <a:t>FiO₂ alone won't fix shunt</a:t>
-            </a:r>
-            <a:endParaRPr lang="en-US" sz="1700" dirty="0"/>
-          </a:p>
-        </p:txBody>
-      </p:sp>
-      <p:sp>
-        <p:nvSpPr>
-          <p:cNvPr id="9" name="Text 7"/>
-          <p:cNvSpPr/>
-          <p:nvPr/>
-        </p:nvSpPr>
-        <p:spPr>
-          <a:xfrm>
-            <a:off x="7589520" y="3474720"/>
-            <a:ext cx="3776472" cy="2286000"/>
-          </a:xfrm>
-          <a:prstGeom prst="rect">
-            <a:avLst/>
-          </a:prstGeom>
-          <a:noFill/>
-          <a:ln/>
-        </p:spPr>
-        <p:txBody>
-          <a:bodyPr wrap="square" rtlCol="0" anchor="t"/>
-          <a:lstStyle/>
-          <a:p>
-            <a:pPr indent="0" marL="0">
-              <a:lnSpc>
-                <a:spcPct val="103000"/>
-              </a:lnSpc>
-              <a:buNone/>
-            </a:pPr>
-            <a:r>
-              <a:rPr lang="en-US" sz="1350" dirty="0">
-                <a:solidFill>
-                  <a:srgbClr val="1B2433"/>
-                </a:solidFill>
-                <a:latin typeface="Calibri" pitchFamily="34" charset="0"/>
-                <a:ea typeface="Calibri" pitchFamily="34" charset="-122"/>
-                <a:cs typeface="Calibri" pitchFamily="34" charset="-120"/>
-              </a:rPr>
-              <a:t>If a patient on a non-rebreather at flush rate is still hypoxic, suspect shunt. The bedside fix is PEEP, often via CPAP.</a:t>
-            </a:r>
-            <a:endParaRPr lang="en-US" sz="1350" dirty="0"/>
-          </a:p>
-        </p:txBody>
-      </p:sp>
+      <p:pic>
+        <p:nvPicPr>
+          <p:cNvPr id="6" name="Image 0" descr="/tmp/claude-0/-home-user-amr-kc-protocols/883711fe-5eaa-500f-ae13-4d63d2ddcc7e/scratchpad/pngs/vq.png">    </p:cNvPr>
+          <p:cNvPicPr>
+            <a:picLocks noChangeAspect="1"/>
+          </p:cNvPicPr>
+          <p:nvPr/>
+        </p:nvPicPr>
+        <p:blipFill>
+          <a:blip r:embed="rId1"/>
+          <a:stretch>
+            <a:fillRect/>
+          </a:stretch>
+        </p:blipFill>
+        <p:spPr>
+          <a:xfrm>
+            <a:off x="7040880" y="2822048"/>
+            <a:ext cx="4709160" cy="1945423"/>
+          </a:xfrm>
+          <a:prstGeom prst="rect">
+            <a:avLst/>
+          </a:prstGeom>
+        </p:spPr>
+      </p:pic>
     </p:spTree>
   </p:cSld>
   <p:clrMapOvr>

--- a/vta/slides/Ventilator_Academy_Full_Course.pptx
+++ b/vta/slides/Ventilator_Academy_Full_Course.pptx
@@ -47482,151 +47482,30 @@
           </a:p>
         </p:txBody>
       </p:sp>
-      <p:sp>
-        <p:nvSpPr>
-          <p:cNvPr id="6" name="Shape 4"/>
-          <p:cNvSpPr/>
-          <p:nvPr/>
-        </p:nvSpPr>
-        <p:spPr>
-          <a:xfrm>
-            <a:off x="7315200" y="2148840"/>
-            <a:ext cx="4325112" cy="3840480"/>
-          </a:xfrm>
-          <a:prstGeom prst="roundRect">
-            <a:avLst>
-              <a:gd name="adj" fmla="val 2381"/>
-            </a:avLst>
-          </a:prstGeom>
-          <a:solidFill>
-            <a:srgbClr val="E7F0FD"/>
-          </a:solidFill>
-          <a:ln/>
-        </p:spPr>
-      </p:sp>
-      <p:sp>
-        <p:nvSpPr>
-          <p:cNvPr id="7" name="Text 5"/>
-          <p:cNvSpPr/>
-          <p:nvPr/>
-        </p:nvSpPr>
-        <p:spPr>
-          <a:xfrm>
-            <a:off x="7589520" y="2377440"/>
-            <a:ext cx="3776472" cy="320040"/>
-          </a:xfrm>
-          <a:prstGeom prst="rect">
-            <a:avLst/>
-          </a:prstGeom>
-          <a:noFill/>
-          <a:ln/>
-        </p:spPr>
-        <p:txBody>
-          <a:bodyPr wrap="square" rtlCol="0" anchor="ctr"/>
-          <a:lstStyle/>
-          <a:p>
-            <a:pPr indent="0" marL="0">
-              <a:buNone/>
-            </a:pPr>
-            <a:r>
-              <a:rPr lang="en-US" sz="1200" b="1" spc="200" kern="0" dirty="0">
-                <a:solidFill>
-                  <a:srgbClr val="1B63C4"/>
-                </a:solidFill>
-                <a:latin typeface="Calibri" pitchFamily="34" charset="0"/>
-                <a:ea typeface="Calibri" pitchFamily="34" charset="-122"/>
-                <a:cs typeface="Calibri" pitchFamily="34" charset="-120"/>
-              </a:rPr>
-              <a:t>EVIDENCE</a:t>
-            </a:r>
-            <a:endParaRPr lang="en-US" sz="1200" dirty="0"/>
-          </a:p>
-        </p:txBody>
-      </p:sp>
-      <p:sp>
-        <p:nvSpPr>
-          <p:cNvPr id="8" name="Text 6"/>
-          <p:cNvSpPr/>
-          <p:nvPr/>
-        </p:nvSpPr>
-        <p:spPr>
-          <a:xfrm>
-            <a:off x="7589520" y="2715768"/>
-            <a:ext cx="3776472" cy="640080"/>
-          </a:xfrm>
-          <a:prstGeom prst="rect">
-            <a:avLst/>
-          </a:prstGeom>
-          <a:noFill/>
-          <a:ln/>
-        </p:spPr>
-        <p:txBody>
-          <a:bodyPr wrap="square" rtlCol="0" anchor="t"/>
-          <a:lstStyle/>
-          <a:p>
-            <a:pPr indent="0" marL="0">
-              <a:lnSpc>
-                <a:spcPct val="95000"/>
-              </a:lnSpc>
-              <a:buNone/>
-            </a:pPr>
-            <a:r>
-              <a:rPr lang="en-US" sz="1700" b="1" dirty="0">
-                <a:solidFill>
-                  <a:srgbClr val="173A68"/>
-                </a:solidFill>
-                <a:latin typeface="Cambria" pitchFamily="34" charset="0"/>
-                <a:ea typeface="Cambria" pitchFamily="34" charset="-122"/>
-                <a:cs typeface="Cambria" pitchFamily="34" charset="-120"/>
-              </a:rPr>
-              <a:t>ARDSNet PEEP/FiO₂ Lower-PEEP Table</a:t>
-            </a:r>
-            <a:endParaRPr lang="en-US" sz="1700" dirty="0"/>
-          </a:p>
-        </p:txBody>
-      </p:sp>
-      <p:sp>
-        <p:nvSpPr>
-          <p:cNvPr id="9" name="Text 7"/>
-          <p:cNvSpPr/>
-          <p:nvPr/>
-        </p:nvSpPr>
-        <p:spPr>
-          <a:xfrm>
-            <a:off x="7589520" y="3474720"/>
-            <a:ext cx="3776472" cy="2286000"/>
-          </a:xfrm>
-          <a:prstGeom prst="rect">
-            <a:avLst/>
-          </a:prstGeom>
-          <a:noFill/>
-          <a:ln/>
-        </p:spPr>
-        <p:txBody>
-          <a:bodyPr wrap="square" rtlCol="0" anchor="t"/>
-          <a:lstStyle/>
-          <a:p>
-            <a:pPr indent="0" marL="0">
-              <a:lnSpc>
-                <a:spcPct val="103000"/>
-              </a:lnSpc>
-              <a:buNone/>
-            </a:pPr>
-            <a:r>
-              <a:rPr lang="en-US" sz="1350" dirty="0">
-                <a:solidFill>
-                  <a:srgbClr val="1B2433"/>
-                </a:solidFill>
-                <a:latin typeface="Calibri" pitchFamily="34" charset="0"/>
-                <a:ea typeface="Calibri" pitchFamily="34" charset="-122"/>
-                <a:cs typeface="Calibri" pitchFamily="34" charset="-120"/>
-              </a:rPr>
-              <a:t>FiO₂ 0.3 → PEEP 5. FiO₂ 0.5 → PEEP 8–10. FiO₂ 0.7 → PEEP 10–14. FiO₂ 1.0 → PEEP 18–24. Carry the card.</a:t>
-            </a:r>
-            <a:endParaRPr lang="en-US" sz="1350" dirty="0"/>
-          </a:p>
-        </p:txBody>
-      </p:sp>
+      <p:pic>
+        <p:nvPicPr>
+          <p:cNvPr id="6" name="Image 0" descr="/tmp/claude-0/-home-user-amr-kc-protocols/883711fe-5eaa-500f-ae13-4d63d2ddcc7e/scratchpad/pngs/peep_fio2.png">    </p:cNvPr>
+          <p:cNvPicPr>
+            <a:picLocks noChangeAspect="1"/>
+          </p:cNvPicPr>
+          <p:nvPr/>
+        </p:nvPicPr>
+        <p:blipFill>
+          <a:blip r:embed="rId1"/>
+          <a:stretch>
+            <a:fillRect/>
+          </a:stretch>
+        </p:blipFill>
+        <p:spPr>
+          <a:xfrm>
+            <a:off x="7040880" y="2746393"/>
+            <a:ext cx="4709160" cy="2096734"/>
+          </a:xfrm>
+          <a:prstGeom prst="rect">
+            <a:avLst/>
+          </a:prstGeom>
+        </p:spPr>
+      </p:pic>
     </p:spTree>
   </p:cSld>
   <p:clrMapOvr>
